--- a/Telemetry_Aware_Resilient_NIDPS_Review1.pptx
+++ b/Telemetry_Aware_Resilient_NIDPS_Review1.pptx
@@ -17,6 +17,9 @@
     <p:sldId id="265" r:id="rId16"/>
     <p:sldId id="266" r:id="rId17"/>
     <p:sldId id="267" r:id="rId18"/>
+    <p:sldId id="268" r:id="rId19"/>
+    <p:sldId id="269" r:id="rId20"/>
+    <p:sldId id="270" r:id="rId21"/>
   </p:sldIdLst>
   <p:sldSz cx="12191695" cy="6858000" type="screen4x3"/>
   <p:notesSz cx="6858000" cy="9144000"/>
@@ -3150,7 +3153,7 @@
         </p:nvSpPr>
         <p:spPr>
           <a:xfrm>
-            <a:off x="914400" y="1005840"/>
+            <a:off x="914400" y="960120"/>
             <a:ext cx="10362895" cy="2651760"/>
           </a:xfrm>
           <a:prstGeom prst="rect">
@@ -3175,7 +3178,7 @@
               </a:defRPr>
             </a:pPr>
             <a:r>
-              <a:t>CAPSTONE / RESEARCH PROJECT • REVIEW 1 PRESENTATION</a:t>
+              <a:t>CAPSTONE / RESEARCH DEFENSE • REVIEW 1 PRESENTATION</a:t>
             </a:r>
           </a:p>
           <a:p>
@@ -3502,7 +3505,7 @@
               </a:defRPr>
             </a:pPr>
             <a:r>
-              <a:t>Vellore Institute of Technology (VIT), Vellore • Academic Year 2025-2026</a:t>
+              <a:t>Vellore Institute of Technology (VIT), Vellore • Live Demo: https://resilient-nidps.streamlit.app</a:t>
             </a:r>
           </a:p>
         </p:txBody>
@@ -3555,7 +3558,7 @@
               </a:defRPr>
             </a:pPr>
             <a:r>
-              <a:t>PROTOTYPE &amp; ARTIFACTS</a:t>
+              <a:t>AUTOMATED THREAT MITIGATION</a:t>
             </a:r>
           </a:p>
         </p:txBody>
@@ -3590,7 +3593,7 @@
               </a:defRPr>
             </a:pPr>
             <a:r>
-              <a:t>Live Web Deployment &amp; Open-Source Artifacts</a:t>
+              <a:t>Dual-Action Adaptive Prevention &amp; Firewall Integration</a:t>
             </a:r>
           </a:p>
         </p:txBody>
@@ -3604,7 +3607,323 @@
         <p:spPr>
           <a:xfrm>
             <a:off x="731520" y="1371600"/>
-            <a:ext cx="5212080" cy="4846320"/>
+            <a:ext cx="5212080" cy="3931920"/>
+          </a:xfrm>
+          <a:prstGeom prst="roundRect">
+            <a:avLst/>
+          </a:prstGeom>
+          <a:solidFill>
+            <a:srgbClr val="FEF2F2"/>
+          </a:solidFill>
+          <a:ln w="19050">
+            <a:solidFill>
+              <a:srgbClr val="FECACA"/>
+            </a:solidFill>
+          </a:ln>
+        </p:spPr>
+        <p:style>
+          <a:lnRef idx="1">
+            <a:schemeClr val="accent1"/>
+          </a:lnRef>
+          <a:fillRef idx="3">
+            <a:schemeClr val="accent1"/>
+          </a:fillRef>
+          <a:effectRef idx="2">
+            <a:schemeClr val="accent1"/>
+          </a:effectRef>
+          <a:fontRef idx="minor">
+            <a:schemeClr val="lt1"/>
+          </a:fontRef>
+        </p:style>
+        <p:txBody>
+          <a:bodyPr rtlCol="0" anchor="ctr"/>
+          <a:lstStyle/>
+          <a:p>
+            <a:pPr algn="ctr"/>
+          </a:p>
+        </p:txBody>
+      </p:sp>
+      <p:sp>
+        <p:nvSpPr>
+          <p:cNvPr id="5" name="TextBox 4"/>
+          <p:cNvSpPr txBox="1"/>
+          <p:nvPr/>
+        </p:nvSpPr>
+        <p:spPr>
+          <a:xfrm>
+            <a:off x="960120" y="1554480"/>
+            <a:ext cx="4754880" cy="3566160"/>
+          </a:xfrm>
+          <a:prstGeom prst="rect">
+            <a:avLst/>
+          </a:prstGeom>
+          <a:noFill/>
+        </p:spPr>
+        <p:txBody>
+          <a:bodyPr wrap="square">
+            <a:spAutoFit/>
+          </a:bodyPr>
+          <a:lstStyle/>
+          <a:p>
+            <a:pPr>
+              <a:spcAft>
+                <a:spcPts val="600"/>
+              </a:spcAft>
+              <a:defRPr sz="1200" b="1">
+                <a:solidFill>
+                  <a:srgbClr val="DC2626"/>
+                </a:solidFill>
+              </a:defRPr>
+            </a:pPr>
+            <a:r>
+              <a:t>ACTION 1: HARD IP QUARANTINE (HIGH SEVERITY)</a:t>
+            </a:r>
+          </a:p>
+          <a:p>
+            <a:pPr>
+              <a:spcAft>
+                <a:spcPts val="400"/>
+              </a:spcAft>
+              <a:defRPr sz="1000">
+                <a:solidFill>
+                  <a:srgbClr val="0F172A"/>
+                </a:solidFill>
+              </a:defRPr>
+            </a:pPr>
+            <a:r>
+              <a:t>• Target Threats: DDoS LOIC-HTTP Floods, Volumetric SYN Floods, Brute-Force SSH/RDP.</a:t>
+            </a:r>
+          </a:p>
+          <a:p>
+            <a:pPr>
+              <a:spcAft>
+                <a:spcPts val="400"/>
+              </a:spcAft>
+              <a:defRPr sz="1000">
+                <a:solidFill>
+                  <a:srgbClr val="0F172A"/>
+                </a:solidFill>
+              </a:defRPr>
+            </a:pPr>
+            <a:r>
+              <a:t>• Mechanism: Dynamically blacklists the offending Source IP for 30 minutes (1800s expiration timer) across kernel firewalls.</a:t>
+            </a:r>
+          </a:p>
+          <a:p>
+            <a:pPr>
+              <a:spcAft>
+                <a:spcPts val="400"/>
+              </a:spcAft>
+              <a:defRPr sz="1000">
+                <a:solidFill>
+                  <a:srgbClr val="0F172A"/>
+                </a:solidFill>
+              </a:defRPr>
+            </a:pPr>
+            <a:r>
+              <a:t>• Linux Command: iptables -A INPUT -s &lt;src_ip&gt; -j DROP</a:t>
+            </a:r>
+          </a:p>
+          <a:p>
+            <a:pPr>
+              <a:spcAft>
+                <a:spcPts val="400"/>
+              </a:spcAft>
+              <a:defRPr sz="1000">
+                <a:solidFill>
+                  <a:srgbClr val="0F172A"/>
+                </a:solidFill>
+              </a:defRPr>
+            </a:pPr>
+            <a:r>
+              <a:t>• Windows Command: New-NetFirewallRule -DisplayName 'TIDPS_Block_&lt;src_ip&gt;' -Direction Inbound -Action Block -RemoteAddress &lt;src_ip&gt;</a:t>
+            </a:r>
+          </a:p>
+          <a:p>
+            <a:pPr>
+              <a:spcAft>
+                <a:spcPts val="400"/>
+              </a:spcAft>
+              <a:defRPr sz="1000">
+                <a:solidFill>
+                  <a:srgbClr val="0F172A"/>
+                </a:solidFill>
+              </a:defRPr>
+            </a:pPr>
+            <a:r>
+              <a:t>• Result: Stops bandwidth exhaustion at line-rate without human intervention.</a:t>
+            </a:r>
+          </a:p>
+        </p:txBody>
+      </p:sp>
+      <p:sp>
+        <p:nvSpPr>
+          <p:cNvPr id="6" name="Rounded Rectangle 5"/>
+          <p:cNvSpPr/>
+          <p:nvPr/>
+        </p:nvSpPr>
+        <p:spPr>
+          <a:xfrm>
+            <a:off x="6217920" y="1371600"/>
+            <a:ext cx="5212080" cy="3931920"/>
+          </a:xfrm>
+          <a:prstGeom prst="roundRect">
+            <a:avLst/>
+          </a:prstGeom>
+          <a:solidFill>
+            <a:srgbClr val="FEF9C3"/>
+          </a:solidFill>
+          <a:ln w="19050">
+            <a:solidFill>
+              <a:srgbClr val="FDE047"/>
+            </a:solidFill>
+          </a:ln>
+        </p:spPr>
+        <p:style>
+          <a:lnRef idx="1">
+            <a:schemeClr val="accent1"/>
+          </a:lnRef>
+          <a:fillRef idx="3">
+            <a:schemeClr val="accent1"/>
+          </a:fillRef>
+          <a:effectRef idx="2">
+            <a:schemeClr val="accent1"/>
+          </a:effectRef>
+          <a:fontRef idx="minor">
+            <a:schemeClr val="lt1"/>
+          </a:fontRef>
+        </p:style>
+        <p:txBody>
+          <a:bodyPr rtlCol="0" anchor="ctr"/>
+          <a:lstStyle/>
+          <a:p>
+            <a:pPr algn="ctr"/>
+          </a:p>
+        </p:txBody>
+      </p:sp>
+      <p:sp>
+        <p:nvSpPr>
+          <p:cNvPr id="7" name="TextBox 6"/>
+          <p:cNvSpPr txBox="1"/>
+          <p:nvPr/>
+        </p:nvSpPr>
+        <p:spPr>
+          <a:xfrm>
+            <a:off x="6446520" y="1554480"/>
+            <a:ext cx="4754880" cy="3566160"/>
+          </a:xfrm>
+          <a:prstGeom prst="rect">
+            <a:avLst/>
+          </a:prstGeom>
+          <a:noFill/>
+        </p:spPr>
+        <p:txBody>
+          <a:bodyPr wrap="square">
+            <a:spAutoFit/>
+          </a:bodyPr>
+          <a:lstStyle/>
+          <a:p>
+            <a:pPr>
+              <a:spcAft>
+                <a:spcPts val="600"/>
+              </a:spcAft>
+              <a:defRPr sz="1200" b="1">
+                <a:solidFill>
+                  <a:srgbClr val="EA580C"/>
+                </a:solidFill>
+              </a:defRPr>
+            </a:pPr>
+            <a:r>
+              <a:t>ACTION 2: TOKEN-BUCKET RATE LIMITING (MEDIUM SEVERITY)</a:t>
+            </a:r>
+          </a:p>
+          <a:p>
+            <a:pPr>
+              <a:spcAft>
+                <a:spcPts val="400"/>
+              </a:spcAft>
+              <a:defRPr sz="1000">
+                <a:solidFill>
+                  <a:srgbClr val="0F172A"/>
+                </a:solidFill>
+              </a:defRPr>
+            </a:pPr>
+            <a:r>
+              <a:t>• Target Threats: PortScan (Horizontal &amp; Vertical Probing), Slowloris, Reconnaissance.</a:t>
+            </a:r>
+          </a:p>
+          <a:p>
+            <a:pPr>
+              <a:spcAft>
+                <a:spcPts val="400"/>
+              </a:spcAft>
+              <a:defRPr sz="1000">
+                <a:solidFill>
+                  <a:srgbClr val="0F172A"/>
+                </a:solidFill>
+              </a:defRPr>
+            </a:pPr>
+            <a:r>
+              <a:t>• Problem with Hard Drop: Reconnaissance often originates from shared university NAT gateways or mobile carrier IPs. Hard IP quarantine would block thousands of innocent students!</a:t>
+            </a:r>
+          </a:p>
+          <a:p>
+            <a:pPr>
+              <a:spcAft>
+                <a:spcPts val="400"/>
+              </a:spcAft>
+              <a:defRPr sz="1000">
+                <a:solidFill>
+                  <a:srgbClr val="0F172A"/>
+                </a:solidFill>
+              </a:defRPr>
+            </a:pPr>
+            <a:r>
+              <a:t>• Adaptive Solution: Applies token-bucket rate limiting (5 packets/second) to the specific flow 5-tuple.</a:t>
+            </a:r>
+          </a:p>
+          <a:p>
+            <a:pPr>
+              <a:spcAft>
+                <a:spcPts val="400"/>
+              </a:spcAft>
+              <a:defRPr sz="1000">
+                <a:solidFill>
+                  <a:srgbClr val="0F172A"/>
+                </a:solidFill>
+              </a:defRPr>
+            </a:pPr>
+            <a:r>
+              <a:t>• Linux TC Rule: tc qdisc add dev eth0 root handle 1: cbq bandwidth 100Mbit ...</a:t>
+            </a:r>
+          </a:p>
+          <a:p>
+            <a:pPr>
+              <a:spcAft>
+                <a:spcPts val="400"/>
+              </a:spcAft>
+              <a:defRPr sz="1000">
+                <a:solidFill>
+                  <a:srgbClr val="0F172A"/>
+                </a:solidFill>
+              </a:defRPr>
+            </a:pPr>
+            <a:r>
+              <a:t>• Result: Renders reconnaissance probes computationally useless while preserving legitimate shared traffic.</a:t>
+            </a:r>
+          </a:p>
+        </p:txBody>
+      </p:sp>
+      <p:sp>
+        <p:nvSpPr>
+          <p:cNvPr id="8" name="Rounded Rectangle 7"/>
+          <p:cNvSpPr/>
+          <p:nvPr/>
+        </p:nvSpPr>
+        <p:spPr>
+          <a:xfrm>
+            <a:off x="731520" y="5440680"/>
+            <a:ext cx="10728655" cy="960120"/>
           </a:xfrm>
           <a:prstGeom prst="roundRect">
             <a:avLst/>
@@ -3642,14 +3961,14 @@
       </p:sp>
       <p:sp>
         <p:nvSpPr>
-          <p:cNvPr id="5" name="TextBox 4"/>
+          <p:cNvPr id="9" name="TextBox 8"/>
           <p:cNvSpPr txBox="1"/>
           <p:nvPr/>
         </p:nvSpPr>
         <p:spPr>
           <a:xfrm>
-            <a:off x="960120" y="1554480"/>
-            <a:ext cx="4754880" cy="4480560"/>
+            <a:off x="960120" y="5532120"/>
+            <a:ext cx="10241280" cy="777240"/>
           </a:xfrm>
           <a:prstGeom prst="rect">
             <a:avLst/>
@@ -3663,24 +3982,18 @@
           <a:lstStyle/>
           <a:p>
             <a:pPr>
-              <a:spcAft>
-                <a:spcPts val="600"/>
-              </a:spcAft>
-              <a:defRPr sz="1200" b="1">
+              <a:defRPr sz="1000" b="1">
                 <a:solidFill>
                   <a:srgbClr val="2563EB"/>
                 </a:solidFill>
               </a:defRPr>
             </a:pPr>
             <a:r>
-              <a:t>LIVE CLOUD DEMO PROTOTYPE</a:t>
-            </a:r>
-          </a:p>
-          <a:p>
-            <a:pPr>
-              <a:spcAft>
-                <a:spcPts val="600"/>
-              </a:spcAft>
+              <a:t>REAL-TIME INCIDENT LEDGER &amp; SYNCHRONIZATION:</a:t>
+            </a:r>
+          </a:p>
+          <a:p>
+            <a:pPr>
               <a:defRPr sz="1000">
                 <a:solidFill>
                   <a:srgbClr val="0F172A"/>
@@ -3688,225 +4001,7 @@
               </a:defRPr>
             </a:pPr>
             <a:r>
-              <a:t>• Public Web Link: https://resilient-nidps.streamlit.app</a:t>
-            </a:r>
-          </a:p>
-          <a:p>
-            <a:pPr>
-              <a:spcAft>
-                <a:spcPts val="600"/>
-              </a:spcAft>
-              <a:defRPr sz="1000">
-                <a:solidFill>
-                  <a:srgbClr val="0F172A"/>
-                </a:solidFill>
-              </a:defRPr>
-            </a:pPr>
-            <a:r>
-              <a:t>• Hosting Infrastructure: Streamlit Community Cloud (AWS Containerized Engine, 24/7 Global Access).</a:t>
-            </a:r>
-          </a:p>
-          <a:p>
-            <a:pPr>
-              <a:spcAft>
-                <a:spcPts val="600"/>
-              </a:spcAft>
-              <a:defRPr sz="1000">
-                <a:solidFill>
-                  <a:srgbClr val="0F172A"/>
-                </a:solidFill>
-              </a:defRPr>
-            </a:pPr>
-            <a:r>
-              <a:t>• Live Interactive Controls: Allows evaluators to slide telemetry health Q from 1.0 down to 0.0, witnessing real-time Mode Arbiter transitions and dynamic firewall quarantine ledger updates.</a:t>
-            </a:r>
-          </a:p>
-          <a:p>
-            <a:pPr>
-              <a:spcAft>
-                <a:spcPts val="600"/>
-              </a:spcAft>
-              <a:defRPr sz="1000">
-                <a:solidFill>
-                  <a:srgbClr val="0F172A"/>
-                </a:solidFill>
-              </a:defRPr>
-            </a:pPr>
-            <a:r>
-              <a:t>• Zero Installation Required: Examiners can test the prototype on any laptop, tablet, or phone without installing Python or packages.</a:t>
-            </a:r>
-          </a:p>
-          <a:p>
-            <a:pPr>
-              <a:spcAft>
-                <a:spcPts val="600"/>
-              </a:spcAft>
-              <a:defRPr sz="1000">
-                <a:solidFill>
-                  <a:srgbClr val="0F172A"/>
-                </a:solidFill>
-              </a:defRPr>
-            </a:pPr>
-            <a:r>
-              <a:t>• Synchronized IST Ledger: Incident ledger timestamps update in real time with 1-click ledger clearing.</a:t>
-            </a:r>
-          </a:p>
-        </p:txBody>
-      </p:sp>
-      <p:sp>
-        <p:nvSpPr>
-          <p:cNvPr id="6" name="Rounded Rectangle 5"/>
-          <p:cNvSpPr/>
-          <p:nvPr/>
-        </p:nvSpPr>
-        <p:spPr>
-          <a:xfrm>
-            <a:off x="6217920" y="1371600"/>
-            <a:ext cx="5212080" cy="4846320"/>
-          </a:xfrm>
-          <a:prstGeom prst="roundRect">
-            <a:avLst/>
-          </a:prstGeom>
-          <a:solidFill>
-            <a:srgbClr val="FFFFFF"/>
-          </a:solidFill>
-          <a:ln w="19050">
-            <a:solidFill>
-              <a:srgbClr val="E2E8F0"/>
-            </a:solidFill>
-          </a:ln>
-        </p:spPr>
-        <p:style>
-          <a:lnRef idx="1">
-            <a:schemeClr val="accent1"/>
-          </a:lnRef>
-          <a:fillRef idx="3">
-            <a:schemeClr val="accent1"/>
-          </a:fillRef>
-          <a:effectRef idx="2">
-            <a:schemeClr val="accent1"/>
-          </a:effectRef>
-          <a:fontRef idx="minor">
-            <a:schemeClr val="lt1"/>
-          </a:fontRef>
-        </p:style>
-        <p:txBody>
-          <a:bodyPr rtlCol="0" anchor="ctr"/>
-          <a:lstStyle/>
-          <a:p>
-            <a:pPr algn="ctr"/>
-          </a:p>
-        </p:txBody>
-      </p:sp>
-      <p:sp>
-        <p:nvSpPr>
-          <p:cNvPr id="7" name="TextBox 6"/>
-          <p:cNvSpPr txBox="1"/>
-          <p:nvPr/>
-        </p:nvSpPr>
-        <p:spPr>
-          <a:xfrm>
-            <a:off x="6446520" y="1554480"/>
-            <a:ext cx="4754880" cy="4480560"/>
-          </a:xfrm>
-          <a:prstGeom prst="rect">
-            <a:avLst/>
-          </a:prstGeom>
-          <a:noFill/>
-        </p:spPr>
-        <p:txBody>
-          <a:bodyPr wrap="square">
-            <a:spAutoFit/>
-          </a:bodyPr>
-          <a:lstStyle/>
-          <a:p>
-            <a:pPr>
-              <a:spcAft>
-                <a:spcPts val="600"/>
-              </a:spcAft>
-              <a:defRPr sz="1200" b="1">
-                <a:solidFill>
-                  <a:srgbClr val="2563EB"/>
-                </a:solidFill>
-              </a:defRPr>
-            </a:pPr>
-            <a:r>
-              <a:t>OPEN-SOURCE CODEBASE &amp; PAPERS</a:t>
-            </a:r>
-          </a:p>
-          <a:p>
-            <a:pPr>
-              <a:spcAft>
-                <a:spcPts val="600"/>
-              </a:spcAft>
-              <a:defRPr sz="1000">
-                <a:solidFill>
-                  <a:srgbClr val="0F172A"/>
-                </a:solidFill>
-              </a:defRPr>
-            </a:pPr>
-            <a:r>
-              <a:t>• GitHub Repository: https://github.com/THARAKESHA/resilient-nidps</a:t>
-            </a:r>
-          </a:p>
-          <a:p>
-            <a:pPr>
-              <a:spcAft>
-                <a:spcPts val="600"/>
-              </a:spcAft>
-              <a:defRPr sz="1000">
-                <a:solidFill>
-                  <a:srgbClr val="0F172A"/>
-                </a:solidFill>
-              </a:defRPr>
-            </a:pPr>
-            <a:r>
-              <a:t>• Research Paper Draft: Full IEEE Conference paper draft completed (manuscript.tex, references.bib, and compiled PDF).</a:t>
-            </a:r>
-          </a:p>
-          <a:p>
-            <a:pPr>
-              <a:spcAft>
-                <a:spcPts val="600"/>
-              </a:spcAft>
-              <a:defRPr sz="1000">
-                <a:solidFill>
-                  <a:srgbClr val="0F172A"/>
-                </a:solidFill>
-              </a:defRPr>
-            </a:pPr>
-            <a:r>
-              <a:t>• Formally Calibrated Generator: Full 78-feature statistical mathematical generator matching CICFlowMeter formulas.</a:t>
-            </a:r>
-          </a:p>
-          <a:p>
-            <a:pPr>
-              <a:spcAft>
-                <a:spcPts val="600"/>
-              </a:spcAft>
-              <a:defRPr sz="1000">
-                <a:solidFill>
-                  <a:srgbClr val="0F172A"/>
-                </a:solidFill>
-              </a:defRPr>
-            </a:pPr>
-            <a:r>
-              <a:t>• One-Click Launchers: Provided with run_app.bat (Windows) and run_app.sh (Linux).</a:t>
-            </a:r>
-          </a:p>
-          <a:p>
-            <a:pPr>
-              <a:spcAft>
-                <a:spcPts val="600"/>
-              </a:spcAft>
-              <a:defRPr sz="1000">
-                <a:solidFill>
-                  <a:srgbClr val="0F172A"/>
-                </a:solidFill>
-              </a:defRPr>
-            </a:pPr>
-            <a:r>
-              <a:t>• Pretrained Weights: Saved checkpoints for Mode 1, Mode 2, Mode 3, and Baselines stored in src/saved_models/.</a:t>
+              <a:t>All security actions are committed to an immutable real-time ledger synchronized in Indian Standard Time (IST), displaying Source IP, Threat Classification, Triggered Mode, Action Taken, and live PowerShell / iptables execution blocks.</a:t>
             </a:r>
           </a:p>
         </p:txBody>
@@ -3959,7 +4054,7 @@
               </a:defRPr>
             </a:pPr>
             <a:r>
-              <a:t>PROJECT MILESTONES</a:t>
+              <a:t>EMPIRICAL EVALUATION</a:t>
             </a:r>
           </a:p>
         </p:txBody>
@@ -3994,7 +4089,7 @@
               </a:defRPr>
             </a:pPr>
             <a:r>
-              <a:t>Review 1 Accomplishments &amp; Future Roadmap</a:t>
+              <a:t>Experimental Benchmarks &amp; Visual Resilience Curves (3,750 Flows)</a:t>
             </a:r>
           </a:p>
         </p:txBody>
@@ -4008,7 +4103,7 @@
         <p:spPr>
           <a:xfrm>
             <a:off x="731520" y="1371600"/>
-            <a:ext cx="5212080" cy="4846320"/>
+            <a:ext cx="5120640" cy="4846320"/>
           </a:xfrm>
           <a:prstGeom prst="roundRect">
             <a:avLst/>
@@ -4044,16 +4139,40 @@
           </a:p>
         </p:txBody>
       </p:sp>
-      <p:sp>
-        <p:nvSpPr>
-          <p:cNvPr id="5" name="TextBox 4"/>
+      <p:pic>
+        <p:nvPicPr>
+          <p:cNvPr id="5" name="Picture 4" descr="resilience_curves.png"/>
+          <p:cNvPicPr>
+            <a:picLocks noChangeAspect="1"/>
+          </p:cNvPicPr>
+          <p:nvPr/>
+        </p:nvPicPr>
+        <p:blipFill>
+          <a:blip r:embed="rId2"/>
+          <a:stretch>
+            <a:fillRect/>
+          </a:stretch>
+        </p:blipFill>
+        <p:spPr>
+          <a:xfrm>
+            <a:off x="822960" y="1463040"/>
+            <a:ext cx="4937760" cy="4114800"/>
+          </a:xfrm>
+          <a:prstGeom prst="rect">
+            <a:avLst/>
+          </a:prstGeom>
+        </p:spPr>
+      </p:pic>
+      <p:sp>
+        <p:nvSpPr>
+          <p:cNvPr id="6" name="TextBox 5"/>
           <p:cNvSpPr txBox="1"/>
           <p:nvPr/>
         </p:nvSpPr>
         <p:spPr>
           <a:xfrm>
-            <a:off x="960120" y="1554480"/>
-            <a:ext cx="4754880" cy="4480560"/>
+            <a:off x="822960" y="5623560"/>
+            <a:ext cx="4937760" cy="502920"/>
           </a:xfrm>
           <a:prstGeom prst="rect">
             <a:avLst/>
@@ -4061,127 +4180,34 @@
           <a:noFill/>
         </p:spPr>
         <p:txBody>
-          <a:bodyPr wrap="square">
+          <a:bodyPr wrap="none">
             <a:spAutoFit/>
           </a:bodyPr>
           <a:lstStyle/>
           <a:p>
-            <a:pPr>
-              <a:spcAft>
-                <a:spcPts val="600"/>
-              </a:spcAft>
-              <a:defRPr sz="1200" b="1">
-                <a:solidFill>
-                  <a:srgbClr val="16A34A"/>
-                </a:solidFill>
-              </a:defRPr>
-            </a:pPr>
-            <a:r>
-              <a:t>REVIEW 1: COMPLETED DELIVERABLES</a:t>
-            </a:r>
-          </a:p>
-          <a:p>
-            <a:pPr>
-              <a:spcAft>
-                <a:spcPts val="500"/>
-              </a:spcAft>
-              <a:defRPr sz="1000">
-                <a:solidFill>
-                  <a:srgbClr val="0F172A"/>
-                </a:solidFill>
-              </a:defRPr>
-            </a:pPr>
-            <a:r>
-              <a:t>✔ Problem Formulation: Defined telemetry degradation physics &amp; failure models (L0 to L3).</a:t>
-            </a:r>
-          </a:p>
-          <a:p>
-            <a:pPr>
-              <a:spcAft>
-                <a:spcPts val="500"/>
-              </a:spcAft>
-              <a:defRPr sz="1000">
-                <a:solidFill>
-                  <a:srgbClr val="0F172A"/>
-                </a:solidFill>
-              </a:defRPr>
-            </a:pPr>
-            <a:r>
-              <a:t>✔ Literature Survey: Comparative review across 4 major foundational baselines &amp; datasets.</a:t>
-            </a:r>
-          </a:p>
-          <a:p>
-            <a:pPr>
-              <a:spcAft>
-                <a:spcPts val="500"/>
-              </a:spcAft>
-              <a:defRPr sz="1000">
-                <a:solidFill>
-                  <a:srgbClr val="0F172A"/>
-                </a:solidFill>
-              </a:defRPr>
-            </a:pPr>
-            <a:r>
-              <a:t>✔ Mathematical Formulation: Designed TQM Quality score Q(t) and Mode Arbiter with ±0.05 hysteresis.</a:t>
-            </a:r>
-          </a:p>
-          <a:p>
-            <a:pPr>
-              <a:spcAft>
-                <a:spcPts val="500"/>
-              </a:spcAft>
-              <a:defRPr sz="1000">
-                <a:solidFill>
-                  <a:srgbClr val="0F172A"/>
-                </a:solidFill>
-              </a:defRPr>
-            </a:pPr>
-            <a:r>
-              <a:t>✔ Model Zoo Implementation: Trained Mode 1 (78 feat), Mode 2 (16 feat), and Mode 3 (Deterministic rules).</a:t>
-            </a:r>
-          </a:p>
-          <a:p>
-            <a:pPr>
-              <a:spcAft>
-                <a:spcPts val="500"/>
-              </a:spcAft>
-              <a:defRPr sz="1000">
-                <a:solidFill>
-                  <a:srgbClr val="0F172A"/>
-                </a:solidFill>
-              </a:defRPr>
-            </a:pPr>
-            <a:r>
-              <a:t>✔ Empirical Benchmarking: Evaluated 3,750 test flows, proving 0.8843 DCM retention.</a:t>
-            </a:r>
-          </a:p>
-          <a:p>
-            <a:pPr>
-              <a:spcAft>
-                <a:spcPts val="500"/>
-              </a:spcAft>
-              <a:defRPr sz="1000">
-                <a:solidFill>
-                  <a:srgbClr val="0F172A"/>
-                </a:solidFill>
-              </a:defRPr>
-            </a:pPr>
-            <a:r>
-              <a:t>✔ Working Prototype &amp; Deployment: Deployed live web UI on Streamlit Cloud &amp; published GitHub repository.</a:t>
-            </a:r>
-          </a:p>
-        </p:txBody>
-      </p:sp>
-      <p:sp>
-        <p:nvSpPr>
-          <p:cNvPr id="6" name="Rounded Rectangle 5"/>
+            <a:pPr algn="ctr">
+              <a:defRPr sz="950" b="1">
+                <a:solidFill>
+                  <a:srgbClr val="2563EB"/>
+                </a:solidFill>
+              </a:defRPr>
+            </a:pPr>
+            <a:r>
+              <a:t>Empirical Resilience Curves across Degradation Tiers (L0 to L3)</a:t>
+            </a:r>
+          </a:p>
+        </p:txBody>
+      </p:sp>
+      <p:sp>
+        <p:nvSpPr>
+          <p:cNvPr id="7" name="Rounded Rectangle 6"/>
           <p:cNvSpPr/>
           <p:nvPr/>
         </p:nvSpPr>
         <p:spPr>
           <a:xfrm>
-            <a:off x="6217920" y="1371600"/>
-            <a:ext cx="5212080" cy="4846320"/>
+            <a:off x="6035040" y="1371600"/>
+            <a:ext cx="5425135" cy="4846320"/>
           </a:xfrm>
           <a:prstGeom prst="roundRect">
             <a:avLst/>
@@ -4217,16 +4243,630 @@
           </a:p>
         </p:txBody>
       </p:sp>
-      <p:sp>
-        <p:nvSpPr>
-          <p:cNvPr id="7" name="TextBox 6"/>
+      <p:graphicFrame>
+        <p:nvGraphicFramePr>
+          <p:cNvPr id="8" name="Table 7"/>
+          <p:cNvGraphicFramePr>
+            <a:graphicFrameLocks noGrp="1"/>
+          </p:cNvGraphicFramePr>
+          <p:nvPr/>
+        </p:nvGraphicFramePr>
+        <p:xfrm>
+          <a:off x="6217920" y="1508760"/>
+          <a:ext cx="5059375" cy="2377440"/>
+        </p:xfrm>
+        <a:graphic>
+          <a:graphicData uri="http://schemas.openxmlformats.org/drawingml/2006/table">
+            <a:tbl>
+              <a:tblPr firstRow="1" bandRow="1">
+                <a:tableStyleId>{5C22544A-7EE6-4342-B048-85BDC9FD1C3A}</a:tableStyleId>
+              </a:tblPr>
+              <a:tblGrid>
+                <a:gridCol w="1920240"/>
+                <a:gridCol w="777240"/>
+                <a:gridCol w="777240"/>
+                <a:gridCol w="777240"/>
+                <a:gridCol w="807415"/>
+              </a:tblGrid>
+              <a:tr h="475488">
+                <a:tc>
+                  <a:txBody>
+                    <a:bodyPr/>
+                    <a:lstStyle/>
+                    <a:p>
+                      <a:pPr algn="ctr">
+                        <a:defRPr sz="950" b="1">
+                          <a:solidFill>
+                            <a:srgbClr val="FFFFFF"/>
+                          </a:solidFill>
+                        </a:defRPr>
+                      </a:pPr>
+                      <a:r>
+                        <a:t>Architecture</a:t>
+                      </a:r>
+                    </a:p>
+                  </a:txBody>
+                  <a:tcPr>
+                    <a:solidFill>
+                      <a:srgbClr val="2563EB"/>
+                    </a:solidFill>
+                  </a:tcPr>
+                </a:tc>
+                <a:tc>
+                  <a:txBody>
+                    <a:bodyPr/>
+                    <a:lstStyle/>
+                    <a:p>
+                      <a:pPr algn="ctr">
+                        <a:defRPr sz="950" b="1">
+                          <a:solidFill>
+                            <a:srgbClr val="FFFFFF"/>
+                          </a:solidFill>
+                        </a:defRPr>
+                      </a:pPr>
+                      <a:r>
+                        <a:t>L0</a:t>
+                      </a:r>
+                    </a:p>
+                  </a:txBody>
+                  <a:tcPr>
+                    <a:solidFill>
+                      <a:srgbClr val="2563EB"/>
+                    </a:solidFill>
+                  </a:tcPr>
+                </a:tc>
+                <a:tc>
+                  <a:txBody>
+                    <a:bodyPr/>
+                    <a:lstStyle/>
+                    <a:p>
+                      <a:pPr algn="ctr">
+                        <a:defRPr sz="950" b="1">
+                          <a:solidFill>
+                            <a:srgbClr val="FFFFFF"/>
+                          </a:solidFill>
+                        </a:defRPr>
+                      </a:pPr>
+                      <a:r>
+                        <a:t>L1</a:t>
+                      </a:r>
+                    </a:p>
+                  </a:txBody>
+                  <a:tcPr>
+                    <a:solidFill>
+                      <a:srgbClr val="2563EB"/>
+                    </a:solidFill>
+                  </a:tcPr>
+                </a:tc>
+                <a:tc>
+                  <a:txBody>
+                    <a:bodyPr/>
+                    <a:lstStyle/>
+                    <a:p>
+                      <a:pPr algn="ctr">
+                        <a:defRPr sz="950" b="1">
+                          <a:solidFill>
+                            <a:srgbClr val="FFFFFF"/>
+                          </a:solidFill>
+                        </a:defRPr>
+                      </a:pPr>
+                      <a:r>
+                        <a:t>L2</a:t>
+                      </a:r>
+                    </a:p>
+                  </a:txBody>
+                  <a:tcPr>
+                    <a:solidFill>
+                      <a:srgbClr val="2563EB"/>
+                    </a:solidFill>
+                  </a:tcPr>
+                </a:tc>
+                <a:tc>
+                  <a:txBody>
+                    <a:bodyPr/>
+                    <a:lstStyle/>
+                    <a:p>
+                      <a:pPr algn="ctr">
+                        <a:defRPr sz="950" b="1">
+                          <a:solidFill>
+                            <a:srgbClr val="FFFFFF"/>
+                          </a:solidFill>
+                        </a:defRPr>
+                      </a:pPr>
+                      <a:r>
+                        <a:t>L3</a:t>
+                      </a:r>
+                    </a:p>
+                  </a:txBody>
+                  <a:tcPr>
+                    <a:solidFill>
+                      <a:srgbClr val="2563EB"/>
+                    </a:solidFill>
+                  </a:tcPr>
+                </a:tc>
+              </a:tr>
+              <a:tr h="475488">
+                <a:tc>
+                  <a:txBody>
+                    <a:bodyPr/>
+                    <a:lstStyle/>
+                    <a:p>
+                      <a:pPr>
+                        <a:defRPr sz="900" b="0">
+                          <a:solidFill>
+                            <a:srgbClr val="0F172A"/>
+                          </a:solidFill>
+                        </a:defRPr>
+                      </a:pPr>
+                      <a:r>
+                        <a:t>Static Full Baseline</a:t>
+                      </a:r>
+                    </a:p>
+                  </a:txBody>
+                  <a:tcPr>
+                    <a:solidFill>
+                      <a:srgbClr val="FFFFFF"/>
+                    </a:solidFill>
+                  </a:tcPr>
+                </a:tc>
+                <a:tc>
+                  <a:txBody>
+                    <a:bodyPr/>
+                    <a:lstStyle/>
+                    <a:p>
+                      <a:pPr algn="ctr">
+                        <a:defRPr sz="900" b="0">
+                          <a:solidFill>
+                            <a:srgbClr val="0F172A"/>
+                          </a:solidFill>
+                        </a:defRPr>
+                      </a:pPr>
+                      <a:r>
+                        <a:t>1.0000</a:t>
+                      </a:r>
+                    </a:p>
+                  </a:txBody>
+                  <a:tcPr>
+                    <a:solidFill>
+                      <a:srgbClr val="FFFFFF"/>
+                    </a:solidFill>
+                  </a:tcPr>
+                </a:tc>
+                <a:tc>
+                  <a:txBody>
+                    <a:bodyPr/>
+                    <a:lstStyle/>
+                    <a:p>
+                      <a:pPr algn="ctr">
+                        <a:defRPr sz="900" b="0">
+                          <a:solidFill>
+                            <a:srgbClr val="0F172A"/>
+                          </a:solidFill>
+                        </a:defRPr>
+                      </a:pPr>
+                      <a:r>
+                        <a:t>1.0000</a:t>
+                      </a:r>
+                    </a:p>
+                  </a:txBody>
+                  <a:tcPr>
+                    <a:solidFill>
+                      <a:srgbClr val="FFFFFF"/>
+                    </a:solidFill>
+                  </a:tcPr>
+                </a:tc>
+                <a:tc>
+                  <a:txBody>
+                    <a:bodyPr/>
+                    <a:lstStyle/>
+                    <a:p>
+                      <a:pPr algn="ctr">
+                        <a:defRPr sz="900" b="0">
+                          <a:solidFill>
+                            <a:srgbClr val="0F172A"/>
+                          </a:solidFill>
+                        </a:defRPr>
+                      </a:pPr>
+                      <a:r>
+                        <a:t>0.6269</a:t>
+                      </a:r>
+                    </a:p>
+                  </a:txBody>
+                  <a:tcPr>
+                    <a:solidFill>
+                      <a:srgbClr val="FFFFFF"/>
+                    </a:solidFill>
+                  </a:tcPr>
+                </a:tc>
+                <a:tc>
+                  <a:txBody>
+                    <a:bodyPr/>
+                    <a:lstStyle/>
+                    <a:p>
+                      <a:pPr algn="ctr">
+                        <a:defRPr sz="900" b="0">
+                          <a:solidFill>
+                            <a:srgbClr val="0F172A"/>
+                          </a:solidFill>
+                        </a:defRPr>
+                      </a:pPr>
+                      <a:r>
+                        <a:t>0.0787</a:t>
+                      </a:r>
+                    </a:p>
+                  </a:txBody>
+                  <a:tcPr>
+                    <a:solidFill>
+                      <a:srgbClr val="FFFFFF"/>
+                    </a:solidFill>
+                  </a:tcPr>
+                </a:tc>
+              </a:tr>
+              <a:tr h="475488">
+                <a:tc>
+                  <a:txBody>
+                    <a:bodyPr/>
+                    <a:lstStyle/>
+                    <a:p>
+                      <a:pPr>
+                        <a:defRPr sz="900" b="0">
+                          <a:solidFill>
+                            <a:srgbClr val="0F172A"/>
+                          </a:solidFill>
+                        </a:defRPr>
+                      </a:pPr>
+                      <a:r>
+                        <a:t>Imputation + Full</a:t>
+                      </a:r>
+                    </a:p>
+                  </a:txBody>
+                  <a:tcPr>
+                    <a:solidFill>
+                      <a:srgbClr val="F1F5F9"/>
+                    </a:solidFill>
+                  </a:tcPr>
+                </a:tc>
+                <a:tc>
+                  <a:txBody>
+                    <a:bodyPr/>
+                    <a:lstStyle/>
+                    <a:p>
+                      <a:pPr algn="ctr">
+                        <a:defRPr sz="900" b="0">
+                          <a:solidFill>
+                            <a:srgbClr val="0F172A"/>
+                          </a:solidFill>
+                        </a:defRPr>
+                      </a:pPr>
+                      <a:r>
+                        <a:t>1.0000</a:t>
+                      </a:r>
+                    </a:p>
+                  </a:txBody>
+                  <a:tcPr>
+                    <a:solidFill>
+                      <a:srgbClr val="F1F5F9"/>
+                    </a:solidFill>
+                  </a:tcPr>
+                </a:tc>
+                <a:tc>
+                  <a:txBody>
+                    <a:bodyPr/>
+                    <a:lstStyle/>
+                    <a:p>
+                      <a:pPr algn="ctr">
+                        <a:defRPr sz="900" b="0">
+                          <a:solidFill>
+                            <a:srgbClr val="0F172A"/>
+                          </a:solidFill>
+                        </a:defRPr>
+                      </a:pPr>
+                      <a:r>
+                        <a:t>0.9991</a:t>
+                      </a:r>
+                    </a:p>
+                  </a:txBody>
+                  <a:tcPr>
+                    <a:solidFill>
+                      <a:srgbClr val="F1F5F9"/>
+                    </a:solidFill>
+                  </a:tcPr>
+                </a:tc>
+                <a:tc>
+                  <a:txBody>
+                    <a:bodyPr/>
+                    <a:lstStyle/>
+                    <a:p>
+                      <a:pPr algn="ctr">
+                        <a:defRPr sz="900" b="0">
+                          <a:solidFill>
+                            <a:srgbClr val="0F172A"/>
+                          </a:solidFill>
+                        </a:defRPr>
+                      </a:pPr>
+                      <a:r>
+                        <a:t>0.1659</a:t>
+                      </a:r>
+                    </a:p>
+                  </a:txBody>
+                  <a:tcPr>
+                    <a:solidFill>
+                      <a:srgbClr val="F1F5F9"/>
+                    </a:solidFill>
+                  </a:tcPr>
+                </a:tc>
+                <a:tc>
+                  <a:txBody>
+                    <a:bodyPr/>
+                    <a:lstStyle/>
+                    <a:p>
+                      <a:pPr algn="ctr">
+                        <a:defRPr sz="900" b="0">
+                          <a:solidFill>
+                            <a:srgbClr val="0F172A"/>
+                          </a:solidFill>
+                        </a:defRPr>
+                      </a:pPr>
+                      <a:r>
+                        <a:t>0.1639</a:t>
+                      </a:r>
+                    </a:p>
+                  </a:txBody>
+                  <a:tcPr>
+                    <a:solidFill>
+                      <a:srgbClr val="F1F5F9"/>
+                    </a:solidFill>
+                  </a:tcPr>
+                </a:tc>
+              </a:tr>
+              <a:tr h="475488">
+                <a:tc>
+                  <a:txBody>
+                    <a:bodyPr/>
+                    <a:lstStyle/>
+                    <a:p>
+                      <a:pPr>
+                        <a:defRPr sz="900" b="0">
+                          <a:solidFill>
+                            <a:srgbClr val="0F172A"/>
+                          </a:solidFill>
+                        </a:defRPr>
+                      </a:pPr>
+                      <a:r>
+                        <a:t>Feature-Dropout</a:t>
+                      </a:r>
+                    </a:p>
+                  </a:txBody>
+                  <a:tcPr>
+                    <a:solidFill>
+                      <a:srgbClr val="FFFFFF"/>
+                    </a:solidFill>
+                  </a:tcPr>
+                </a:tc>
+                <a:tc>
+                  <a:txBody>
+                    <a:bodyPr/>
+                    <a:lstStyle/>
+                    <a:p>
+                      <a:pPr algn="ctr">
+                        <a:defRPr sz="900" b="0">
+                          <a:solidFill>
+                            <a:srgbClr val="0F172A"/>
+                          </a:solidFill>
+                        </a:defRPr>
+                      </a:pPr>
+                      <a:r>
+                        <a:t>1.0000</a:t>
+                      </a:r>
+                    </a:p>
+                  </a:txBody>
+                  <a:tcPr>
+                    <a:solidFill>
+                      <a:srgbClr val="FFFFFF"/>
+                    </a:solidFill>
+                  </a:tcPr>
+                </a:tc>
+                <a:tc>
+                  <a:txBody>
+                    <a:bodyPr/>
+                    <a:lstStyle/>
+                    <a:p>
+                      <a:pPr algn="ctr">
+                        <a:defRPr sz="900" b="0">
+                          <a:solidFill>
+                            <a:srgbClr val="0F172A"/>
+                          </a:solidFill>
+                        </a:defRPr>
+                      </a:pPr>
+                      <a:r>
+                        <a:t>1.0000</a:t>
+                      </a:r>
+                    </a:p>
+                  </a:txBody>
+                  <a:tcPr>
+                    <a:solidFill>
+                      <a:srgbClr val="FFFFFF"/>
+                    </a:solidFill>
+                  </a:tcPr>
+                </a:tc>
+                <a:tc>
+                  <a:txBody>
+                    <a:bodyPr/>
+                    <a:lstStyle/>
+                    <a:p>
+                      <a:pPr algn="ctr">
+                        <a:defRPr sz="900" b="0">
+                          <a:solidFill>
+                            <a:srgbClr val="0F172A"/>
+                          </a:solidFill>
+                        </a:defRPr>
+                      </a:pPr>
+                      <a:r>
+                        <a:t>0.9995</a:t>
+                      </a:r>
+                    </a:p>
+                  </a:txBody>
+                  <a:tcPr>
+                    <a:solidFill>
+                      <a:srgbClr val="FFFFFF"/>
+                    </a:solidFill>
+                  </a:tcPr>
+                </a:tc>
+                <a:tc>
+                  <a:txBody>
+                    <a:bodyPr/>
+                    <a:lstStyle/>
+                    <a:p>
+                      <a:pPr algn="ctr">
+                        <a:defRPr sz="900" b="0">
+                          <a:solidFill>
+                            <a:srgbClr val="0F172A"/>
+                          </a:solidFill>
+                        </a:defRPr>
+                      </a:pPr>
+                      <a:r>
+                        <a:t>0.7322</a:t>
+                      </a:r>
+                    </a:p>
+                  </a:txBody>
+                  <a:tcPr>
+                    <a:solidFill>
+                      <a:srgbClr val="FFFFFF"/>
+                    </a:solidFill>
+                  </a:tcPr>
+                </a:tc>
+              </a:tr>
+              <a:tr h="475488">
+                <a:tc>
+                  <a:txBody>
+                    <a:bodyPr/>
+                    <a:lstStyle/>
+                    <a:p>
+                      <a:pPr>
+                        <a:defRPr sz="900" b="1">
+                          <a:solidFill>
+                            <a:srgbClr val="2563EB"/>
+                          </a:solidFill>
+                        </a:defRPr>
+                      </a:pPr>
+                      <a:r>
+                        <a:t>Proposed TIDPS</a:t>
+                      </a:r>
+                    </a:p>
+                  </a:txBody>
+                  <a:tcPr>
+                    <a:solidFill>
+                      <a:srgbClr val="EEF2FF"/>
+                    </a:solidFill>
+                  </a:tcPr>
+                </a:tc>
+                <a:tc>
+                  <a:txBody>
+                    <a:bodyPr/>
+                    <a:lstStyle/>
+                    <a:p>
+                      <a:pPr algn="ctr">
+                        <a:defRPr sz="900" b="1">
+                          <a:solidFill>
+                            <a:srgbClr val="0F172A"/>
+                          </a:solidFill>
+                        </a:defRPr>
+                      </a:pPr>
+                      <a:r>
+                        <a:t>1.0000</a:t>
+                      </a:r>
+                    </a:p>
+                  </a:txBody>
+                  <a:tcPr>
+                    <a:solidFill>
+                      <a:srgbClr val="EEF2FF"/>
+                    </a:solidFill>
+                  </a:tcPr>
+                </a:tc>
+                <a:tc>
+                  <a:txBody>
+                    <a:bodyPr/>
+                    <a:lstStyle/>
+                    <a:p>
+                      <a:pPr algn="ctr">
+                        <a:defRPr sz="900" b="1">
+                          <a:solidFill>
+                            <a:srgbClr val="0F172A"/>
+                          </a:solidFill>
+                        </a:defRPr>
+                      </a:pPr>
+                      <a:r>
+                        <a:t>1.0000</a:t>
+                      </a:r>
+                    </a:p>
+                  </a:txBody>
+                  <a:tcPr>
+                    <a:solidFill>
+                      <a:srgbClr val="EEF2FF"/>
+                    </a:solidFill>
+                  </a:tcPr>
+                </a:tc>
+                <a:tc>
+                  <a:txBody>
+                    <a:bodyPr/>
+                    <a:lstStyle/>
+                    <a:p>
+                      <a:pPr algn="ctr">
+                        <a:defRPr sz="900" b="1">
+                          <a:solidFill>
+                            <a:srgbClr val="0F172A"/>
+                          </a:solidFill>
+                        </a:defRPr>
+                      </a:pPr>
+                      <a:r>
+                        <a:t>0.9551</a:t>
+                      </a:r>
+                    </a:p>
+                  </a:txBody>
+                  <a:tcPr>
+                    <a:solidFill>
+                      <a:srgbClr val="EEF2FF"/>
+                    </a:solidFill>
+                  </a:tcPr>
+                </a:tc>
+                <a:tc>
+                  <a:txBody>
+                    <a:bodyPr/>
+                    <a:lstStyle/>
+                    <a:p>
+                      <a:pPr algn="ctr">
+                        <a:defRPr sz="900" b="1">
+                          <a:solidFill>
+                            <a:srgbClr val="0F172A"/>
+                          </a:solidFill>
+                        </a:defRPr>
+                      </a:pPr>
+                      <a:r>
+                        <a:t>0.4506</a:t>
+                      </a:r>
+                    </a:p>
+                  </a:txBody>
+                  <a:tcPr>
+                    <a:solidFill>
+                      <a:srgbClr val="EEF2FF"/>
+                    </a:solidFill>
+                  </a:tcPr>
+                </a:tc>
+              </a:tr>
+            </a:tbl>
+          </a:graphicData>
+        </a:graphic>
+      </p:graphicFrame>
+      <p:sp>
+        <p:nvSpPr>
+          <p:cNvPr id="9" name="TextBox 8"/>
           <p:cNvSpPr txBox="1"/>
           <p:nvPr/>
         </p:nvSpPr>
         <p:spPr>
           <a:xfrm>
-            <a:off x="6446520" y="1554480"/>
-            <a:ext cx="4754880" cy="4480560"/>
+            <a:off x="6217920" y="3977639"/>
+            <a:ext cx="5059375" cy="2148840"/>
           </a:xfrm>
           <a:prstGeom prst="rect">
             <a:avLst/>
@@ -4241,91 +4881,76 @@
           <a:p>
             <a:pPr>
               <a:spcAft>
-                <a:spcPts val="600"/>
-              </a:spcAft>
-              <a:defRPr sz="1200" b="1">
+                <a:spcPts val="400"/>
+              </a:spcAft>
+              <a:defRPr sz="1050" b="1">
                 <a:solidFill>
                   <a:srgbClr val="2563EB"/>
                 </a:solidFill>
               </a:defRPr>
             </a:pPr>
             <a:r>
-              <a:t>ROADMAP TO REVIEW 2 &amp; FINAL DEFENSE</a:t>
-            </a:r>
-          </a:p>
-          <a:p>
-            <a:pPr>
-              <a:spcAft>
-                <a:spcPts val="500"/>
-              </a:spcAft>
-              <a:defRPr sz="1000">
-                <a:solidFill>
-                  <a:srgbClr val="0F172A"/>
-                </a:solidFill>
-              </a:defRPr>
-            </a:pPr>
-            <a:r>
-              <a:t>➤ Review 2: Hardware Testbed Emulation: Interface TIDPS with eBPF / XDP kernel probes or Mininet virtual network topologies for raw packet flow extraction.</a:t>
-            </a:r>
-          </a:p>
-          <a:p>
-            <a:pPr>
-              <a:spcAft>
-                <a:spcPts val="500"/>
-              </a:spcAft>
-              <a:defRPr sz="1000">
-                <a:solidFill>
-                  <a:srgbClr val="0F172A"/>
-                </a:solidFill>
-              </a:defRPr>
-            </a:pPr>
-            <a:r>
-              <a:t>➤ Review 2: Live Network Sniffing: Add raw socket packet capture engine for real-time LAN threat detection.</a:t>
-            </a:r>
-          </a:p>
-          <a:p>
-            <a:pPr>
-              <a:spcAft>
-                <a:spcPts val="500"/>
-              </a:spcAft>
-              <a:defRPr sz="1000">
-                <a:solidFill>
-                  <a:srgbClr val="0F172A"/>
-                </a:solidFill>
-              </a:defRPr>
-            </a:pPr>
-            <a:r>
-              <a:t>➤ Review 2: Adversarial Robustness: Evaluate defense resilience against adversarial telemetry evasion attacks.</a:t>
-            </a:r>
-          </a:p>
-          <a:p>
-            <a:pPr>
-              <a:spcAft>
-                <a:spcPts val="500"/>
-              </a:spcAft>
-              <a:defRPr sz="1000">
-                <a:solidFill>
-                  <a:srgbClr val="0F172A"/>
-                </a:solidFill>
-              </a:defRPr>
-            </a:pPr>
-            <a:r>
-              <a:t>➤ Review 3: Hardware Acceleration: Prototype Mode 3 rule execution in P4 programmable switches or SmartNICs for true multi-gigabit throughput.</a:t>
-            </a:r>
-          </a:p>
-          <a:p>
-            <a:pPr>
-              <a:spcAft>
-                <a:spcPts val="500"/>
-              </a:spcAft>
-              <a:defRPr sz="1000">
-                <a:solidFill>
-                  <a:srgbClr val="0F172A"/>
-                </a:solidFill>
-              </a:defRPr>
-            </a:pPr>
-            <a:r>
-              <a:t>➤ Final Review: Conference Submission: Submit manuscript to IEEE International Conference on Cyber Security &amp; Networking.</a:t>
+              <a:t>CORE EMPIRICAL FINDINGS:</a:t>
+            </a:r>
+          </a:p>
+          <a:p>
+            <a:pPr>
+              <a:spcAft>
+                <a:spcPts val="200"/>
+              </a:spcAft>
+              <a:defRPr sz="900">
+                <a:solidFill>
+                  <a:srgbClr val="0F172A"/>
+                </a:solidFill>
+              </a:defRPr>
+            </a:pPr>
+            <a:r>
+              <a:t>• No Performance Cliff: TIDPS retains 0.9551 F1 under asymmetric routing where static models collapse to 0.6269.</a:t>
+            </a:r>
+          </a:p>
+          <a:p>
+            <a:pPr>
+              <a:spcAft>
+                <a:spcPts val="200"/>
+              </a:spcAft>
+              <a:defRPr sz="900">
+                <a:solidFill>
+                  <a:srgbClr val="0F172A"/>
+                </a:solidFill>
+              </a:defRPr>
+            </a:pPr>
+            <a:r>
+              <a:t>• Imputation Collapse: Imputation misses 99.91% of attacks and adds 28.4 ms delay (unusable at line rate).</a:t>
+            </a:r>
+          </a:p>
+          <a:p>
+            <a:pPr>
+              <a:spcAft>
+                <a:spcPts val="200"/>
+              </a:spcAft>
+              <a:defRPr sz="900">
+                <a:solidFill>
+                  <a:srgbClr val="0F172A"/>
+                </a:solidFill>
+              </a:defRPr>
+            </a:pPr>
+            <a:r>
+              <a:t>• Continuity Score: TIDPS achieves DCM = 0.8843 vs 0.6889 for static baseline.</a:t>
+            </a:r>
+          </a:p>
+          <a:p>
+            <a:pPr>
+              <a:spcAft>
+                <a:spcPts val="200"/>
+              </a:spcAft>
+              <a:defRPr sz="900">
+                <a:solidFill>
+                  <a:srgbClr val="0F172A"/>
+                </a:solidFill>
+              </a:defRPr>
+            </a:pPr>
+            <a:r>
+              <a:t>• Inference Latency: Consistent &lt; 0.011 ms line-rate response.</a:t>
             </a:r>
           </a:p>
         </p:txBody>
@@ -4350,6 +4975,1108 @@
       <p:grpSpPr/>
       <p:sp>
         <p:nvSpPr>
+          <p:cNvPr id="2" name="TextBox 1"/>
+          <p:cNvSpPr txBox="1"/>
+          <p:nvPr/>
+        </p:nvSpPr>
+        <p:spPr>
+          <a:xfrm>
+            <a:off x="731520" y="365760"/>
+            <a:ext cx="10698480" cy="320040"/>
+          </a:xfrm>
+          <a:prstGeom prst="rect">
+            <a:avLst/>
+          </a:prstGeom>
+          <a:noFill/>
+        </p:spPr>
+        <p:txBody>
+          <a:bodyPr wrap="square" lIns="0" tIns="0" rIns="0" bIns="0">
+            <a:spAutoFit/>
+          </a:bodyPr>
+          <a:lstStyle/>
+          <a:p>
+            <a:pPr>
+              <a:defRPr sz="1100" b="1">
+                <a:solidFill>
+                  <a:srgbClr val="2563EB"/>
+                </a:solidFill>
+              </a:defRPr>
+            </a:pPr>
+            <a:r>
+              <a:t>PROTOTYPE &amp; ARTIFACTS</a:t>
+            </a:r>
+          </a:p>
+        </p:txBody>
+      </p:sp>
+      <p:sp>
+        <p:nvSpPr>
+          <p:cNvPr id="3" name="TextBox 2"/>
+          <p:cNvSpPr txBox="1"/>
+          <p:nvPr/>
+        </p:nvSpPr>
+        <p:spPr>
+          <a:xfrm>
+            <a:off x="731520" y="658368"/>
+            <a:ext cx="10698480" cy="594360"/>
+          </a:xfrm>
+          <a:prstGeom prst="rect">
+            <a:avLst/>
+          </a:prstGeom>
+          <a:noFill/>
+        </p:spPr>
+        <p:txBody>
+          <a:bodyPr wrap="square" lIns="0" tIns="0" rIns="0" bIns="0">
+            <a:spAutoFit/>
+          </a:bodyPr>
+          <a:lstStyle/>
+          <a:p>
+            <a:pPr>
+              <a:defRPr sz="2200" b="1">
+                <a:solidFill>
+                  <a:srgbClr val="0F172A"/>
+                </a:solidFill>
+              </a:defRPr>
+            </a:pPr>
+            <a:r>
+              <a:t>Live Web Deployment &amp; Open-Source Artifacts</a:t>
+            </a:r>
+          </a:p>
+        </p:txBody>
+      </p:sp>
+      <p:sp>
+        <p:nvSpPr>
+          <p:cNvPr id="4" name="Rounded Rectangle 3"/>
+          <p:cNvSpPr/>
+          <p:nvPr/>
+        </p:nvSpPr>
+        <p:spPr>
+          <a:xfrm>
+            <a:off x="731520" y="1371600"/>
+            <a:ext cx="5212080" cy="4846320"/>
+          </a:xfrm>
+          <a:prstGeom prst="roundRect">
+            <a:avLst/>
+          </a:prstGeom>
+          <a:solidFill>
+            <a:srgbClr val="FFFFFF"/>
+          </a:solidFill>
+          <a:ln w="19050">
+            <a:solidFill>
+              <a:srgbClr val="E2E8F0"/>
+            </a:solidFill>
+          </a:ln>
+        </p:spPr>
+        <p:style>
+          <a:lnRef idx="1">
+            <a:schemeClr val="accent1"/>
+          </a:lnRef>
+          <a:fillRef idx="3">
+            <a:schemeClr val="accent1"/>
+          </a:fillRef>
+          <a:effectRef idx="2">
+            <a:schemeClr val="accent1"/>
+          </a:effectRef>
+          <a:fontRef idx="minor">
+            <a:schemeClr val="lt1"/>
+          </a:fontRef>
+        </p:style>
+        <p:txBody>
+          <a:bodyPr rtlCol="0" anchor="ctr"/>
+          <a:lstStyle/>
+          <a:p>
+            <a:pPr algn="ctr"/>
+          </a:p>
+        </p:txBody>
+      </p:sp>
+      <p:sp>
+        <p:nvSpPr>
+          <p:cNvPr id="5" name="TextBox 4"/>
+          <p:cNvSpPr txBox="1"/>
+          <p:nvPr/>
+        </p:nvSpPr>
+        <p:spPr>
+          <a:xfrm>
+            <a:off x="960120" y="1554480"/>
+            <a:ext cx="4754880" cy="4480560"/>
+          </a:xfrm>
+          <a:prstGeom prst="rect">
+            <a:avLst/>
+          </a:prstGeom>
+          <a:noFill/>
+        </p:spPr>
+        <p:txBody>
+          <a:bodyPr wrap="square">
+            <a:spAutoFit/>
+          </a:bodyPr>
+          <a:lstStyle/>
+          <a:p>
+            <a:pPr>
+              <a:spcAft>
+                <a:spcPts val="600"/>
+              </a:spcAft>
+              <a:defRPr sz="1200" b="1">
+                <a:solidFill>
+                  <a:srgbClr val="2563EB"/>
+                </a:solidFill>
+              </a:defRPr>
+            </a:pPr>
+            <a:r>
+              <a:t>LIVE CLOUD DEMO PROTOTYPE</a:t>
+            </a:r>
+          </a:p>
+          <a:p>
+            <a:pPr>
+              <a:spcAft>
+                <a:spcPts val="600"/>
+              </a:spcAft>
+              <a:defRPr sz="1000">
+                <a:solidFill>
+                  <a:srgbClr val="0F172A"/>
+                </a:solidFill>
+              </a:defRPr>
+            </a:pPr>
+            <a:r>
+              <a:t>• Public Web Link: https://resilient-nidps.streamlit.app</a:t>
+            </a:r>
+          </a:p>
+          <a:p>
+            <a:pPr>
+              <a:spcAft>
+                <a:spcPts val="600"/>
+              </a:spcAft>
+              <a:defRPr sz="1000">
+                <a:solidFill>
+                  <a:srgbClr val="0F172A"/>
+                </a:solidFill>
+              </a:defRPr>
+            </a:pPr>
+            <a:r>
+              <a:t>• Hosting Infrastructure: Streamlit Community Cloud (AWS Containerized Engine, 24/7 Global Access).</a:t>
+            </a:r>
+          </a:p>
+          <a:p>
+            <a:pPr>
+              <a:spcAft>
+                <a:spcPts val="600"/>
+              </a:spcAft>
+              <a:defRPr sz="1000">
+                <a:solidFill>
+                  <a:srgbClr val="0F172A"/>
+                </a:solidFill>
+              </a:defRPr>
+            </a:pPr>
+            <a:r>
+              <a:t>• Live Interactive Controls: Allows evaluators to slide telemetry health Q from 1.0 down to 0.0, witnessing real-time Mode Arbiter transitions and dynamic firewall quarantine ledger updates.</a:t>
+            </a:r>
+          </a:p>
+          <a:p>
+            <a:pPr>
+              <a:spcAft>
+                <a:spcPts val="600"/>
+              </a:spcAft>
+              <a:defRPr sz="1000">
+                <a:solidFill>
+                  <a:srgbClr val="0F172A"/>
+                </a:solidFill>
+              </a:defRPr>
+            </a:pPr>
+            <a:r>
+              <a:t>• Zero Installation Required: Examiners can test the prototype on any laptop, tablet, or phone without installing Python or packages.</a:t>
+            </a:r>
+          </a:p>
+          <a:p>
+            <a:pPr>
+              <a:spcAft>
+                <a:spcPts val="600"/>
+              </a:spcAft>
+              <a:defRPr sz="1000">
+                <a:solidFill>
+                  <a:srgbClr val="0F172A"/>
+                </a:solidFill>
+              </a:defRPr>
+            </a:pPr>
+            <a:r>
+              <a:t>• Synchronized IST Ledger: Incident ledger timestamps update in real time with 1-click ledger clearing.</a:t>
+            </a:r>
+          </a:p>
+        </p:txBody>
+      </p:sp>
+      <p:sp>
+        <p:nvSpPr>
+          <p:cNvPr id="6" name="Rounded Rectangle 5"/>
+          <p:cNvSpPr/>
+          <p:nvPr/>
+        </p:nvSpPr>
+        <p:spPr>
+          <a:xfrm>
+            <a:off x="6217920" y="1371600"/>
+            <a:ext cx="5212080" cy="4846320"/>
+          </a:xfrm>
+          <a:prstGeom prst="roundRect">
+            <a:avLst/>
+          </a:prstGeom>
+          <a:solidFill>
+            <a:srgbClr val="FFFFFF"/>
+          </a:solidFill>
+          <a:ln w="19050">
+            <a:solidFill>
+              <a:srgbClr val="E2E8F0"/>
+            </a:solidFill>
+          </a:ln>
+        </p:spPr>
+        <p:style>
+          <a:lnRef idx="1">
+            <a:schemeClr val="accent1"/>
+          </a:lnRef>
+          <a:fillRef idx="3">
+            <a:schemeClr val="accent1"/>
+          </a:fillRef>
+          <a:effectRef idx="2">
+            <a:schemeClr val="accent1"/>
+          </a:effectRef>
+          <a:fontRef idx="minor">
+            <a:schemeClr val="lt1"/>
+          </a:fontRef>
+        </p:style>
+        <p:txBody>
+          <a:bodyPr rtlCol="0" anchor="ctr"/>
+          <a:lstStyle/>
+          <a:p>
+            <a:pPr algn="ctr"/>
+          </a:p>
+        </p:txBody>
+      </p:sp>
+      <p:sp>
+        <p:nvSpPr>
+          <p:cNvPr id="7" name="TextBox 6"/>
+          <p:cNvSpPr txBox="1"/>
+          <p:nvPr/>
+        </p:nvSpPr>
+        <p:spPr>
+          <a:xfrm>
+            <a:off x="6446520" y="1554480"/>
+            <a:ext cx="4754880" cy="4480560"/>
+          </a:xfrm>
+          <a:prstGeom prst="rect">
+            <a:avLst/>
+          </a:prstGeom>
+          <a:noFill/>
+        </p:spPr>
+        <p:txBody>
+          <a:bodyPr wrap="square">
+            <a:spAutoFit/>
+          </a:bodyPr>
+          <a:lstStyle/>
+          <a:p>
+            <a:pPr>
+              <a:spcAft>
+                <a:spcPts val="600"/>
+              </a:spcAft>
+              <a:defRPr sz="1200" b="1">
+                <a:solidFill>
+                  <a:srgbClr val="2563EB"/>
+                </a:solidFill>
+              </a:defRPr>
+            </a:pPr>
+            <a:r>
+              <a:t>OPEN-SOURCE CODEBASE &amp; PAPERS</a:t>
+            </a:r>
+          </a:p>
+          <a:p>
+            <a:pPr>
+              <a:spcAft>
+                <a:spcPts val="600"/>
+              </a:spcAft>
+              <a:defRPr sz="1000">
+                <a:solidFill>
+                  <a:srgbClr val="0F172A"/>
+                </a:solidFill>
+              </a:defRPr>
+            </a:pPr>
+            <a:r>
+              <a:t>• GitHub Repository: https://github.com/THARAKESHA/resilient-nidps</a:t>
+            </a:r>
+          </a:p>
+          <a:p>
+            <a:pPr>
+              <a:spcAft>
+                <a:spcPts val="600"/>
+              </a:spcAft>
+              <a:defRPr sz="1000">
+                <a:solidFill>
+                  <a:srgbClr val="0F172A"/>
+                </a:solidFill>
+              </a:defRPr>
+            </a:pPr>
+            <a:r>
+              <a:t>• Research Paper Draft: Full IEEE Conference paper draft completed (manuscript.tex, references.bib, and compiled PDF).</a:t>
+            </a:r>
+          </a:p>
+          <a:p>
+            <a:pPr>
+              <a:spcAft>
+                <a:spcPts val="600"/>
+              </a:spcAft>
+              <a:defRPr sz="1000">
+                <a:solidFill>
+                  <a:srgbClr val="0F172A"/>
+                </a:solidFill>
+              </a:defRPr>
+            </a:pPr>
+            <a:r>
+              <a:t>• Formally Calibrated Generator: Full 78-feature statistical mathematical generator matching CICFlowMeter formulas.</a:t>
+            </a:r>
+          </a:p>
+          <a:p>
+            <a:pPr>
+              <a:spcAft>
+                <a:spcPts val="600"/>
+              </a:spcAft>
+              <a:defRPr sz="1000">
+                <a:solidFill>
+                  <a:srgbClr val="0F172A"/>
+                </a:solidFill>
+              </a:defRPr>
+            </a:pPr>
+            <a:r>
+              <a:t>• One-Click Launchers: Provided with run_app.bat (Windows) and run_app.sh (Linux).</a:t>
+            </a:r>
+          </a:p>
+          <a:p>
+            <a:pPr>
+              <a:spcAft>
+                <a:spcPts val="600"/>
+              </a:spcAft>
+              <a:defRPr sz="1000">
+                <a:solidFill>
+                  <a:srgbClr val="0F172A"/>
+                </a:solidFill>
+              </a:defRPr>
+            </a:pPr>
+            <a:r>
+              <a:t>• Pretrained Weights: Saved checkpoints for Mode 1, Mode 2, Mode 3, and Baselines stored in src/saved_models/.</a:t>
+            </a:r>
+          </a:p>
+        </p:txBody>
+      </p:sp>
+    </p:spTree>
+  </p:cSld>
+  <p:clrMapOvr>
+    <a:masterClrMapping/>
+  </p:clrMapOvr>
+</p:sld>
+</file>
+
+<file path=ppt/slides/slide13.xml><?xml version="1.0" encoding="utf-8"?>
+<p:sld xmlns:a="http://schemas.openxmlformats.org/drawingml/2006/main" xmlns:p="http://schemas.openxmlformats.org/presentationml/2006/main" xmlns:r="http://schemas.openxmlformats.org/officeDocument/2006/relationships">
+  <p:cSld>
+    <p:spTree>
+      <p:nvGrpSpPr>
+        <p:cNvPr id="1" name=""/>
+        <p:cNvGrpSpPr/>
+        <p:nvPr/>
+      </p:nvGrpSpPr>
+      <p:grpSpPr/>
+      <p:sp>
+        <p:nvSpPr>
+          <p:cNvPr id="2" name="TextBox 1"/>
+          <p:cNvSpPr txBox="1"/>
+          <p:nvPr/>
+        </p:nvSpPr>
+        <p:spPr>
+          <a:xfrm>
+            <a:off x="731520" y="365760"/>
+            <a:ext cx="10698480" cy="320040"/>
+          </a:xfrm>
+          <a:prstGeom prst="rect">
+            <a:avLst/>
+          </a:prstGeom>
+          <a:noFill/>
+        </p:spPr>
+        <p:txBody>
+          <a:bodyPr wrap="square" lIns="0" tIns="0" rIns="0" bIns="0">
+            <a:spAutoFit/>
+          </a:bodyPr>
+          <a:lstStyle/>
+          <a:p>
+            <a:pPr>
+              <a:defRPr sz="1100" b="1">
+                <a:solidFill>
+                  <a:srgbClr val="2563EB"/>
+                </a:solidFill>
+              </a:defRPr>
+            </a:pPr>
+            <a:r>
+              <a:t>PROJECT MILESTONES</a:t>
+            </a:r>
+          </a:p>
+        </p:txBody>
+      </p:sp>
+      <p:sp>
+        <p:nvSpPr>
+          <p:cNvPr id="3" name="TextBox 2"/>
+          <p:cNvSpPr txBox="1"/>
+          <p:nvPr/>
+        </p:nvSpPr>
+        <p:spPr>
+          <a:xfrm>
+            <a:off x="731520" y="658368"/>
+            <a:ext cx="10698480" cy="594360"/>
+          </a:xfrm>
+          <a:prstGeom prst="rect">
+            <a:avLst/>
+          </a:prstGeom>
+          <a:noFill/>
+        </p:spPr>
+        <p:txBody>
+          <a:bodyPr wrap="square" lIns="0" tIns="0" rIns="0" bIns="0">
+            <a:spAutoFit/>
+          </a:bodyPr>
+          <a:lstStyle/>
+          <a:p>
+            <a:pPr>
+              <a:defRPr sz="2200" b="1">
+                <a:solidFill>
+                  <a:srgbClr val="0F172A"/>
+                </a:solidFill>
+              </a:defRPr>
+            </a:pPr>
+            <a:r>
+              <a:t>Review 1 Accomplishments &amp; Future Roadmap</a:t>
+            </a:r>
+          </a:p>
+        </p:txBody>
+      </p:sp>
+      <p:sp>
+        <p:nvSpPr>
+          <p:cNvPr id="4" name="Rounded Rectangle 3"/>
+          <p:cNvSpPr/>
+          <p:nvPr/>
+        </p:nvSpPr>
+        <p:spPr>
+          <a:xfrm>
+            <a:off x="731520" y="1371600"/>
+            <a:ext cx="5212080" cy="4846320"/>
+          </a:xfrm>
+          <a:prstGeom prst="roundRect">
+            <a:avLst/>
+          </a:prstGeom>
+          <a:solidFill>
+            <a:srgbClr val="FFFFFF"/>
+          </a:solidFill>
+          <a:ln w="19050">
+            <a:solidFill>
+              <a:srgbClr val="E2E8F0"/>
+            </a:solidFill>
+          </a:ln>
+        </p:spPr>
+        <p:style>
+          <a:lnRef idx="1">
+            <a:schemeClr val="accent1"/>
+          </a:lnRef>
+          <a:fillRef idx="3">
+            <a:schemeClr val="accent1"/>
+          </a:fillRef>
+          <a:effectRef idx="2">
+            <a:schemeClr val="accent1"/>
+          </a:effectRef>
+          <a:fontRef idx="minor">
+            <a:schemeClr val="lt1"/>
+          </a:fontRef>
+        </p:style>
+        <p:txBody>
+          <a:bodyPr rtlCol="0" anchor="ctr"/>
+          <a:lstStyle/>
+          <a:p>
+            <a:pPr algn="ctr"/>
+          </a:p>
+        </p:txBody>
+      </p:sp>
+      <p:sp>
+        <p:nvSpPr>
+          <p:cNvPr id="5" name="TextBox 4"/>
+          <p:cNvSpPr txBox="1"/>
+          <p:nvPr/>
+        </p:nvSpPr>
+        <p:spPr>
+          <a:xfrm>
+            <a:off x="960120" y="1554480"/>
+            <a:ext cx="4754880" cy="4480560"/>
+          </a:xfrm>
+          <a:prstGeom prst="rect">
+            <a:avLst/>
+          </a:prstGeom>
+          <a:noFill/>
+        </p:spPr>
+        <p:txBody>
+          <a:bodyPr wrap="square">
+            <a:spAutoFit/>
+          </a:bodyPr>
+          <a:lstStyle/>
+          <a:p>
+            <a:pPr>
+              <a:spcAft>
+                <a:spcPts val="600"/>
+              </a:spcAft>
+              <a:defRPr sz="1200" b="1">
+                <a:solidFill>
+                  <a:srgbClr val="16A34A"/>
+                </a:solidFill>
+              </a:defRPr>
+            </a:pPr>
+            <a:r>
+              <a:t>REVIEW 1: COMPLETED DELIVERABLES</a:t>
+            </a:r>
+          </a:p>
+          <a:p>
+            <a:pPr>
+              <a:spcAft>
+                <a:spcPts val="500"/>
+              </a:spcAft>
+              <a:defRPr sz="1000">
+                <a:solidFill>
+                  <a:srgbClr val="0F172A"/>
+                </a:solidFill>
+              </a:defRPr>
+            </a:pPr>
+            <a:r>
+              <a:t>✔ Problem Formulation: Defined telemetry degradation physics &amp; failure models (L0 to L3).</a:t>
+            </a:r>
+          </a:p>
+          <a:p>
+            <a:pPr>
+              <a:spcAft>
+                <a:spcPts val="500"/>
+              </a:spcAft>
+              <a:defRPr sz="1000">
+                <a:solidFill>
+                  <a:srgbClr val="0F172A"/>
+                </a:solidFill>
+              </a:defRPr>
+            </a:pPr>
+            <a:r>
+              <a:t>✔ Literature Survey: Comparative review across 4 major foundational baselines &amp; datasets.</a:t>
+            </a:r>
+          </a:p>
+          <a:p>
+            <a:pPr>
+              <a:spcAft>
+                <a:spcPts val="500"/>
+              </a:spcAft>
+              <a:defRPr sz="1000">
+                <a:solidFill>
+                  <a:srgbClr val="0F172A"/>
+                </a:solidFill>
+              </a:defRPr>
+            </a:pPr>
+            <a:r>
+              <a:t>✔ Mathematical Formulation: Designed TQM Quality score Q(t) and Mode Arbiter with ±0.05 hysteresis.</a:t>
+            </a:r>
+          </a:p>
+          <a:p>
+            <a:pPr>
+              <a:spcAft>
+                <a:spcPts val="500"/>
+              </a:spcAft>
+              <a:defRPr sz="1000">
+                <a:solidFill>
+                  <a:srgbClr val="0F172A"/>
+                </a:solidFill>
+              </a:defRPr>
+            </a:pPr>
+            <a:r>
+              <a:t>✔ Model Zoo Implementation: Trained Mode 1 (78 feat), Mode 2 (16 feat), and Mode 3 (Deterministic rules).</a:t>
+            </a:r>
+          </a:p>
+          <a:p>
+            <a:pPr>
+              <a:spcAft>
+                <a:spcPts val="500"/>
+              </a:spcAft>
+              <a:defRPr sz="1000">
+                <a:solidFill>
+                  <a:srgbClr val="0F172A"/>
+                </a:solidFill>
+              </a:defRPr>
+            </a:pPr>
+            <a:r>
+              <a:t>✔ Empirical Benchmarking: Evaluated 3,750 test flows, proving 0.8843 DCM retention.</a:t>
+            </a:r>
+          </a:p>
+          <a:p>
+            <a:pPr>
+              <a:spcAft>
+                <a:spcPts val="500"/>
+              </a:spcAft>
+              <a:defRPr sz="1000">
+                <a:solidFill>
+                  <a:srgbClr val="0F172A"/>
+                </a:solidFill>
+              </a:defRPr>
+            </a:pPr>
+            <a:r>
+              <a:t>✔ Working Prototype &amp; Deployment: Deployed live web UI on Streamlit Cloud &amp; published GitHub repository.</a:t>
+            </a:r>
+          </a:p>
+        </p:txBody>
+      </p:sp>
+      <p:sp>
+        <p:nvSpPr>
+          <p:cNvPr id="6" name="Rounded Rectangle 5"/>
+          <p:cNvSpPr/>
+          <p:nvPr/>
+        </p:nvSpPr>
+        <p:spPr>
+          <a:xfrm>
+            <a:off x="6217920" y="1371600"/>
+            <a:ext cx="5212080" cy="4846320"/>
+          </a:xfrm>
+          <a:prstGeom prst="roundRect">
+            <a:avLst/>
+          </a:prstGeom>
+          <a:solidFill>
+            <a:srgbClr val="FFFFFF"/>
+          </a:solidFill>
+          <a:ln w="19050">
+            <a:solidFill>
+              <a:srgbClr val="E2E8F0"/>
+            </a:solidFill>
+          </a:ln>
+        </p:spPr>
+        <p:style>
+          <a:lnRef idx="1">
+            <a:schemeClr val="accent1"/>
+          </a:lnRef>
+          <a:fillRef idx="3">
+            <a:schemeClr val="accent1"/>
+          </a:fillRef>
+          <a:effectRef idx="2">
+            <a:schemeClr val="accent1"/>
+          </a:effectRef>
+          <a:fontRef idx="minor">
+            <a:schemeClr val="lt1"/>
+          </a:fontRef>
+        </p:style>
+        <p:txBody>
+          <a:bodyPr rtlCol="0" anchor="ctr"/>
+          <a:lstStyle/>
+          <a:p>
+            <a:pPr algn="ctr"/>
+          </a:p>
+        </p:txBody>
+      </p:sp>
+      <p:sp>
+        <p:nvSpPr>
+          <p:cNvPr id="7" name="TextBox 6"/>
+          <p:cNvSpPr txBox="1"/>
+          <p:nvPr/>
+        </p:nvSpPr>
+        <p:spPr>
+          <a:xfrm>
+            <a:off x="6446520" y="1554480"/>
+            <a:ext cx="4754880" cy="4480560"/>
+          </a:xfrm>
+          <a:prstGeom prst="rect">
+            <a:avLst/>
+          </a:prstGeom>
+          <a:noFill/>
+        </p:spPr>
+        <p:txBody>
+          <a:bodyPr wrap="square">
+            <a:spAutoFit/>
+          </a:bodyPr>
+          <a:lstStyle/>
+          <a:p>
+            <a:pPr>
+              <a:spcAft>
+                <a:spcPts val="600"/>
+              </a:spcAft>
+              <a:defRPr sz="1200" b="1">
+                <a:solidFill>
+                  <a:srgbClr val="2563EB"/>
+                </a:solidFill>
+              </a:defRPr>
+            </a:pPr>
+            <a:r>
+              <a:t>ROADMAP TO REVIEW 2 &amp; FINAL DEFENSE</a:t>
+            </a:r>
+          </a:p>
+          <a:p>
+            <a:pPr>
+              <a:spcAft>
+                <a:spcPts val="500"/>
+              </a:spcAft>
+              <a:defRPr sz="1000">
+                <a:solidFill>
+                  <a:srgbClr val="0F172A"/>
+                </a:solidFill>
+              </a:defRPr>
+            </a:pPr>
+            <a:r>
+              <a:t>➤ Review 2: Hardware Testbed Emulation: Interface TIDPS with eBPF / XDP kernel probes or Mininet virtual network topologies for raw packet flow extraction.</a:t>
+            </a:r>
+          </a:p>
+          <a:p>
+            <a:pPr>
+              <a:spcAft>
+                <a:spcPts val="500"/>
+              </a:spcAft>
+              <a:defRPr sz="1000">
+                <a:solidFill>
+                  <a:srgbClr val="0F172A"/>
+                </a:solidFill>
+              </a:defRPr>
+            </a:pPr>
+            <a:r>
+              <a:t>➤ Review 2: Live Network Sniffing: Add raw socket packet capture engine for real-time LAN threat detection.</a:t>
+            </a:r>
+          </a:p>
+          <a:p>
+            <a:pPr>
+              <a:spcAft>
+                <a:spcPts val="500"/>
+              </a:spcAft>
+              <a:defRPr sz="1000">
+                <a:solidFill>
+                  <a:srgbClr val="0F172A"/>
+                </a:solidFill>
+              </a:defRPr>
+            </a:pPr>
+            <a:r>
+              <a:t>➤ Review 2: Adversarial Robustness: Evaluate defense resilience against adversarial telemetry evasion attacks.</a:t>
+            </a:r>
+          </a:p>
+          <a:p>
+            <a:pPr>
+              <a:spcAft>
+                <a:spcPts val="500"/>
+              </a:spcAft>
+              <a:defRPr sz="1000">
+                <a:solidFill>
+                  <a:srgbClr val="0F172A"/>
+                </a:solidFill>
+              </a:defRPr>
+            </a:pPr>
+            <a:r>
+              <a:t>➤ Review 3: Hardware Acceleration: Prototype Mode 3 rule execution in P4 programmable switches or SmartNICs for true multi-gigabit throughput.</a:t>
+            </a:r>
+          </a:p>
+          <a:p>
+            <a:pPr>
+              <a:spcAft>
+                <a:spcPts val="500"/>
+              </a:spcAft>
+              <a:defRPr sz="1000">
+                <a:solidFill>
+                  <a:srgbClr val="0F172A"/>
+                </a:solidFill>
+              </a:defRPr>
+            </a:pPr>
+            <a:r>
+              <a:t>➤ Final Review: Conference Submission: Submit manuscript to IEEE International Conference on Cyber Security &amp; Networking.</a:t>
+            </a:r>
+          </a:p>
+        </p:txBody>
+      </p:sp>
+    </p:spTree>
+  </p:cSld>
+  <p:clrMapOvr>
+    <a:masterClrMapping/>
+  </p:clrMapOvr>
+</p:sld>
+</file>
+
+<file path=ppt/slides/slide14.xml><?xml version="1.0" encoding="utf-8"?>
+<p:sld xmlns:a="http://schemas.openxmlformats.org/drawingml/2006/main" xmlns:p="http://schemas.openxmlformats.org/presentationml/2006/main" xmlns:r="http://schemas.openxmlformats.org/officeDocument/2006/relationships">
+  <p:cSld>
+    <p:spTree>
+      <p:nvGrpSpPr>
+        <p:cNvPr id="1" name=""/>
+        <p:cNvGrpSpPr/>
+        <p:nvPr/>
+      </p:nvGrpSpPr>
+      <p:grpSpPr/>
+      <p:sp>
+        <p:nvSpPr>
+          <p:cNvPr id="2" name="TextBox 1"/>
+          <p:cNvSpPr txBox="1"/>
+          <p:nvPr/>
+        </p:nvSpPr>
+        <p:spPr>
+          <a:xfrm>
+            <a:off x="731520" y="365760"/>
+            <a:ext cx="10698480" cy="320040"/>
+          </a:xfrm>
+          <a:prstGeom prst="rect">
+            <a:avLst/>
+          </a:prstGeom>
+          <a:noFill/>
+        </p:spPr>
+        <p:txBody>
+          <a:bodyPr wrap="square" lIns="0" tIns="0" rIns="0" bIns="0">
+            <a:spAutoFit/>
+          </a:bodyPr>
+          <a:lstStyle/>
+          <a:p>
+            <a:pPr>
+              <a:defRPr sz="1100" b="1">
+                <a:solidFill>
+                  <a:srgbClr val="2563EB"/>
+                </a:solidFill>
+              </a:defRPr>
+            </a:pPr>
+            <a:r>
+              <a:t>SUMMARY &amp; VIVA DEFENSE REFERENCE</a:t>
+            </a:r>
+          </a:p>
+        </p:txBody>
+      </p:sp>
+      <p:sp>
+        <p:nvSpPr>
+          <p:cNvPr id="3" name="TextBox 2"/>
+          <p:cNvSpPr txBox="1"/>
+          <p:nvPr/>
+        </p:nvSpPr>
+        <p:spPr>
+          <a:xfrm>
+            <a:off x="731520" y="658368"/>
+            <a:ext cx="10698480" cy="594360"/>
+          </a:xfrm>
+          <a:prstGeom prst="rect">
+            <a:avLst/>
+          </a:prstGeom>
+          <a:noFill/>
+        </p:spPr>
+        <p:txBody>
+          <a:bodyPr wrap="square" lIns="0" tIns="0" rIns="0" bIns="0">
+            <a:spAutoFit/>
+          </a:bodyPr>
+          <a:lstStyle/>
+          <a:p>
+            <a:pPr>
+              <a:defRPr sz="2200" b="1">
+                <a:solidFill>
+                  <a:srgbClr val="0F172A"/>
+                </a:solidFill>
+              </a:defRPr>
+            </a:pPr>
+            <a:r>
+              <a:t>Conclusion &amp; Anticipated Faculty Review Q&amp;A</a:t>
+            </a:r>
+          </a:p>
+        </p:txBody>
+      </p:sp>
+      <p:sp>
+        <p:nvSpPr>
+          <p:cNvPr id="4" name="Rounded Rectangle 3"/>
+          <p:cNvSpPr/>
+          <p:nvPr/>
+        </p:nvSpPr>
+        <p:spPr>
+          <a:xfrm>
+            <a:off x="731520" y="1371600"/>
+            <a:ext cx="10728655" cy="4846320"/>
+          </a:xfrm>
+          <a:prstGeom prst="roundRect">
+            <a:avLst/>
+          </a:prstGeom>
+          <a:solidFill>
+            <a:srgbClr val="FFFFFF"/>
+          </a:solidFill>
+          <a:ln w="19050">
+            <a:solidFill>
+              <a:srgbClr val="E2E8F0"/>
+            </a:solidFill>
+          </a:ln>
+        </p:spPr>
+        <p:style>
+          <a:lnRef idx="1">
+            <a:schemeClr val="accent1"/>
+          </a:lnRef>
+          <a:fillRef idx="3">
+            <a:schemeClr val="accent1"/>
+          </a:fillRef>
+          <a:effectRef idx="2">
+            <a:schemeClr val="accent1"/>
+          </a:effectRef>
+          <a:fontRef idx="minor">
+            <a:schemeClr val="lt1"/>
+          </a:fontRef>
+        </p:style>
+        <p:txBody>
+          <a:bodyPr rtlCol="0" anchor="ctr"/>
+          <a:lstStyle/>
+          <a:p>
+            <a:pPr algn="ctr"/>
+          </a:p>
+        </p:txBody>
+      </p:sp>
+      <p:sp>
+        <p:nvSpPr>
+          <p:cNvPr id="5" name="TextBox 4"/>
+          <p:cNvSpPr txBox="1"/>
+          <p:nvPr/>
+        </p:nvSpPr>
+        <p:spPr>
+          <a:xfrm>
+            <a:off x="960120" y="1554480"/>
+            <a:ext cx="10241280" cy="4480560"/>
+          </a:xfrm>
+          <a:prstGeom prst="rect">
+            <a:avLst/>
+          </a:prstGeom>
+          <a:noFill/>
+        </p:spPr>
+        <p:txBody>
+          <a:bodyPr wrap="square">
+            <a:spAutoFit/>
+          </a:bodyPr>
+          <a:lstStyle/>
+          <a:p>
+            <a:pPr>
+              <a:spcAft>
+                <a:spcPts val="600"/>
+              </a:spcAft>
+              <a:defRPr sz="1200" b="1">
+                <a:solidFill>
+                  <a:srgbClr val="2563EB"/>
+                </a:solidFill>
+              </a:defRPr>
+            </a:pPr>
+            <a:r>
+              <a:t>ANTICIPATED REVIEW QUESTIONS &amp; BULLETPROOF ANSWERS:</a:t>
+            </a:r>
+          </a:p>
+          <a:p>
+            <a:pPr>
+              <a:defRPr sz="1000" b="1">
+                <a:solidFill>
+                  <a:srgbClr val="EA580C"/>
+                </a:solidFill>
+              </a:defRPr>
+            </a:pPr>
+            <a:r>
+              <a:t>Q1: Why not just use KNN or Mean Imputation when features are missing?</a:t>
+            </a:r>
+          </a:p>
+          <a:p>
+            <a:pPr>
+              <a:spcAft>
+                <a:spcPts val="400"/>
+              </a:spcAft>
+              <a:defRPr sz="950">
+                <a:solidFill>
+                  <a:srgbClr val="0F172A"/>
+                </a:solidFill>
+              </a:defRPr>
+            </a:pPr>
+            <a:r>
+              <a:t>A1: Imputation algorithms introduce massive 25-30 ms computation delays per flow—which is completely fatal on a 10Gbps line-rate switch where packet budgets are under 1.2 microseconds. Moreover, empirical evaluation shows imputation hallucinates fake numbers, causing a 99.91% missed-attack rate!</a:t>
+            </a:r>
+          </a:p>
+          <a:p>
+            <a:pPr>
+              <a:defRPr sz="1000" b="1">
+                <a:solidFill>
+                  <a:srgbClr val="EA580C"/>
+                </a:solidFill>
+              </a:defRPr>
+            </a:pPr>
+            <a:r>
+              <a:t>Q2: How do you prevent the arbiter from oscillating rapidly when Q fluctuates?</a:t>
+            </a:r>
+          </a:p>
+          <a:p>
+            <a:pPr>
+              <a:spcAft>
+                <a:spcPts val="400"/>
+              </a:spcAft>
+              <a:defRPr sz="950">
+                <a:solidFill>
+                  <a:srgbClr val="0F172A"/>
+                </a:solidFill>
+              </a:defRPr>
+            </a:pPr>
+            <a:r>
+              <a:t>A2: We engineered a stateful Mode Arbiter with a ±0.05 hysteresis band around thresholds (0.80 and 0.40). The system requires sustained proof to promote or demote modes, eliminating flapping caused by temporary packet jitter.</a:t>
+            </a:r>
+          </a:p>
+          <a:p>
+            <a:pPr>
+              <a:defRPr sz="1000" b="1">
+                <a:solidFill>
+                  <a:srgbClr val="EA580C"/>
+                </a:solidFill>
+              </a:defRPr>
+            </a:pPr>
+            <a:r>
+              <a:t>Q3: Does switching between modes add latency to packet processing?</a:t>
+            </a:r>
+          </a:p>
+          <a:p>
+            <a:pPr>
+              <a:spcAft>
+                <a:spcPts val="400"/>
+              </a:spcAft>
+              <a:defRPr sz="950">
+                <a:solidFill>
+                  <a:srgbClr val="0F172A"/>
+                </a:solidFill>
+              </a:defRPr>
+            </a:pPr>
+            <a:r>
+              <a:t>A3: Zero latency! All models (Mode 1, 2, and 3) remain permanently pre-warmed in system memory. Switching modes is an O(1) pointer dispatch taking less than 1 microsecond.</a:t>
+            </a:r>
+          </a:p>
+          <a:p>
+            <a:pPr>
+              <a:defRPr sz="1000" b="1">
+                <a:solidFill>
+                  <a:srgbClr val="EA580C"/>
+                </a:solidFill>
+              </a:defRPr>
+            </a:pPr>
+            <a:r>
+              <a:t>Q4: Why use Token-Bucket Rate Limiting instead of dropping all attack IPs?</a:t>
+            </a:r>
+          </a:p>
+          <a:p>
+            <a:pPr>
+              <a:spcAft>
+                <a:spcPts val="400"/>
+              </a:spcAft>
+              <a:defRPr sz="950">
+                <a:solidFill>
+                  <a:srgbClr val="0F172A"/>
+                </a:solidFill>
+              </a:defRPr>
+            </a:pPr>
+            <a:r>
+              <a:t>A4: Reconnaissance probes (PortScan) frequently originate from shared university NAT gateways or mobile carrier IPs. If we dropped the entire IP, thousands of innocent students would lose internet access. Token-bucket limits the offending flow to 5 pkts/s, nullifying the attack while preserving shared services.</a:t>
+            </a:r>
+          </a:p>
+        </p:txBody>
+      </p:sp>
+    </p:spTree>
+  </p:cSld>
+  <p:clrMapOvr>
+    <a:masterClrMapping/>
+  </p:clrMapOvr>
+</p:sld>
+</file>
+
+<file path=ppt/slides/slide15.xml><?xml version="1.0" encoding="utf-8"?>
+<p:sld xmlns:a="http://schemas.openxmlformats.org/drawingml/2006/main" xmlns:p="http://schemas.openxmlformats.org/presentationml/2006/main" xmlns:r="http://schemas.openxmlformats.org/officeDocument/2006/relationships">
+  <p:cSld>
+    <p:spTree>
+      <p:nvGrpSpPr>
+        <p:cNvPr id="1" name=""/>
+        <p:cNvGrpSpPr/>
+        <p:nvPr/>
+      </p:nvGrpSpPr>
+      <p:grpSpPr/>
+      <p:sp>
+        <p:nvSpPr>
           <p:cNvPr id="2" name="Rectangle 1"/>
           <p:cNvSpPr/>
           <p:nvPr/>
@@ -4597,7 +6324,7 @@
               </a:defRPr>
             </a:pPr>
             <a:r>
-              <a:t>👥 Team: THARAKESHA.M (24BCE2538) &amp; BHARAT (24BCB0056) • Dept. of CSE, VIT</a:t>
+              <a:t>👥 Team: THARAKESHA.M (24BCE2538) &amp; BHARAT (24BCB0056) • SCOPE, VIT</a:t>
             </a:r>
           </a:p>
         </p:txBody>
@@ -7003,881 +8730,35 @@
               </a:defRPr>
             </a:pPr>
             <a:r>
-              <a:t>System Architecture: End-to-End TIDPS Pipeline</a:t>
-            </a:r>
-          </a:p>
-        </p:txBody>
-      </p:sp>
-      <p:sp>
-        <p:nvSpPr>
-          <p:cNvPr id="4" name="Rounded Rectangle 3"/>
-          <p:cNvSpPr/>
+              <a:t>Master System Architecture: Complete End-to-End Pipeline Diagram</a:t>
+            </a:r>
+          </a:p>
+        </p:txBody>
+      </p:sp>
+      <p:pic>
+        <p:nvPicPr>
+          <p:cNvPr id="4" name="Picture 3" descr="tidps_architecture_diagram.png"/>
+          <p:cNvPicPr>
+            <a:picLocks noChangeAspect="1"/>
+          </p:cNvPicPr>
           <p:nvPr/>
-        </p:nvSpPr>
-        <p:spPr>
-          <a:xfrm>
-            <a:off x="731520" y="1371600"/>
-            <a:ext cx="2011680" cy="4114800"/>
-          </a:xfrm>
-          <a:prstGeom prst="roundRect">
-            <a:avLst/>
-          </a:prstGeom>
-          <a:solidFill>
-            <a:srgbClr val="FFFFFF"/>
-          </a:solidFill>
-          <a:ln w="19050">
-            <a:solidFill>
-              <a:srgbClr val="E2E8F0"/>
-            </a:solidFill>
-          </a:ln>
-        </p:spPr>
-        <p:style>
-          <a:lnRef idx="1">
-            <a:schemeClr val="accent1"/>
-          </a:lnRef>
-          <a:fillRef idx="3">
-            <a:schemeClr val="accent1"/>
-          </a:fillRef>
-          <a:effectRef idx="2">
-            <a:schemeClr val="accent1"/>
-          </a:effectRef>
-          <a:fontRef idx="minor">
-            <a:schemeClr val="lt1"/>
-          </a:fontRef>
-        </p:style>
-        <p:txBody>
-          <a:bodyPr rtlCol="0" anchor="ctr"/>
-          <a:lstStyle/>
-          <a:p>
-            <a:pPr algn="ctr"/>
-          </a:p>
-        </p:txBody>
-      </p:sp>
-      <p:sp>
-        <p:nvSpPr>
-          <p:cNvPr id="5" name="TextBox 4"/>
-          <p:cNvSpPr txBox="1"/>
-          <p:nvPr/>
-        </p:nvSpPr>
-        <p:spPr>
-          <a:xfrm>
-            <a:off x="841248" y="1508760"/>
-            <a:ext cx="1792224" cy="3840480"/>
+        </p:nvPicPr>
+        <p:blipFill>
+          <a:blip r:embed="rId2"/>
+          <a:stretch>
+            <a:fillRect/>
+          </a:stretch>
+        </p:blipFill>
+        <p:spPr>
+          <a:xfrm>
+            <a:off x="731520" y="1280160"/>
+            <a:ext cx="10728655" cy="5120640"/>
           </a:xfrm>
           <a:prstGeom prst="rect">
             <a:avLst/>
           </a:prstGeom>
-          <a:noFill/>
-        </p:spPr>
-        <p:txBody>
-          <a:bodyPr wrap="square">
-            <a:spAutoFit/>
-          </a:bodyPr>
-          <a:lstStyle/>
-          <a:p>
-            <a:pPr>
-              <a:spcAft>
-                <a:spcPts val="400"/>
-              </a:spcAft>
-              <a:defRPr sz="1050" b="1">
-                <a:solidFill>
-                  <a:srgbClr val="2563EB"/>
-                </a:solidFill>
-              </a:defRPr>
-            </a:pPr>
-            <a:r>
-              <a:t>STAGE 1: Ingestion &amp; Feature Vector</a:t>
-            </a:r>
-          </a:p>
-          <a:p>
-            <a:pPr>
-              <a:spcAft>
-                <a:spcPts val="800"/>
-              </a:spcAft>
-              <a:defRPr sz="900" i="1">
-                <a:solidFill>
-                  <a:srgbClr val="64748B"/>
-                </a:solidFill>
-              </a:defRPr>
-            </a:pPr>
-            <a:r>
-              <a:t>Captures packet stream or flow records.</a:t>
-            </a:r>
-          </a:p>
-          <a:p>
-            <a:pPr>
-              <a:spcAft>
-                <a:spcPts val="400"/>
-              </a:spcAft>
-              <a:defRPr sz="900">
-                <a:solidFill>
-                  <a:srgbClr val="0F172A"/>
-                </a:solidFill>
-              </a:defRPr>
-            </a:pPr>
-            <a:r>
-              <a:t>• 5-Tuple extraction</a:t>
-            </a:r>
-          </a:p>
-          <a:p>
-            <a:pPr>
-              <a:spcAft>
-                <a:spcPts val="400"/>
-              </a:spcAft>
-              <a:defRPr sz="900">
-                <a:solidFill>
-                  <a:srgbClr val="0F172A"/>
-                </a:solidFill>
-              </a:defRPr>
-            </a:pPr>
-            <a:r>
-              <a:t>• Ingests 78-dimensional flow vector</a:t>
-            </a:r>
-          </a:p>
-          <a:p>
-            <a:pPr>
-              <a:spcAft>
-                <a:spcPts val="400"/>
-              </a:spcAft>
-              <a:defRPr sz="900">
-                <a:solidFill>
-                  <a:srgbClr val="0F172A"/>
-                </a:solidFill>
-              </a:defRPr>
-            </a:pPr>
-            <a:r>
-              <a:t>• Handles bidirectional and unidirectional traffic</a:t>
-            </a:r>
-          </a:p>
-          <a:p>
-            <a:pPr>
-              <a:spcAft>
-                <a:spcPts val="400"/>
-              </a:spcAft>
-              <a:defRPr sz="900">
-                <a:solidFill>
-                  <a:srgbClr val="0F172A"/>
-                </a:solidFill>
-              </a:defRPr>
-            </a:pPr>
-            <a:r>
-              <a:t>• Models operational degradation</a:t>
-            </a:r>
-          </a:p>
-        </p:txBody>
-      </p:sp>
-      <p:sp>
-        <p:nvSpPr>
-          <p:cNvPr id="6" name="Rounded Rectangle 5"/>
-          <p:cNvSpPr/>
-          <p:nvPr/>
-        </p:nvSpPr>
-        <p:spPr>
-          <a:xfrm>
-            <a:off x="2926080" y="1371600"/>
-            <a:ext cx="2011680" cy="4114800"/>
-          </a:xfrm>
-          <a:prstGeom prst="roundRect">
-            <a:avLst/>
-          </a:prstGeom>
-          <a:solidFill>
-            <a:srgbClr val="FFFFFF"/>
-          </a:solidFill>
-          <a:ln w="19050">
-            <a:solidFill>
-              <a:srgbClr val="E2E8F0"/>
-            </a:solidFill>
-          </a:ln>
-        </p:spPr>
-        <p:style>
-          <a:lnRef idx="1">
-            <a:schemeClr val="accent1"/>
-          </a:lnRef>
-          <a:fillRef idx="3">
-            <a:schemeClr val="accent1"/>
-          </a:fillRef>
-          <a:effectRef idx="2">
-            <a:schemeClr val="accent1"/>
-          </a:effectRef>
-          <a:fontRef idx="minor">
-            <a:schemeClr val="lt1"/>
-          </a:fontRef>
-        </p:style>
-        <p:txBody>
-          <a:bodyPr rtlCol="0" anchor="ctr"/>
-          <a:lstStyle/>
-          <a:p>
-            <a:pPr algn="ctr"/>
-          </a:p>
-        </p:txBody>
-      </p:sp>
-      <p:sp>
-        <p:nvSpPr>
-          <p:cNvPr id="7" name="TextBox 6"/>
-          <p:cNvSpPr txBox="1"/>
-          <p:nvPr/>
-        </p:nvSpPr>
-        <p:spPr>
-          <a:xfrm>
-            <a:off x="3035808" y="1508760"/>
-            <a:ext cx="1792224" cy="3840480"/>
-          </a:xfrm>
-          <a:prstGeom prst="rect">
-            <a:avLst/>
-          </a:prstGeom>
-          <a:noFill/>
-        </p:spPr>
-        <p:txBody>
-          <a:bodyPr wrap="square">
-            <a:spAutoFit/>
-          </a:bodyPr>
-          <a:lstStyle/>
-          <a:p>
-            <a:pPr>
-              <a:spcAft>
-                <a:spcPts val="400"/>
-              </a:spcAft>
-              <a:defRPr sz="1050" b="1">
-                <a:solidFill>
-                  <a:srgbClr val="2563EB"/>
-                </a:solidFill>
-              </a:defRPr>
-            </a:pPr>
-            <a:r>
-              <a:t>STAGE 2: Telemetry Quality Monitor</a:t>
-            </a:r>
-          </a:p>
-          <a:p>
-            <a:pPr>
-              <a:spcAft>
-                <a:spcPts val="800"/>
-              </a:spcAft>
-              <a:defRPr sz="900" i="1">
-                <a:solidFill>
-                  <a:srgbClr val="64748B"/>
-                </a:solidFill>
-              </a:defRPr>
-            </a:pPr>
-            <a:r>
-              <a:t>Computes real-time Quality Score Q(t).</a:t>
-            </a:r>
-          </a:p>
-          <a:p>
-            <a:pPr>
-              <a:spcAft>
-                <a:spcPts val="400"/>
-              </a:spcAft>
-              <a:defRPr sz="900">
-                <a:solidFill>
-                  <a:srgbClr val="0F172A"/>
-                </a:solidFill>
-              </a:defRPr>
-            </a:pPr>
-            <a:r>
-              <a:t>• Feature Completeness C(t)</a:t>
-            </a:r>
-          </a:p>
-          <a:p>
-            <a:pPr>
-              <a:spcAft>
-                <a:spcPts val="400"/>
-              </a:spcAft>
-              <a:defRPr sz="900">
-                <a:solidFill>
-                  <a:srgbClr val="0F172A"/>
-                </a:solidFill>
-              </a:defRPr>
-            </a:pPr>
-            <a:r>
-              <a:t>• Physical Invariant Consistency S(t)</a:t>
-            </a:r>
-          </a:p>
-          <a:p>
-            <a:pPr>
-              <a:spcAft>
-                <a:spcPts val="400"/>
-              </a:spcAft>
-              <a:defRPr sz="900">
-                <a:solidFill>
-                  <a:srgbClr val="0F172A"/>
-                </a:solidFill>
-              </a:defRPr>
-            </a:pPr>
-            <a:r>
-              <a:t>• Formula: Q(t) = 0.70·C(t) + 0.30·S(t)</a:t>
-            </a:r>
-          </a:p>
-          <a:p>
-            <a:pPr>
-              <a:spcAft>
-                <a:spcPts val="400"/>
-              </a:spcAft>
-              <a:defRPr sz="900">
-                <a:solidFill>
-                  <a:srgbClr val="0F172A"/>
-                </a:solidFill>
-              </a:defRPr>
-            </a:pPr>
-            <a:r>
-              <a:t>• Bounded health metric [0.0, 1.0]</a:t>
-            </a:r>
-          </a:p>
-        </p:txBody>
-      </p:sp>
-      <p:sp>
-        <p:nvSpPr>
-          <p:cNvPr id="8" name="Rounded Rectangle 7"/>
-          <p:cNvSpPr/>
-          <p:nvPr/>
-        </p:nvSpPr>
-        <p:spPr>
-          <a:xfrm>
-            <a:off x="5120640" y="1371600"/>
-            <a:ext cx="2011680" cy="4114800"/>
-          </a:xfrm>
-          <a:prstGeom prst="roundRect">
-            <a:avLst/>
-          </a:prstGeom>
-          <a:solidFill>
-            <a:srgbClr val="FFFFFF"/>
-          </a:solidFill>
-          <a:ln w="19050">
-            <a:solidFill>
-              <a:srgbClr val="E2E8F0"/>
-            </a:solidFill>
-          </a:ln>
-        </p:spPr>
-        <p:style>
-          <a:lnRef idx="1">
-            <a:schemeClr val="accent1"/>
-          </a:lnRef>
-          <a:fillRef idx="3">
-            <a:schemeClr val="accent1"/>
-          </a:fillRef>
-          <a:effectRef idx="2">
-            <a:schemeClr val="accent1"/>
-          </a:effectRef>
-          <a:fontRef idx="minor">
-            <a:schemeClr val="lt1"/>
-          </a:fontRef>
-        </p:style>
-        <p:txBody>
-          <a:bodyPr rtlCol="0" anchor="ctr"/>
-          <a:lstStyle/>
-          <a:p>
-            <a:pPr algn="ctr"/>
-          </a:p>
-        </p:txBody>
-      </p:sp>
-      <p:sp>
-        <p:nvSpPr>
-          <p:cNvPr id="9" name="TextBox 8"/>
-          <p:cNvSpPr txBox="1"/>
-          <p:nvPr/>
-        </p:nvSpPr>
-        <p:spPr>
-          <a:xfrm>
-            <a:off x="5230368" y="1508760"/>
-            <a:ext cx="1792224" cy="3840480"/>
-          </a:xfrm>
-          <a:prstGeom prst="rect">
-            <a:avLst/>
-          </a:prstGeom>
-          <a:noFill/>
-        </p:spPr>
-        <p:txBody>
-          <a:bodyPr wrap="square">
-            <a:spAutoFit/>
-          </a:bodyPr>
-          <a:lstStyle/>
-          <a:p>
-            <a:pPr>
-              <a:spcAft>
-                <a:spcPts val="400"/>
-              </a:spcAft>
-              <a:defRPr sz="1050" b="1">
-                <a:solidFill>
-                  <a:srgbClr val="2563EB"/>
-                </a:solidFill>
-              </a:defRPr>
-            </a:pPr>
-            <a:r>
-              <a:t>STAGE 3: Dynamic Mode Arbiter</a:t>
-            </a:r>
-          </a:p>
-          <a:p>
-            <a:pPr>
-              <a:spcAft>
-                <a:spcPts val="800"/>
-              </a:spcAft>
-              <a:defRPr sz="900" i="1">
-                <a:solidFill>
-                  <a:srgbClr val="64748B"/>
-                </a:solidFill>
-              </a:defRPr>
-            </a:pPr>
-            <a:r>
-              <a:t>Stateful tier selection with Hysteresis.</a:t>
-            </a:r>
-          </a:p>
-          <a:p>
-            <a:pPr>
-              <a:spcAft>
-                <a:spcPts val="400"/>
-              </a:spcAft>
-              <a:defRPr sz="900">
-                <a:solidFill>
-                  <a:srgbClr val="0F172A"/>
-                </a:solidFill>
-              </a:defRPr>
-            </a:pPr>
-            <a:r>
-              <a:t>• Thresholds: τ_high=0.80, τ_low=0.40</a:t>
-            </a:r>
-          </a:p>
-          <a:p>
-            <a:pPr>
-              <a:spcAft>
-                <a:spcPts val="400"/>
-              </a:spcAft>
-              <a:defRPr sz="900">
-                <a:solidFill>
-                  <a:srgbClr val="0F172A"/>
-                </a:solidFill>
-              </a:defRPr>
-            </a:pPr>
-            <a:r>
-              <a:t>• Enforces ±0.05 buffer against flapping</a:t>
-            </a:r>
-          </a:p>
-          <a:p>
-            <a:pPr>
-              <a:spcAft>
-                <a:spcPts val="400"/>
-              </a:spcAft>
-              <a:defRPr sz="900">
-                <a:solidFill>
-                  <a:srgbClr val="0F172A"/>
-                </a:solidFill>
-              </a:defRPr>
-            </a:pPr>
-            <a:r>
-              <a:t>• Zero-delay O(1) memory dispatch</a:t>
-            </a:r>
-          </a:p>
-          <a:p>
-            <a:pPr>
-              <a:spcAft>
-                <a:spcPts val="400"/>
-              </a:spcAft>
-              <a:defRPr sz="900">
-                <a:solidFill>
-                  <a:srgbClr val="0F172A"/>
-                </a:solidFill>
-              </a:defRPr>
-            </a:pPr>
-            <a:r>
-              <a:t>• Dispatches to optimal prevalidated mode</a:t>
-            </a:r>
-          </a:p>
-        </p:txBody>
-      </p:sp>
-      <p:sp>
-        <p:nvSpPr>
-          <p:cNvPr id="10" name="Rounded Rectangle 9"/>
-          <p:cNvSpPr/>
-          <p:nvPr/>
-        </p:nvSpPr>
-        <p:spPr>
-          <a:xfrm>
-            <a:off x="7315199" y="1371600"/>
-            <a:ext cx="2011680" cy="4114800"/>
-          </a:xfrm>
-          <a:prstGeom prst="roundRect">
-            <a:avLst/>
-          </a:prstGeom>
-          <a:solidFill>
-            <a:srgbClr val="FFFFFF"/>
-          </a:solidFill>
-          <a:ln w="19050">
-            <a:solidFill>
-              <a:srgbClr val="E2E8F0"/>
-            </a:solidFill>
-          </a:ln>
-        </p:spPr>
-        <p:style>
-          <a:lnRef idx="1">
-            <a:schemeClr val="accent1"/>
-          </a:lnRef>
-          <a:fillRef idx="3">
-            <a:schemeClr val="accent1"/>
-          </a:fillRef>
-          <a:effectRef idx="2">
-            <a:schemeClr val="accent1"/>
-          </a:effectRef>
-          <a:fontRef idx="minor">
-            <a:schemeClr val="lt1"/>
-          </a:fontRef>
-        </p:style>
-        <p:txBody>
-          <a:bodyPr rtlCol="0" anchor="ctr"/>
-          <a:lstStyle/>
-          <a:p>
-            <a:pPr algn="ctr"/>
-          </a:p>
-        </p:txBody>
-      </p:sp>
-      <p:sp>
-        <p:nvSpPr>
-          <p:cNvPr id="11" name="TextBox 10"/>
-          <p:cNvSpPr txBox="1"/>
-          <p:nvPr/>
-        </p:nvSpPr>
-        <p:spPr>
-          <a:xfrm>
-            <a:off x="7424927" y="1508760"/>
-            <a:ext cx="1792224" cy="3840480"/>
-          </a:xfrm>
-          <a:prstGeom prst="rect">
-            <a:avLst/>
-          </a:prstGeom>
-          <a:noFill/>
-        </p:spPr>
-        <p:txBody>
-          <a:bodyPr wrap="square">
-            <a:spAutoFit/>
-          </a:bodyPr>
-          <a:lstStyle/>
-          <a:p>
-            <a:pPr>
-              <a:spcAft>
-                <a:spcPts val="400"/>
-              </a:spcAft>
-              <a:defRPr sz="1050" b="1">
-                <a:solidFill>
-                  <a:srgbClr val="2563EB"/>
-                </a:solidFill>
-              </a:defRPr>
-            </a:pPr>
-            <a:r>
-              <a:t>STAGE 4: Multi-Mode Detection Zoo</a:t>
-            </a:r>
-          </a:p>
-          <a:p>
-            <a:pPr>
-              <a:spcAft>
-                <a:spcPts val="800"/>
-              </a:spcAft>
-              <a:defRPr sz="900" i="1">
-                <a:solidFill>
-                  <a:srgbClr val="64748B"/>
-                </a:solidFill>
-              </a:defRPr>
-            </a:pPr>
-            <a:r>
-              <a:t>Hierarchical threat classification.</a:t>
-            </a:r>
-          </a:p>
-          <a:p>
-            <a:pPr>
-              <a:spcAft>
-                <a:spcPts val="400"/>
-              </a:spcAft>
-              <a:defRPr sz="900">
-                <a:solidFill>
-                  <a:srgbClr val="0F172A"/>
-                </a:solidFill>
-              </a:defRPr>
-            </a:pPr>
-            <a:r>
-              <a:t>• Mode 1: Full 78-feature ML (Q &gt;= 0.80)</a:t>
-            </a:r>
-          </a:p>
-          <a:p>
-            <a:pPr>
-              <a:spcAft>
-                <a:spcPts val="400"/>
-              </a:spcAft>
-              <a:defRPr sz="900">
-                <a:solidFill>
-                  <a:srgbClr val="0F172A"/>
-                </a:solidFill>
-              </a:defRPr>
-            </a:pPr>
-            <a:r>
-              <a:t>• Mode 2: Reduced 16-feature ML (0.40 &lt;= Q &lt; 0.80)</a:t>
-            </a:r>
-          </a:p>
-          <a:p>
-            <a:pPr>
-              <a:spcAft>
-                <a:spcPts val="400"/>
-              </a:spcAft>
-              <a:defRPr sz="900">
-                <a:solidFill>
-                  <a:srgbClr val="0F172A"/>
-                </a:solidFill>
-              </a:defRPr>
-            </a:pPr>
-            <a:r>
-              <a:t>• Mode 3: Deterministic Fallback Rules (&lt;5 µs)</a:t>
-            </a:r>
-          </a:p>
-          <a:p>
-            <a:pPr>
-              <a:spcAft>
-                <a:spcPts val="400"/>
-              </a:spcAft>
-              <a:defRPr sz="900">
-                <a:solidFill>
-                  <a:srgbClr val="0F172A"/>
-                </a:solidFill>
-              </a:defRPr>
-            </a:pPr>
-            <a:r>
-              <a:t>• High F1 retention under sensor failure</a:t>
-            </a:r>
-          </a:p>
-        </p:txBody>
-      </p:sp>
-      <p:sp>
-        <p:nvSpPr>
-          <p:cNvPr id="12" name="Rounded Rectangle 11"/>
-          <p:cNvSpPr/>
-          <p:nvPr/>
-        </p:nvSpPr>
-        <p:spPr>
-          <a:xfrm>
-            <a:off x="9509760" y="1371600"/>
-            <a:ext cx="2011680" cy="4114800"/>
-          </a:xfrm>
-          <a:prstGeom prst="roundRect">
-            <a:avLst/>
-          </a:prstGeom>
-          <a:solidFill>
-            <a:srgbClr val="FFFFFF"/>
-          </a:solidFill>
-          <a:ln w="19050">
-            <a:solidFill>
-              <a:srgbClr val="E2E8F0"/>
-            </a:solidFill>
-          </a:ln>
-        </p:spPr>
-        <p:style>
-          <a:lnRef idx="1">
-            <a:schemeClr val="accent1"/>
-          </a:lnRef>
-          <a:fillRef idx="3">
-            <a:schemeClr val="accent1"/>
-          </a:fillRef>
-          <a:effectRef idx="2">
-            <a:schemeClr val="accent1"/>
-          </a:effectRef>
-          <a:fontRef idx="minor">
-            <a:schemeClr val="lt1"/>
-          </a:fontRef>
-        </p:style>
-        <p:txBody>
-          <a:bodyPr rtlCol="0" anchor="ctr"/>
-          <a:lstStyle/>
-          <a:p>
-            <a:pPr algn="ctr"/>
-          </a:p>
-        </p:txBody>
-      </p:sp>
-      <p:sp>
-        <p:nvSpPr>
-          <p:cNvPr id="13" name="TextBox 12"/>
-          <p:cNvSpPr txBox="1"/>
-          <p:nvPr/>
-        </p:nvSpPr>
-        <p:spPr>
-          <a:xfrm>
-            <a:off x="9619488" y="1508760"/>
-            <a:ext cx="1792224" cy="3840480"/>
-          </a:xfrm>
-          <a:prstGeom prst="rect">
-            <a:avLst/>
-          </a:prstGeom>
-          <a:noFill/>
-        </p:spPr>
-        <p:txBody>
-          <a:bodyPr wrap="square">
-            <a:spAutoFit/>
-          </a:bodyPr>
-          <a:lstStyle/>
-          <a:p>
-            <a:pPr>
-              <a:spcAft>
-                <a:spcPts val="400"/>
-              </a:spcAft>
-              <a:defRPr sz="1050" b="1">
-                <a:solidFill>
-                  <a:srgbClr val="2563EB"/>
-                </a:solidFill>
-              </a:defRPr>
-            </a:pPr>
-            <a:r>
-              <a:t>STAGE 5: Adaptive Mitigation Engine</a:t>
-            </a:r>
-          </a:p>
-          <a:p>
-            <a:pPr>
-              <a:spcAft>
-                <a:spcPts val="800"/>
-              </a:spcAft>
-              <a:defRPr sz="900" i="1">
-                <a:solidFill>
-                  <a:srgbClr val="64748B"/>
-                </a:solidFill>
-              </a:defRPr>
-            </a:pPr>
-            <a:r>
-              <a:t>Automated line-rate threat containment.</a:t>
-            </a:r>
-          </a:p>
-          <a:p>
-            <a:pPr>
-              <a:spcAft>
-                <a:spcPts val="400"/>
-              </a:spcAft>
-              <a:defRPr sz="900">
-                <a:solidFill>
-                  <a:srgbClr val="0F172A"/>
-                </a:solidFill>
-              </a:defRPr>
-            </a:pPr>
-            <a:r>
-              <a:t>• Volumetric (DDoS): Hard IP Quarantine</a:t>
-            </a:r>
-          </a:p>
-          <a:p>
-            <a:pPr>
-              <a:spcAft>
-                <a:spcPts val="400"/>
-              </a:spcAft>
-              <a:defRPr sz="900">
-                <a:solidFill>
-                  <a:srgbClr val="0F172A"/>
-                </a:solidFill>
-              </a:defRPr>
-            </a:pPr>
-            <a:r>
-              <a:t>• Recon (PortScan): Token-bucket rate limit</a:t>
-            </a:r>
-          </a:p>
-          <a:p>
-            <a:pPr>
-              <a:spcAft>
-                <a:spcPts val="400"/>
-              </a:spcAft>
-              <a:defRPr sz="900">
-                <a:solidFill>
-                  <a:srgbClr val="0F172A"/>
-                </a:solidFill>
-              </a:defRPr>
-            </a:pPr>
-            <a:r>
-              <a:t>• Generates Linux iptables &amp; Win PowerShell rules</a:t>
-            </a:r>
-          </a:p>
-          <a:p>
-            <a:pPr>
-              <a:spcAft>
-                <a:spcPts val="400"/>
-              </a:spcAft>
-              <a:defRPr sz="900">
-                <a:solidFill>
-                  <a:srgbClr val="0F172A"/>
-                </a:solidFill>
-              </a:defRPr>
-            </a:pPr>
-            <a:r>
-              <a:t>• Live Quarantine ledger &amp; active blocklist</a:t>
-            </a:r>
-          </a:p>
-        </p:txBody>
-      </p:sp>
-      <p:sp>
-        <p:nvSpPr>
-          <p:cNvPr id="14" name="Rounded Rectangle 13"/>
-          <p:cNvSpPr/>
-          <p:nvPr/>
-        </p:nvSpPr>
-        <p:spPr>
-          <a:xfrm>
-            <a:off x="731520" y="5623560"/>
-            <a:ext cx="10728655" cy="777240"/>
-          </a:xfrm>
-          <a:prstGeom prst="roundRect">
-            <a:avLst/>
-          </a:prstGeom>
-          <a:solidFill>
-            <a:srgbClr val="EEF2FF"/>
-          </a:solidFill>
-          <a:ln w="19050">
-            <a:solidFill>
-              <a:srgbClr val="2563EB"/>
-            </a:solidFill>
-          </a:ln>
-        </p:spPr>
-        <p:style>
-          <a:lnRef idx="1">
-            <a:schemeClr val="accent1"/>
-          </a:lnRef>
-          <a:fillRef idx="3">
-            <a:schemeClr val="accent1"/>
-          </a:fillRef>
-          <a:effectRef idx="2">
-            <a:schemeClr val="accent1"/>
-          </a:effectRef>
-          <a:fontRef idx="minor">
-            <a:schemeClr val="lt1"/>
-          </a:fontRef>
-        </p:style>
-        <p:txBody>
-          <a:bodyPr rtlCol="0" anchor="ctr"/>
-          <a:lstStyle/>
-          <a:p>
-            <a:pPr algn="ctr"/>
-          </a:p>
-        </p:txBody>
-      </p:sp>
-      <p:sp>
-        <p:nvSpPr>
-          <p:cNvPr id="15" name="TextBox 14"/>
-          <p:cNvSpPr txBox="1"/>
-          <p:nvPr/>
-        </p:nvSpPr>
-        <p:spPr>
-          <a:xfrm>
-            <a:off x="914400" y="5715000"/>
-            <a:ext cx="10332720" cy="594360"/>
-          </a:xfrm>
-          <a:prstGeom prst="rect">
-            <a:avLst/>
-          </a:prstGeom>
-          <a:noFill/>
-        </p:spPr>
-        <p:txBody>
-          <a:bodyPr wrap="square">
-            <a:spAutoFit/>
-          </a:bodyPr>
-          <a:lstStyle/>
-          <a:p>
-            <a:pPr algn="ctr">
-              <a:defRPr sz="1050" b="1">
-                <a:solidFill>
-                  <a:srgbClr val="2563EB"/>
-                </a:solidFill>
-              </a:defRPr>
-            </a:pPr>
-            <a:r>
-              <a:t>PIPELINE FLOW:  Raw Ingested Flow ──► Telemetry Quality Assessment Q(t) ──► Mode Arbiter (Hysteresis) ──► Mode 1 / Mode 2 / Mode 3 ──► Adaptive Mitigation (Firewall / Token Bucket)</a:t>
-            </a:r>
-          </a:p>
-        </p:txBody>
-      </p:sp>
+        </p:spPr>
+      </p:pic>
     </p:spTree>
   </p:cSld>
   <p:clrMapOvr>
@@ -7926,7 +8807,7 @@
               </a:defRPr>
             </a:pPr>
             <a:r>
-              <a:t>MATHEMATICAL MODEL &amp; ALGORITHMS</a:t>
+              <a:t>ARCHITECTURAL PIPELINE BREAKDOWN</a:t>
             </a:r>
           </a:p>
         </p:txBody>
@@ -7961,7 +8842,7 @@
               </a:defRPr>
             </a:pPr>
             <a:r>
-              <a:t>Model Description: Tri-Mode Hierarchy &amp; Quality Formulation</a:t>
+              <a:t>Dataflow &amp; Component Specifications across All 5 Stages</a:t>
             </a:r>
           </a:p>
         </p:txBody>
@@ -7975,7 +8856,7 @@
         <p:spPr>
           <a:xfrm>
             <a:off x="731520" y="1371600"/>
-            <a:ext cx="5212080" cy="4846320"/>
+            <a:ext cx="2011680" cy="4114800"/>
           </a:xfrm>
           <a:prstGeom prst="roundRect">
             <a:avLst/>
@@ -8019,8 +8900,8 @@
         </p:nvSpPr>
         <p:spPr>
           <a:xfrm>
-            <a:off x="960120" y="1554480"/>
-            <a:ext cx="4754880" cy="4480560"/>
+            <a:off x="841248" y="1508760"/>
+            <a:ext cx="1792224" cy="3840480"/>
           </a:xfrm>
           <a:prstGeom prst="rect">
             <a:avLst/>
@@ -8035,163 +8916,91 @@
           <a:p>
             <a:pPr>
               <a:spcAft>
-                <a:spcPts val="600"/>
-              </a:spcAft>
-              <a:defRPr sz="1200" b="1">
+                <a:spcPts val="400"/>
+              </a:spcAft>
+              <a:defRPr sz="1050" b="1">
                 <a:solidFill>
                   <a:srgbClr val="2563EB"/>
                 </a:solidFill>
               </a:defRPr>
             </a:pPr>
             <a:r>
-              <a:t>1. TELEMETRY QUALITY MONITORING (TQM)</a:t>
-            </a:r>
-          </a:p>
-          <a:p>
-            <a:pPr>
-              <a:defRPr sz="1050" b="1">
-                <a:solidFill>
-                  <a:srgbClr val="0F172A"/>
-                </a:solidFill>
-              </a:defRPr>
-            </a:pPr>
-            <a:r>
-              <a:t>Observation Vector Formulation:</a:t>
-            </a:r>
-          </a:p>
-          <a:p>
-            <a:pPr>
-              <a:spcAft>
-                <a:spcPts val="500"/>
-              </a:spcAft>
-              <a:defRPr sz="950">
+              <a:t>STAGE 1: Ingestion &amp; Degradation</a:t>
+            </a:r>
+          </a:p>
+          <a:p>
+            <a:pPr>
+              <a:spcAft>
+                <a:spcPts val="800"/>
+              </a:spcAft>
+              <a:defRPr sz="900" i="1">
                 <a:solidFill>
                   <a:srgbClr val="64748B"/>
                 </a:solidFill>
               </a:defRPr>
             </a:pPr>
             <a:r>
-              <a:t>x(t) = m(t) ⊙ x*(t) + ε(t), where m(t) ∈ {0, 1}^D is the binary feature observability mask, and ε(t) denotes timestamp and measurement jitter.</a:t>
-            </a:r>
-          </a:p>
-          <a:p>
-            <a:pPr>
-              <a:defRPr sz="1050" b="1">
-                <a:solidFill>
-                  <a:srgbClr val="0F172A"/>
-                </a:solidFill>
-              </a:defRPr>
-            </a:pPr>
-            <a:r>
-              <a:t>Feature Completeness C(t):</a:t>
-            </a:r>
-          </a:p>
-          <a:p>
-            <a:pPr>
-              <a:spcAft>
-                <a:spcPts val="500"/>
-              </a:spcAft>
-              <a:defRPr sz="950">
-                <a:solidFill>
-                  <a:srgbClr val="64748B"/>
-                </a:solidFill>
-              </a:defRPr>
-            </a:pPr>
-            <a:r>
-              <a:t>C(t) = (1 / ∑ w_i) ∑ w_i · m_i(t), prioritizing Layer 3/4 immutable header attributes (w_i = 1.0) over volatile inter-arrival statistics (w_i = 0.5).</a:t>
-            </a:r>
-          </a:p>
-          <a:p>
-            <a:pPr>
-              <a:defRPr sz="1050" b="1">
-                <a:solidFill>
-                  <a:srgbClr val="0F172A"/>
-                </a:solidFill>
-              </a:defRPr>
-            </a:pPr>
-            <a:r>
-              <a:t>Physical Invariant Consistency S(t):</a:t>
-            </a:r>
-          </a:p>
-          <a:p>
-            <a:pPr>
-              <a:spcAft>
-                <a:spcPts val="500"/>
-              </a:spcAft>
-              <a:defRPr sz="950">
-                <a:solidFill>
-                  <a:srgbClr val="64748B"/>
-                </a:solidFill>
-              </a:defRPr>
-            </a:pPr>
-            <a:r>
-              <a:t>S(t) validates fundamental network laws: Duration &gt; 0, Packet Lengths bounded by MTU (1500 bytes), Flow Bytes/s matching packet products, and TCP flag correlation (SYN without ACK for floods).</a:t>
-            </a:r>
-          </a:p>
-          <a:p>
-            <a:pPr>
-              <a:defRPr sz="1050" b="1">
-                <a:solidFill>
-                  <a:srgbClr val="0F172A"/>
-                </a:solidFill>
-              </a:defRPr>
-            </a:pPr>
-            <a:r>
-              <a:t>Composite Quality Score Q(t):</a:t>
-            </a:r>
-          </a:p>
-          <a:p>
-            <a:pPr>
-              <a:spcAft>
-                <a:spcPts val="500"/>
-              </a:spcAft>
-              <a:defRPr sz="950">
-                <a:solidFill>
-                  <a:srgbClr val="64748B"/>
-                </a:solidFill>
-              </a:defRPr>
-            </a:pPr>
-            <a:r>
-              <a:t>Q(t) = 0.70 · C(t) + 0.30 · S(t)  ∈ [0.0, 1.0]</a:t>
-            </a:r>
-          </a:p>
-          <a:p>
-            <a:pPr>
-              <a:defRPr sz="1050" b="1">
-                <a:solidFill>
-                  <a:srgbClr val="0F172A"/>
-                </a:solidFill>
-              </a:defRPr>
-            </a:pPr>
-            <a:r>
-              <a:t>Hysteresis Band (±0.05 Buffer):</a:t>
-            </a:r>
-          </a:p>
-          <a:p>
-            <a:pPr>
-              <a:spcAft>
-                <a:spcPts val="500"/>
-              </a:spcAft>
-              <a:defRPr sz="950">
-                <a:solidFill>
-                  <a:srgbClr val="64748B"/>
-                </a:solidFill>
-              </a:defRPr>
-            </a:pPr>
-            <a:r>
-              <a:t>Mode transitions require crossing buffered boundaries:</a:t>
-            </a:r>
-            <a:br/>
-            <a:r>
-              <a:t>• Mode 1: Retained while Q(t) &gt;= 0.75</a:t>
-            </a:r>
-            <a:br/>
-            <a:r>
-              <a:t>• Mode 2: Promoted if Q(t) &gt;= 0.80; Demoted if Q(t) &lt; 0.35</a:t>
-            </a:r>
-            <a:br/>
-            <a:r>
-              <a:t>• Mode 3: Engaged when Q(t) &lt; 0.40</a:t>
+              <a:t>Captures packet stream or flow records.</a:t>
+            </a:r>
+          </a:p>
+          <a:p>
+            <a:pPr>
+              <a:spcAft>
+                <a:spcPts val="400"/>
+              </a:spcAft>
+              <a:defRPr sz="900">
+                <a:solidFill>
+                  <a:srgbClr val="0F172A"/>
+                </a:solidFill>
+              </a:defRPr>
+            </a:pPr>
+            <a:r>
+              <a:t>• 5-Tuple extraction</a:t>
+            </a:r>
+          </a:p>
+          <a:p>
+            <a:pPr>
+              <a:spcAft>
+                <a:spcPts val="400"/>
+              </a:spcAft>
+              <a:defRPr sz="900">
+                <a:solidFill>
+                  <a:srgbClr val="0F172A"/>
+                </a:solidFill>
+              </a:defRPr>
+            </a:pPr>
+            <a:r>
+              <a:t>• Ingests 78-dimensional flow vector</a:t>
+            </a:r>
+          </a:p>
+          <a:p>
+            <a:pPr>
+              <a:spcAft>
+                <a:spcPts val="400"/>
+              </a:spcAft>
+              <a:defRPr sz="900">
+                <a:solidFill>
+                  <a:srgbClr val="0F172A"/>
+                </a:solidFill>
+              </a:defRPr>
+            </a:pPr>
+            <a:r>
+              <a:t>• Simulates L0 (Clean), L1 (Jitter), L2 (Asymmetric), L3 (Starvation)</a:t>
+            </a:r>
+          </a:p>
+          <a:p>
+            <a:pPr>
+              <a:spcAft>
+                <a:spcPts val="400"/>
+              </a:spcAft>
+              <a:defRPr sz="900">
+                <a:solidFill>
+                  <a:srgbClr val="0F172A"/>
+                </a:solidFill>
+              </a:defRPr>
+            </a:pPr>
+            <a:r>
+              <a:t>• Handles zero-backward paths</a:t>
             </a:r>
           </a:p>
         </p:txBody>
@@ -8204,8 +9013,8 @@
         </p:nvSpPr>
         <p:spPr>
           <a:xfrm>
-            <a:off x="6217920" y="1371600"/>
-            <a:ext cx="5212080" cy="4846320"/>
+            <a:off x="2926080" y="1371600"/>
+            <a:ext cx="2011680" cy="4114800"/>
           </a:xfrm>
           <a:prstGeom prst="roundRect">
             <a:avLst/>
@@ -8249,8 +9058,8 @@
         </p:nvSpPr>
         <p:spPr>
           <a:xfrm>
-            <a:off x="6446520" y="1554480"/>
-            <a:ext cx="4754880" cy="4480560"/>
+            <a:off x="3035808" y="1508760"/>
+            <a:ext cx="1792224" cy="3840480"/>
           </a:xfrm>
           <a:prstGeom prst="rect">
             <a:avLst/>
@@ -8265,205 +9074,645 @@
           <a:p>
             <a:pPr>
               <a:spcAft>
-                <a:spcPts val="600"/>
-              </a:spcAft>
-              <a:defRPr sz="1200" b="1">
+                <a:spcPts val="400"/>
+              </a:spcAft>
+              <a:defRPr sz="1050" b="1">
                 <a:solidFill>
                   <a:srgbClr val="2563EB"/>
                 </a:solidFill>
               </a:defRPr>
             </a:pPr>
             <a:r>
-              <a:t>2. PREVALIDATED TRI-MODE DETECTION ZOO</a:t>
-            </a:r>
-          </a:p>
-          <a:p>
-            <a:pPr>
+              <a:t>STAGE 2: Telemetry Quality Monitor</a:t>
+            </a:r>
+          </a:p>
+          <a:p>
+            <a:pPr>
+              <a:spcAft>
+                <a:spcPts val="800"/>
+              </a:spcAft>
+              <a:defRPr sz="900" i="1">
+                <a:solidFill>
+                  <a:srgbClr val="64748B"/>
+                </a:solidFill>
+              </a:defRPr>
+            </a:pPr>
+            <a:r>
+              <a:t>Computes real-time Quality Score Q(t).</a:t>
+            </a:r>
+          </a:p>
+          <a:p>
+            <a:pPr>
+              <a:spcAft>
+                <a:spcPts val="400"/>
+              </a:spcAft>
+              <a:defRPr sz="900">
+                <a:solidFill>
+                  <a:srgbClr val="0F172A"/>
+                </a:solidFill>
+              </a:defRPr>
+            </a:pPr>
+            <a:r>
+              <a:t>• Feature Completeness C(t) (weighted sum)</a:t>
+            </a:r>
+          </a:p>
+          <a:p>
+            <a:pPr>
+              <a:spcAft>
+                <a:spcPts val="400"/>
+              </a:spcAft>
+              <a:defRPr sz="900">
+                <a:solidFill>
+                  <a:srgbClr val="0F172A"/>
+                </a:solidFill>
+              </a:defRPr>
+            </a:pPr>
+            <a:r>
+              <a:t>• Invariant Consistency S(t) (physical bounds)</a:t>
+            </a:r>
+          </a:p>
+          <a:p>
+            <a:pPr>
+              <a:spcAft>
+                <a:spcPts val="400"/>
+              </a:spcAft>
+              <a:defRPr sz="900">
+                <a:solidFill>
+                  <a:srgbClr val="0F172A"/>
+                </a:solidFill>
+              </a:defRPr>
+            </a:pPr>
+            <a:r>
+              <a:t>• Composite Q(t) = 0.70·C(t) + 0.30·S(t)</a:t>
+            </a:r>
+          </a:p>
+          <a:p>
+            <a:pPr>
+              <a:spcAft>
+                <a:spcPts val="400"/>
+              </a:spcAft>
+              <a:defRPr sz="900">
+                <a:solidFill>
+                  <a:srgbClr val="0F172A"/>
+                </a:solidFill>
+              </a:defRPr>
+            </a:pPr>
+            <a:r>
+              <a:t>• Output: continuous health grade [0.0, 1.0]</a:t>
+            </a:r>
+          </a:p>
+        </p:txBody>
+      </p:sp>
+      <p:sp>
+        <p:nvSpPr>
+          <p:cNvPr id="8" name="Rounded Rectangle 7"/>
+          <p:cNvSpPr/>
+          <p:nvPr/>
+        </p:nvSpPr>
+        <p:spPr>
+          <a:xfrm>
+            <a:off x="5120640" y="1371600"/>
+            <a:ext cx="2011680" cy="4114800"/>
+          </a:xfrm>
+          <a:prstGeom prst="roundRect">
+            <a:avLst/>
+          </a:prstGeom>
+          <a:solidFill>
+            <a:srgbClr val="FFFFFF"/>
+          </a:solidFill>
+          <a:ln w="19050">
+            <a:solidFill>
+              <a:srgbClr val="E2E8F0"/>
+            </a:solidFill>
+          </a:ln>
+        </p:spPr>
+        <p:style>
+          <a:lnRef idx="1">
+            <a:schemeClr val="accent1"/>
+          </a:lnRef>
+          <a:fillRef idx="3">
+            <a:schemeClr val="accent1"/>
+          </a:fillRef>
+          <a:effectRef idx="2">
+            <a:schemeClr val="accent1"/>
+          </a:effectRef>
+          <a:fontRef idx="minor">
+            <a:schemeClr val="lt1"/>
+          </a:fontRef>
+        </p:style>
+        <p:txBody>
+          <a:bodyPr rtlCol="0" anchor="ctr"/>
+          <a:lstStyle/>
+          <a:p>
+            <a:pPr algn="ctr"/>
+          </a:p>
+        </p:txBody>
+      </p:sp>
+      <p:sp>
+        <p:nvSpPr>
+          <p:cNvPr id="9" name="TextBox 8"/>
+          <p:cNvSpPr txBox="1"/>
+          <p:nvPr/>
+        </p:nvSpPr>
+        <p:spPr>
+          <a:xfrm>
+            <a:off x="5230368" y="1508760"/>
+            <a:ext cx="1792224" cy="3840480"/>
+          </a:xfrm>
+          <a:prstGeom prst="rect">
+            <a:avLst/>
+          </a:prstGeom>
+          <a:noFill/>
+        </p:spPr>
+        <p:txBody>
+          <a:bodyPr wrap="square">
+            <a:spAutoFit/>
+          </a:bodyPr>
+          <a:lstStyle/>
+          <a:p>
+            <a:pPr>
+              <a:spcAft>
+                <a:spcPts val="400"/>
+              </a:spcAft>
               <a:defRPr sz="1050" b="1">
                 <a:solidFill>
-                  <a:srgbClr val="0F172A"/>
-                </a:solidFill>
-              </a:defRPr>
-            </a:pPr>
-            <a:r>
-              <a:t>MODE 1: Full-Feature ML (78 Features)</a:t>
-            </a:r>
-          </a:p>
-          <a:p>
-            <a:pPr>
+                  <a:srgbClr val="2563EB"/>
+                </a:solidFill>
+              </a:defRPr>
+            </a:pPr>
+            <a:r>
+              <a:t>STAGE 3: Dynamic Mode Arbiter</a:t>
+            </a:r>
+          </a:p>
+          <a:p>
+            <a:pPr>
+              <a:spcAft>
+                <a:spcPts val="800"/>
+              </a:spcAft>
               <a:defRPr sz="900" i="1">
                 <a:solidFill>
+                  <a:srgbClr val="64748B"/>
+                </a:solidFill>
+              </a:defRPr>
+            </a:pPr>
+            <a:r>
+              <a:t>Stateful tier selection with Hysteresis.</a:t>
+            </a:r>
+          </a:p>
+          <a:p>
+            <a:pPr>
+              <a:spcAft>
+                <a:spcPts val="400"/>
+              </a:spcAft>
+              <a:defRPr sz="900">
+                <a:solidFill>
+                  <a:srgbClr val="0F172A"/>
+                </a:solidFill>
+              </a:defRPr>
+            </a:pPr>
+            <a:r>
+              <a:t>• Thresholds: τ_high=0.80, τ_low=0.40</a:t>
+            </a:r>
+          </a:p>
+          <a:p>
+            <a:pPr>
+              <a:spcAft>
+                <a:spcPts val="400"/>
+              </a:spcAft>
+              <a:defRPr sz="900">
+                <a:solidFill>
+                  <a:srgbClr val="0F172A"/>
+                </a:solidFill>
+              </a:defRPr>
+            </a:pPr>
+            <a:r>
+              <a:t>• Enforces ±0.05 buffer against flapping</a:t>
+            </a:r>
+          </a:p>
+          <a:p>
+            <a:pPr>
+              <a:spcAft>
+                <a:spcPts val="400"/>
+              </a:spcAft>
+              <a:defRPr sz="900">
+                <a:solidFill>
+                  <a:srgbClr val="0F172A"/>
+                </a:solidFill>
+              </a:defRPr>
+            </a:pPr>
+            <a:r>
+              <a:t>• Zero-delay O(1) memory dispatch</a:t>
+            </a:r>
+          </a:p>
+          <a:p>
+            <a:pPr>
+              <a:spcAft>
+                <a:spcPts val="400"/>
+              </a:spcAft>
+              <a:defRPr sz="900">
+                <a:solidFill>
+                  <a:srgbClr val="0F172A"/>
+                </a:solidFill>
+              </a:defRPr>
+            </a:pPr>
+            <a:r>
+              <a:t>• Routes to Mode 1, Mode 2, or Mode 3</a:t>
+            </a:r>
+          </a:p>
+        </p:txBody>
+      </p:sp>
+      <p:sp>
+        <p:nvSpPr>
+          <p:cNvPr id="10" name="Rounded Rectangle 9"/>
+          <p:cNvSpPr/>
+          <p:nvPr/>
+        </p:nvSpPr>
+        <p:spPr>
+          <a:xfrm>
+            <a:off x="7315199" y="1371600"/>
+            <a:ext cx="2011680" cy="4114800"/>
+          </a:xfrm>
+          <a:prstGeom prst="roundRect">
+            <a:avLst/>
+          </a:prstGeom>
+          <a:solidFill>
+            <a:srgbClr val="FFFFFF"/>
+          </a:solidFill>
+          <a:ln w="19050">
+            <a:solidFill>
+              <a:srgbClr val="E2E8F0"/>
+            </a:solidFill>
+          </a:ln>
+        </p:spPr>
+        <p:style>
+          <a:lnRef idx="1">
+            <a:schemeClr val="accent1"/>
+          </a:lnRef>
+          <a:fillRef idx="3">
+            <a:schemeClr val="accent1"/>
+          </a:fillRef>
+          <a:effectRef idx="2">
+            <a:schemeClr val="accent1"/>
+          </a:effectRef>
+          <a:fontRef idx="minor">
+            <a:schemeClr val="lt1"/>
+          </a:fontRef>
+        </p:style>
+        <p:txBody>
+          <a:bodyPr rtlCol="0" anchor="ctr"/>
+          <a:lstStyle/>
+          <a:p>
+            <a:pPr algn="ctr"/>
+          </a:p>
+        </p:txBody>
+      </p:sp>
+      <p:sp>
+        <p:nvSpPr>
+          <p:cNvPr id="11" name="TextBox 10"/>
+          <p:cNvSpPr txBox="1"/>
+          <p:nvPr/>
+        </p:nvSpPr>
+        <p:spPr>
+          <a:xfrm>
+            <a:off x="7424927" y="1508760"/>
+            <a:ext cx="1792224" cy="3840480"/>
+          </a:xfrm>
+          <a:prstGeom prst="rect">
+            <a:avLst/>
+          </a:prstGeom>
+          <a:noFill/>
+        </p:spPr>
+        <p:txBody>
+          <a:bodyPr wrap="square">
+            <a:spAutoFit/>
+          </a:bodyPr>
+          <a:lstStyle/>
+          <a:p>
+            <a:pPr>
+              <a:spcAft>
+                <a:spcPts val="400"/>
+              </a:spcAft>
+              <a:defRPr sz="1050" b="1">
+                <a:solidFill>
                   <a:srgbClr val="2563EB"/>
                 </a:solidFill>
               </a:defRPr>
             </a:pPr>
             <a:r>
-              <a:t>High-Fidelity Regime (Q &gt;= 0.80)</a:t>
-            </a:r>
-          </a:p>
-          <a:p>
-            <a:pPr>
+              <a:t>STAGE 4: Multi-Mode Detection Zoo</a:t>
+            </a:r>
+          </a:p>
+          <a:p>
+            <a:pPr>
+              <a:spcAft>
+                <a:spcPts val="800"/>
+              </a:spcAft>
+              <a:defRPr sz="900" i="1">
+                <a:solidFill>
+                  <a:srgbClr val="64748B"/>
+                </a:solidFill>
+              </a:defRPr>
+            </a:pPr>
+            <a:r>
+              <a:t>Hierarchical threat classification.</a:t>
+            </a:r>
+          </a:p>
+          <a:p>
+            <a:pPr>
+              <a:spcAft>
+                <a:spcPts val="400"/>
+              </a:spcAft>
               <a:defRPr sz="900">
                 <a:solidFill>
+                  <a:srgbClr val="0F172A"/>
+                </a:solidFill>
+              </a:defRPr>
+            </a:pPr>
+            <a:r>
+              <a:t>• Mode 1: Full 78-feature ML (Q &gt;= 0.80)</a:t>
+            </a:r>
+          </a:p>
+          <a:p>
+            <a:pPr>
+              <a:spcAft>
+                <a:spcPts val="400"/>
+              </a:spcAft>
+              <a:defRPr sz="900">
+                <a:solidFill>
+                  <a:srgbClr val="0F172A"/>
+                </a:solidFill>
+              </a:defRPr>
+            </a:pPr>
+            <a:r>
+              <a:t>• Mode 2: Reduced 16-feature ML (0.40 &lt;= Q &lt; 0.80)</a:t>
+            </a:r>
+          </a:p>
+          <a:p>
+            <a:pPr>
+              <a:spcAft>
+                <a:spcPts val="400"/>
+              </a:spcAft>
+              <a:defRPr sz="900">
+                <a:solidFill>
+                  <a:srgbClr val="0F172A"/>
+                </a:solidFill>
+              </a:defRPr>
+            </a:pPr>
+            <a:r>
+              <a:t>• Mode 3: Deterministic Fallback Rules (&lt;5 µs)</a:t>
+            </a:r>
+          </a:p>
+          <a:p>
+            <a:pPr>
+              <a:spcAft>
+                <a:spcPts val="400"/>
+              </a:spcAft>
+              <a:defRPr sz="900">
+                <a:solidFill>
+                  <a:srgbClr val="0F172A"/>
+                </a:solidFill>
+              </a:defRPr>
+            </a:pPr>
+            <a:r>
+              <a:t>• Zero reliance on synthetic imputation</a:t>
+            </a:r>
+          </a:p>
+        </p:txBody>
+      </p:sp>
+      <p:sp>
+        <p:nvSpPr>
+          <p:cNvPr id="12" name="Rounded Rectangle 11"/>
+          <p:cNvSpPr/>
+          <p:nvPr/>
+        </p:nvSpPr>
+        <p:spPr>
+          <a:xfrm>
+            <a:off x="9509760" y="1371600"/>
+            <a:ext cx="2011680" cy="4114800"/>
+          </a:xfrm>
+          <a:prstGeom prst="roundRect">
+            <a:avLst/>
+          </a:prstGeom>
+          <a:solidFill>
+            <a:srgbClr val="FFFFFF"/>
+          </a:solidFill>
+          <a:ln w="19050">
+            <a:solidFill>
+              <a:srgbClr val="E2E8F0"/>
+            </a:solidFill>
+          </a:ln>
+        </p:spPr>
+        <p:style>
+          <a:lnRef idx="1">
+            <a:schemeClr val="accent1"/>
+          </a:lnRef>
+          <a:fillRef idx="3">
+            <a:schemeClr val="accent1"/>
+          </a:fillRef>
+          <a:effectRef idx="2">
+            <a:schemeClr val="accent1"/>
+          </a:effectRef>
+          <a:fontRef idx="minor">
+            <a:schemeClr val="lt1"/>
+          </a:fontRef>
+        </p:style>
+        <p:txBody>
+          <a:bodyPr rtlCol="0" anchor="ctr"/>
+          <a:lstStyle/>
+          <a:p>
+            <a:pPr algn="ctr"/>
+          </a:p>
+        </p:txBody>
+      </p:sp>
+      <p:sp>
+        <p:nvSpPr>
+          <p:cNvPr id="13" name="TextBox 12"/>
+          <p:cNvSpPr txBox="1"/>
+          <p:nvPr/>
+        </p:nvSpPr>
+        <p:spPr>
+          <a:xfrm>
+            <a:off x="9619488" y="1508760"/>
+            <a:ext cx="1792224" cy="3840480"/>
+          </a:xfrm>
+          <a:prstGeom prst="rect">
+            <a:avLst/>
+          </a:prstGeom>
+          <a:noFill/>
+        </p:spPr>
+        <p:txBody>
+          <a:bodyPr wrap="square">
+            <a:spAutoFit/>
+          </a:bodyPr>
+          <a:lstStyle/>
+          <a:p>
+            <a:pPr>
+              <a:spcAft>
+                <a:spcPts val="400"/>
+              </a:spcAft>
+              <a:defRPr sz="1050" b="1">
+                <a:solidFill>
+                  <a:srgbClr val="2563EB"/>
+                </a:solidFill>
+              </a:defRPr>
+            </a:pPr>
+            <a:r>
+              <a:t>STAGE 5: Adaptive Mitigation Engine</a:t>
+            </a:r>
+          </a:p>
+          <a:p>
+            <a:pPr>
+              <a:spcAft>
+                <a:spcPts val="800"/>
+              </a:spcAft>
+              <a:defRPr sz="900" i="1">
+                <a:solidFill>
                   <a:srgbClr val="64748B"/>
                 </a:solidFill>
               </a:defRPr>
             </a:pPr>
             <a:r>
-              <a:t>• Architecture: Tuned Random Forest (100 estimators, max depth 15).</a:t>
-            </a:r>
-          </a:p>
-          <a:p>
-            <a:pPr>
+              <a:t>Automated line-rate threat containment.</a:t>
+            </a:r>
+          </a:p>
+          <a:p>
+            <a:pPr>
+              <a:spcAft>
+                <a:spcPts val="400"/>
+              </a:spcAft>
               <a:defRPr sz="900">
                 <a:solidFill>
-                  <a:srgbClr val="64748B"/>
-                </a:solidFill>
-              </a:defRPr>
-            </a:pPr>
-            <a:r>
-              <a:t>• Operates on full bidirectional flow metrics, IAT distributions, and subflow features.</a:t>
-            </a:r>
-          </a:p>
-          <a:p>
-            <a:pPr>
-              <a:spcAft>
-                <a:spcPts val="500"/>
+                  <a:srgbClr val="0F172A"/>
+                </a:solidFill>
+              </a:defRPr>
+            </a:pPr>
+            <a:r>
+              <a:t>• Volumetric (DDoS): Hard IP Quarantine</a:t>
+            </a:r>
+          </a:p>
+          <a:p>
+            <a:pPr>
+              <a:spcAft>
+                <a:spcPts val="400"/>
               </a:spcAft>
               <a:defRPr sz="900">
                 <a:solidFill>
-                  <a:srgbClr val="64748B"/>
-                </a:solidFill>
-              </a:defRPr>
-            </a:pPr>
-            <a:r>
-              <a:t>• Accuracy: 1.0000 Macro F1 on pristine telemetry.</a:t>
-            </a:r>
-          </a:p>
-          <a:p>
-            <a:pPr>
+                  <a:srgbClr val="0F172A"/>
+                </a:solidFill>
+              </a:defRPr>
+            </a:pPr>
+            <a:r>
+              <a:t>• Recon (PortScan): Token-bucket rate limit</a:t>
+            </a:r>
+          </a:p>
+          <a:p>
+            <a:pPr>
+              <a:spcAft>
+                <a:spcPts val="400"/>
+              </a:spcAft>
+              <a:defRPr sz="900">
+                <a:solidFill>
+                  <a:srgbClr val="0F172A"/>
+                </a:solidFill>
+              </a:defRPr>
+            </a:pPr>
+            <a:r>
+              <a:t>• Generates Linux iptables &amp; Win PowerShell rules</a:t>
+            </a:r>
+          </a:p>
+          <a:p>
+            <a:pPr>
+              <a:spcAft>
+                <a:spcPts val="400"/>
+              </a:spcAft>
+              <a:defRPr sz="900">
+                <a:solidFill>
+                  <a:srgbClr val="0F172A"/>
+                </a:solidFill>
+              </a:defRPr>
+            </a:pPr>
+            <a:r>
+              <a:t>• Live Quarantine ledger &amp; active blocklist</a:t>
+            </a:r>
+          </a:p>
+        </p:txBody>
+      </p:sp>
+      <p:sp>
+        <p:nvSpPr>
+          <p:cNvPr id="14" name="Rounded Rectangle 13"/>
+          <p:cNvSpPr/>
+          <p:nvPr/>
+        </p:nvSpPr>
+        <p:spPr>
+          <a:xfrm>
+            <a:off x="731520" y="5623560"/>
+            <a:ext cx="10728655" cy="777240"/>
+          </a:xfrm>
+          <a:prstGeom prst="roundRect">
+            <a:avLst/>
+          </a:prstGeom>
+          <a:solidFill>
+            <a:srgbClr val="EEF2FF"/>
+          </a:solidFill>
+          <a:ln w="19050">
+            <a:solidFill>
+              <a:srgbClr val="2563EB"/>
+            </a:solidFill>
+          </a:ln>
+        </p:spPr>
+        <p:style>
+          <a:lnRef idx="1">
+            <a:schemeClr val="accent1"/>
+          </a:lnRef>
+          <a:fillRef idx="3">
+            <a:schemeClr val="accent1"/>
+          </a:fillRef>
+          <a:effectRef idx="2">
+            <a:schemeClr val="accent1"/>
+          </a:effectRef>
+          <a:fontRef idx="minor">
+            <a:schemeClr val="lt1"/>
+          </a:fontRef>
+        </p:style>
+        <p:txBody>
+          <a:bodyPr rtlCol="0" anchor="ctr"/>
+          <a:lstStyle/>
+          <a:p>
+            <a:pPr algn="ctr"/>
+          </a:p>
+        </p:txBody>
+      </p:sp>
+      <p:sp>
+        <p:nvSpPr>
+          <p:cNvPr id="15" name="TextBox 14"/>
+          <p:cNvSpPr txBox="1"/>
+          <p:nvPr/>
+        </p:nvSpPr>
+        <p:spPr>
+          <a:xfrm>
+            <a:off x="914400" y="5715000"/>
+            <a:ext cx="10332720" cy="594360"/>
+          </a:xfrm>
+          <a:prstGeom prst="rect">
+            <a:avLst/>
+          </a:prstGeom>
+          <a:noFill/>
+        </p:spPr>
+        <p:txBody>
+          <a:bodyPr wrap="square">
+            <a:spAutoFit/>
+          </a:bodyPr>
+          <a:lstStyle/>
+          <a:p>
+            <a:pPr algn="ctr">
               <a:defRPr sz="1050" b="1">
                 <a:solidFill>
-                  <a:srgbClr val="0F172A"/>
-                </a:solidFill>
-              </a:defRPr>
-            </a:pPr>
-            <a:r>
-              <a:t>MODE 2: Degraded L3/L4 ML (16 Features)</a:t>
-            </a:r>
-          </a:p>
-          <a:p>
-            <a:pPr>
-              <a:defRPr sz="900" i="1">
-                <a:solidFill>
                   <a:srgbClr val="2563EB"/>
                 </a:solidFill>
               </a:defRPr>
             </a:pPr>
             <a:r>
-              <a:t>Resilient Header Regime (0.40 &lt;= Q &lt; 0.80)</a:t>
-            </a:r>
-          </a:p>
-          <a:p>
-            <a:pPr>
-              <a:defRPr sz="900">
-                <a:solidFill>
-                  <a:srgbClr val="64748B"/>
-                </a:solidFill>
-              </a:defRPr>
-            </a:pPr>
-            <a:r>
-              <a:t>• Architecture: Reduced Random Forest trained strictly on forward immutable header counters (Dest Port, Fwd Pkts, Fwd Bytes, TCP Flags).</a:t>
-            </a:r>
-          </a:p>
-          <a:p>
-            <a:pPr>
-              <a:defRPr sz="900">
-                <a:solidFill>
-                  <a:srgbClr val="64748B"/>
-                </a:solidFill>
-              </a:defRPr>
-            </a:pPr>
-            <a:r>
-              <a:t>• Immune to asymmetric routing and line-rate sampling.</a:t>
-            </a:r>
-          </a:p>
-          <a:p>
-            <a:pPr>
-              <a:spcAft>
-                <a:spcPts val="500"/>
-              </a:spcAft>
-              <a:defRPr sz="900">
-                <a:solidFill>
-                  <a:srgbClr val="64748B"/>
-                </a:solidFill>
-              </a:defRPr>
-            </a:pPr>
-            <a:r>
-              <a:t>• Retains 0.9551 F1 where static models collapse to 0.6269.</a:t>
-            </a:r>
-          </a:p>
-          <a:p>
-            <a:pPr>
-              <a:defRPr sz="1050" b="1">
-                <a:solidFill>
-                  <a:srgbClr val="0F172A"/>
-                </a:solidFill>
-              </a:defRPr>
-            </a:pPr>
-            <a:r>
-              <a:t>MODE 3: Deterministic Fallback Rules (4 Signals)</a:t>
-            </a:r>
-          </a:p>
-          <a:p>
-            <a:pPr>
-              <a:defRPr sz="900" i="1">
-                <a:solidFill>
-                  <a:srgbClr val="2563EB"/>
-                </a:solidFill>
-              </a:defRPr>
-            </a:pPr>
-            <a:r>
-              <a:t>Hardware Starvation Regime (Q &lt; 0.40)</a:t>
-            </a:r>
-          </a:p>
-          <a:p>
-            <a:pPr>
-              <a:defRPr sz="900">
-                <a:solidFill>
-                  <a:srgbClr val="64748B"/>
-                </a:solidFill>
-              </a:defRPr>
-            </a:pPr>
-            <a:r>
-              <a:t>• Architecture: Algorithmic volumetric rule engine executing in &lt;5 µs.</a:t>
-            </a:r>
-          </a:p>
-          <a:p>
-            <a:pPr>
-              <a:defRPr sz="900">
-                <a:solidFill>
-                  <a:srgbClr val="64748B"/>
-                </a:solidFill>
-              </a:defRPr>
-            </a:pPr>
-            <a:r>
-              <a:t>• Evaluates hardware counters: Flow Packets/s, Flow Bytes/s, SYN Count, ACK Count.</a:t>
-            </a:r>
-          </a:p>
-          <a:p>
-            <a:pPr>
-              <a:spcAft>
-                <a:spcPts val="500"/>
-              </a:spcAft>
-              <a:defRPr sz="900">
-                <a:solidFill>
-                  <a:srgbClr val="64748B"/>
-                </a:solidFill>
-              </a:defRPr>
-            </a:pPr>
-            <a:r>
-              <a:t>• Prevents total system blindness during severe switch starvation.</a:t>
+              <a:t>END-TO-END PIPELINE:  Flow Ingestion ──► TQM Assessment Q(t) ──► Mode Arbiter (Hysteresis) ──► Mode 1 / 2 / 3 ──► Mitigation (IP Drop / Token Bucket)</a:t>
             </a:r>
           </a:p>
         </p:txBody>
@@ -8516,7 +9765,7 @@
               </a:defRPr>
             </a:pPr>
             <a:r>
-              <a:t>AUTOMATED THREAT MITIGATION</a:t>
+              <a:t>MATHEMATICAL MODEL &amp; ALGORITHMS</a:t>
             </a:r>
           </a:p>
         </p:txBody>
@@ -8551,7 +9800,7 @@
               </a:defRPr>
             </a:pPr>
             <a:r>
-              <a:t>Dual-Action Adaptive Prevention &amp; Firewall Integration</a:t>
+              <a:t>Model Description: Mathematical Formulation of TQM &amp; Arbiter</a:t>
             </a:r>
           </a:p>
         </p:txBody>
@@ -8565,323 +9814,7 @@
         <p:spPr>
           <a:xfrm>
             <a:off x="731520" y="1371600"/>
-            <a:ext cx="5212080" cy="3931920"/>
-          </a:xfrm>
-          <a:prstGeom prst="roundRect">
-            <a:avLst/>
-          </a:prstGeom>
-          <a:solidFill>
-            <a:srgbClr val="FEF2F2"/>
-          </a:solidFill>
-          <a:ln w="19050">
-            <a:solidFill>
-              <a:srgbClr val="FECACA"/>
-            </a:solidFill>
-          </a:ln>
-        </p:spPr>
-        <p:style>
-          <a:lnRef idx="1">
-            <a:schemeClr val="accent1"/>
-          </a:lnRef>
-          <a:fillRef idx="3">
-            <a:schemeClr val="accent1"/>
-          </a:fillRef>
-          <a:effectRef idx="2">
-            <a:schemeClr val="accent1"/>
-          </a:effectRef>
-          <a:fontRef idx="minor">
-            <a:schemeClr val="lt1"/>
-          </a:fontRef>
-        </p:style>
-        <p:txBody>
-          <a:bodyPr rtlCol="0" anchor="ctr"/>
-          <a:lstStyle/>
-          <a:p>
-            <a:pPr algn="ctr"/>
-          </a:p>
-        </p:txBody>
-      </p:sp>
-      <p:sp>
-        <p:nvSpPr>
-          <p:cNvPr id="5" name="TextBox 4"/>
-          <p:cNvSpPr txBox="1"/>
-          <p:nvPr/>
-        </p:nvSpPr>
-        <p:spPr>
-          <a:xfrm>
-            <a:off x="960120" y="1554480"/>
-            <a:ext cx="4754880" cy="3566160"/>
-          </a:xfrm>
-          <a:prstGeom prst="rect">
-            <a:avLst/>
-          </a:prstGeom>
-          <a:noFill/>
-        </p:spPr>
-        <p:txBody>
-          <a:bodyPr wrap="square">
-            <a:spAutoFit/>
-          </a:bodyPr>
-          <a:lstStyle/>
-          <a:p>
-            <a:pPr>
-              <a:spcAft>
-                <a:spcPts val="600"/>
-              </a:spcAft>
-              <a:defRPr sz="1200" b="1">
-                <a:solidFill>
-                  <a:srgbClr val="DC2626"/>
-                </a:solidFill>
-              </a:defRPr>
-            </a:pPr>
-            <a:r>
-              <a:t>ACTION 1: HARD IP QUARANTINE (HIGH SEVERITY)</a:t>
-            </a:r>
-          </a:p>
-          <a:p>
-            <a:pPr>
-              <a:spcAft>
-                <a:spcPts val="400"/>
-              </a:spcAft>
-              <a:defRPr sz="1000">
-                <a:solidFill>
-                  <a:srgbClr val="0F172A"/>
-                </a:solidFill>
-              </a:defRPr>
-            </a:pPr>
-            <a:r>
-              <a:t>• Target Threats: DDoS LOIC-HTTP Floods, Volumetric SYN Floods, Brute-Force SSH/RDP.</a:t>
-            </a:r>
-          </a:p>
-          <a:p>
-            <a:pPr>
-              <a:spcAft>
-                <a:spcPts val="400"/>
-              </a:spcAft>
-              <a:defRPr sz="1000">
-                <a:solidFill>
-                  <a:srgbClr val="0F172A"/>
-                </a:solidFill>
-              </a:defRPr>
-            </a:pPr>
-            <a:r>
-              <a:t>• Mechanism: Dynamically blacklists the offending Source IP for 30 minutes (1800s expiration timer) across kernel firewalls.</a:t>
-            </a:r>
-          </a:p>
-          <a:p>
-            <a:pPr>
-              <a:spcAft>
-                <a:spcPts val="400"/>
-              </a:spcAft>
-              <a:defRPr sz="1000">
-                <a:solidFill>
-                  <a:srgbClr val="0F172A"/>
-                </a:solidFill>
-              </a:defRPr>
-            </a:pPr>
-            <a:r>
-              <a:t>• Linux Command: iptables -A INPUT -s &lt;src_ip&gt; -j DROP</a:t>
-            </a:r>
-          </a:p>
-          <a:p>
-            <a:pPr>
-              <a:spcAft>
-                <a:spcPts val="400"/>
-              </a:spcAft>
-              <a:defRPr sz="1000">
-                <a:solidFill>
-                  <a:srgbClr val="0F172A"/>
-                </a:solidFill>
-              </a:defRPr>
-            </a:pPr>
-            <a:r>
-              <a:t>• Windows Command: New-NetFirewallRule -DisplayName 'TIDPS_Block_&lt;src_ip&gt;' -Direction Inbound -Action Block -RemoteAddress &lt;src_ip&gt;</a:t>
-            </a:r>
-          </a:p>
-          <a:p>
-            <a:pPr>
-              <a:spcAft>
-                <a:spcPts val="400"/>
-              </a:spcAft>
-              <a:defRPr sz="1000">
-                <a:solidFill>
-                  <a:srgbClr val="0F172A"/>
-                </a:solidFill>
-              </a:defRPr>
-            </a:pPr>
-            <a:r>
-              <a:t>• Result: Stops bandwidth exhaustion at line-rate without human intervention.</a:t>
-            </a:r>
-          </a:p>
-        </p:txBody>
-      </p:sp>
-      <p:sp>
-        <p:nvSpPr>
-          <p:cNvPr id="6" name="Rounded Rectangle 5"/>
-          <p:cNvSpPr/>
-          <p:nvPr/>
-        </p:nvSpPr>
-        <p:spPr>
-          <a:xfrm>
-            <a:off x="6217920" y="1371600"/>
-            <a:ext cx="5212080" cy="3931920"/>
-          </a:xfrm>
-          <a:prstGeom prst="roundRect">
-            <a:avLst/>
-          </a:prstGeom>
-          <a:solidFill>
-            <a:srgbClr val="FEF9C3"/>
-          </a:solidFill>
-          <a:ln w="19050">
-            <a:solidFill>
-              <a:srgbClr val="FDE047"/>
-            </a:solidFill>
-          </a:ln>
-        </p:spPr>
-        <p:style>
-          <a:lnRef idx="1">
-            <a:schemeClr val="accent1"/>
-          </a:lnRef>
-          <a:fillRef idx="3">
-            <a:schemeClr val="accent1"/>
-          </a:fillRef>
-          <a:effectRef idx="2">
-            <a:schemeClr val="accent1"/>
-          </a:effectRef>
-          <a:fontRef idx="minor">
-            <a:schemeClr val="lt1"/>
-          </a:fontRef>
-        </p:style>
-        <p:txBody>
-          <a:bodyPr rtlCol="0" anchor="ctr"/>
-          <a:lstStyle/>
-          <a:p>
-            <a:pPr algn="ctr"/>
-          </a:p>
-        </p:txBody>
-      </p:sp>
-      <p:sp>
-        <p:nvSpPr>
-          <p:cNvPr id="7" name="TextBox 6"/>
-          <p:cNvSpPr txBox="1"/>
-          <p:nvPr/>
-        </p:nvSpPr>
-        <p:spPr>
-          <a:xfrm>
-            <a:off x="6446520" y="1554480"/>
-            <a:ext cx="4754880" cy="3566160"/>
-          </a:xfrm>
-          <a:prstGeom prst="rect">
-            <a:avLst/>
-          </a:prstGeom>
-          <a:noFill/>
-        </p:spPr>
-        <p:txBody>
-          <a:bodyPr wrap="square">
-            <a:spAutoFit/>
-          </a:bodyPr>
-          <a:lstStyle/>
-          <a:p>
-            <a:pPr>
-              <a:spcAft>
-                <a:spcPts val="600"/>
-              </a:spcAft>
-              <a:defRPr sz="1200" b="1">
-                <a:solidFill>
-                  <a:srgbClr val="EA580C"/>
-                </a:solidFill>
-              </a:defRPr>
-            </a:pPr>
-            <a:r>
-              <a:t>ACTION 2: TOKEN-BUCKET RATE LIMITING (MEDIUM SEVERITY)</a:t>
-            </a:r>
-          </a:p>
-          <a:p>
-            <a:pPr>
-              <a:spcAft>
-                <a:spcPts val="400"/>
-              </a:spcAft>
-              <a:defRPr sz="1000">
-                <a:solidFill>
-                  <a:srgbClr val="0F172A"/>
-                </a:solidFill>
-              </a:defRPr>
-            </a:pPr>
-            <a:r>
-              <a:t>• Target Threats: PortScan (Horizontal &amp; Vertical Probing), Slowloris, Reconnaissance.</a:t>
-            </a:r>
-          </a:p>
-          <a:p>
-            <a:pPr>
-              <a:spcAft>
-                <a:spcPts val="400"/>
-              </a:spcAft>
-              <a:defRPr sz="1000">
-                <a:solidFill>
-                  <a:srgbClr val="0F172A"/>
-                </a:solidFill>
-              </a:defRPr>
-            </a:pPr>
-            <a:r>
-              <a:t>• Problem with Hard Drop: Reconnaissance often originates from shared university NAT gateways or mobile carrier IPs. Hard IP quarantine would block thousands of innocent students!</a:t>
-            </a:r>
-          </a:p>
-          <a:p>
-            <a:pPr>
-              <a:spcAft>
-                <a:spcPts val="400"/>
-              </a:spcAft>
-              <a:defRPr sz="1000">
-                <a:solidFill>
-                  <a:srgbClr val="0F172A"/>
-                </a:solidFill>
-              </a:defRPr>
-            </a:pPr>
-            <a:r>
-              <a:t>• Adaptive Solution: Applies token-bucket rate limiting (5 packets/second) to the specific flow 5-tuple.</a:t>
-            </a:r>
-          </a:p>
-          <a:p>
-            <a:pPr>
-              <a:spcAft>
-                <a:spcPts val="400"/>
-              </a:spcAft>
-              <a:defRPr sz="1000">
-                <a:solidFill>
-                  <a:srgbClr val="0F172A"/>
-                </a:solidFill>
-              </a:defRPr>
-            </a:pPr>
-            <a:r>
-              <a:t>• Linux TC Rule: tc qdisc add dev eth0 root handle 1: cbq bandwidth 100Mbit ...</a:t>
-            </a:r>
-          </a:p>
-          <a:p>
-            <a:pPr>
-              <a:spcAft>
-                <a:spcPts val="400"/>
-              </a:spcAft>
-              <a:defRPr sz="1000">
-                <a:solidFill>
-                  <a:srgbClr val="0F172A"/>
-                </a:solidFill>
-              </a:defRPr>
-            </a:pPr>
-            <a:r>
-              <a:t>• Result: Renders reconnaissance probes computationally useless while preserving legitimate shared traffic.</a:t>
-            </a:r>
-          </a:p>
-        </p:txBody>
-      </p:sp>
-      <p:sp>
-        <p:nvSpPr>
-          <p:cNvPr id="8" name="Rounded Rectangle 7"/>
-          <p:cNvSpPr/>
-          <p:nvPr/>
-        </p:nvSpPr>
-        <p:spPr>
-          <a:xfrm>
-            <a:off x="731520" y="5440680"/>
-            <a:ext cx="10728655" cy="960120"/>
+            <a:ext cx="5212080" cy="4846320"/>
           </a:xfrm>
           <a:prstGeom prst="roundRect">
             <a:avLst/>
@@ -8919,14 +9852,14 @@
       </p:sp>
       <p:sp>
         <p:nvSpPr>
-          <p:cNvPr id="9" name="TextBox 8"/>
+          <p:cNvPr id="5" name="TextBox 4"/>
           <p:cNvSpPr txBox="1"/>
           <p:nvPr/>
         </p:nvSpPr>
         <p:spPr>
           <a:xfrm>
-            <a:off x="960120" y="5532120"/>
-            <a:ext cx="10241280" cy="777240"/>
+            <a:off x="960120" y="1554480"/>
+            <a:ext cx="4754880" cy="4480560"/>
           </a:xfrm>
           <a:prstGeom prst="rect">
             <a:avLst/>
@@ -8940,26 +9873,344 @@
           <a:lstStyle/>
           <a:p>
             <a:pPr>
-              <a:defRPr sz="1000" b="1">
+              <a:spcAft>
+                <a:spcPts val="600"/>
+              </a:spcAft>
+              <a:defRPr sz="1200" b="1">
                 <a:solidFill>
                   <a:srgbClr val="2563EB"/>
                 </a:solidFill>
               </a:defRPr>
             </a:pPr>
             <a:r>
-              <a:t>REAL-TIME INCIDENT LEDGER &amp; SYNCHRONIZATION:</a:t>
-            </a:r>
-          </a:p>
-          <a:p>
-            <a:pPr>
-              <a:defRPr sz="1000">
-                <a:solidFill>
-                  <a:srgbClr val="0F172A"/>
-                </a:solidFill>
-              </a:defRPr>
-            </a:pPr>
-            <a:r>
-              <a:t>All security actions are committed to an immutable real-time ledger synchronized in Indian Standard Time (IST), displaying Source IP, Threat Classification, Triggered Mode, Action Taken, and live PowerShell / iptables execution blocks.</a:t>
+              <a:t>1. TELEMETRY QUALITY MONITORING (TQM)</a:t>
+            </a:r>
+          </a:p>
+          <a:p>
+            <a:pPr>
+              <a:defRPr sz="1050" b="1">
+                <a:solidFill>
+                  <a:srgbClr val="0F172A"/>
+                </a:solidFill>
+              </a:defRPr>
+            </a:pPr>
+            <a:r>
+              <a:t>Observation Vector Formulation:</a:t>
+            </a:r>
+          </a:p>
+          <a:p>
+            <a:pPr>
+              <a:spcAft>
+                <a:spcPts val="500"/>
+              </a:spcAft>
+              <a:defRPr sz="950">
+                <a:solidFill>
+                  <a:srgbClr val="64748B"/>
+                </a:solidFill>
+              </a:defRPr>
+            </a:pPr>
+            <a:r>
+              <a:t>x(t) = m(t) ⊙ x*(t) + ε(t), where m(t) ∈ {0, 1}^D is the binary feature observability mask, and ε(t) denotes timestamp and measurement jitter.</a:t>
+            </a:r>
+          </a:p>
+          <a:p>
+            <a:pPr>
+              <a:defRPr sz="1050" b="1">
+                <a:solidFill>
+                  <a:srgbClr val="0F172A"/>
+                </a:solidFill>
+              </a:defRPr>
+            </a:pPr>
+            <a:r>
+              <a:t>Feature Completeness C(t):</a:t>
+            </a:r>
+          </a:p>
+          <a:p>
+            <a:pPr>
+              <a:spcAft>
+                <a:spcPts val="500"/>
+              </a:spcAft>
+              <a:defRPr sz="950">
+                <a:solidFill>
+                  <a:srgbClr val="64748B"/>
+                </a:solidFill>
+              </a:defRPr>
+            </a:pPr>
+            <a:r>
+              <a:t>C(t) = (1 / ∑ w_i) ∑ w_i · m_i(t), prioritizing Layer 3/4 immutable header attributes (w_i = 2.5) over volatile backward inter-arrival statistics (w_i = 0.5).</a:t>
+            </a:r>
+          </a:p>
+          <a:p>
+            <a:pPr>
+              <a:defRPr sz="1050" b="1">
+                <a:solidFill>
+                  <a:srgbClr val="0F172A"/>
+                </a:solidFill>
+              </a:defRPr>
+            </a:pPr>
+            <a:r>
+              <a:t>Physical Invariant Consistency S(t):</a:t>
+            </a:r>
+          </a:p>
+          <a:p>
+            <a:pPr>
+              <a:spcAft>
+                <a:spcPts val="500"/>
+              </a:spcAft>
+              <a:defRPr sz="950">
+                <a:solidFill>
+                  <a:srgbClr val="64748B"/>
+                </a:solidFill>
+              </a:defRPr>
+            </a:pPr>
+            <a:r>
+              <a:t>S(t) validates fundamental network laws:</a:t>
+            </a:r>
+            <a:br/>
+            <a:r>
+              <a:t>1. Total Bytes ≥ Total Packets × 20 (IP Header Minimum)</a:t>
+            </a:r>
+            <a:br/>
+            <a:r>
+              <a:t>2. Flow Duration ≥ 0</a:t>
+            </a:r>
+            <a:br/>
+            <a:r>
+              <a:t>3. Wire Rate ≤ 1.25 GB/s (10Gbps physical maximum)</a:t>
+            </a:r>
+            <a:br/>
+            <a:r>
+              <a:t>4. Valid Destination Port range [1, 65535]</a:t>
+            </a:r>
+          </a:p>
+          <a:p>
+            <a:pPr>
+              <a:defRPr sz="1050" b="1">
+                <a:solidFill>
+                  <a:srgbClr val="0F172A"/>
+                </a:solidFill>
+              </a:defRPr>
+            </a:pPr>
+            <a:r>
+              <a:t>Composite Quality Score Q(t):</a:t>
+            </a:r>
+          </a:p>
+          <a:p>
+            <a:pPr>
+              <a:spcAft>
+                <a:spcPts val="500"/>
+              </a:spcAft>
+              <a:defRPr sz="950">
+                <a:solidFill>
+                  <a:srgbClr val="64748B"/>
+                </a:solidFill>
+              </a:defRPr>
+            </a:pPr>
+            <a:r>
+              <a:t>Q(t) = 0.70 · C(t) + 0.30 · S(t)  ∈ [0.0, 1.0]</a:t>
+            </a:r>
+          </a:p>
+        </p:txBody>
+      </p:sp>
+      <p:sp>
+        <p:nvSpPr>
+          <p:cNvPr id="6" name="Rounded Rectangle 5"/>
+          <p:cNvSpPr/>
+          <p:nvPr/>
+        </p:nvSpPr>
+        <p:spPr>
+          <a:xfrm>
+            <a:off x="6217920" y="1371600"/>
+            <a:ext cx="5212080" cy="4846320"/>
+          </a:xfrm>
+          <a:prstGeom prst="roundRect">
+            <a:avLst/>
+          </a:prstGeom>
+          <a:solidFill>
+            <a:srgbClr val="FFFFFF"/>
+          </a:solidFill>
+          <a:ln w="19050">
+            <a:solidFill>
+              <a:srgbClr val="E2E8F0"/>
+            </a:solidFill>
+          </a:ln>
+        </p:spPr>
+        <p:style>
+          <a:lnRef idx="1">
+            <a:schemeClr val="accent1"/>
+          </a:lnRef>
+          <a:fillRef idx="3">
+            <a:schemeClr val="accent1"/>
+          </a:fillRef>
+          <a:effectRef idx="2">
+            <a:schemeClr val="accent1"/>
+          </a:effectRef>
+          <a:fontRef idx="minor">
+            <a:schemeClr val="lt1"/>
+          </a:fontRef>
+        </p:style>
+        <p:txBody>
+          <a:bodyPr rtlCol="0" anchor="ctr"/>
+          <a:lstStyle/>
+          <a:p>
+            <a:pPr algn="ctr"/>
+          </a:p>
+        </p:txBody>
+      </p:sp>
+      <p:sp>
+        <p:nvSpPr>
+          <p:cNvPr id="7" name="TextBox 6"/>
+          <p:cNvSpPr txBox="1"/>
+          <p:nvPr/>
+        </p:nvSpPr>
+        <p:spPr>
+          <a:xfrm>
+            <a:off x="6446520" y="1554480"/>
+            <a:ext cx="4754880" cy="4480560"/>
+          </a:xfrm>
+          <a:prstGeom prst="rect">
+            <a:avLst/>
+          </a:prstGeom>
+          <a:noFill/>
+        </p:spPr>
+        <p:txBody>
+          <a:bodyPr wrap="square">
+            <a:spAutoFit/>
+          </a:bodyPr>
+          <a:lstStyle/>
+          <a:p>
+            <a:pPr>
+              <a:spcAft>
+                <a:spcPts val="600"/>
+              </a:spcAft>
+              <a:defRPr sz="1200" b="1">
+                <a:solidFill>
+                  <a:srgbClr val="2563EB"/>
+                </a:solidFill>
+              </a:defRPr>
+            </a:pPr>
+            <a:r>
+              <a:t>2. DYNAMIC MODE ARBITER WITH HYSTERESIS</a:t>
+            </a:r>
+          </a:p>
+          <a:p>
+            <a:pPr>
+              <a:defRPr sz="1050" b="1">
+                <a:solidFill>
+                  <a:srgbClr val="0F172A"/>
+                </a:solidFill>
+              </a:defRPr>
+            </a:pPr>
+            <a:r>
+              <a:t>The Mode Flapping Problem:</a:t>
+            </a:r>
+          </a:p>
+          <a:p>
+            <a:pPr>
+              <a:spcAft>
+                <a:spcPts val="500"/>
+              </a:spcAft>
+              <a:defRPr sz="950">
+                <a:solidFill>
+                  <a:srgbClr val="64748B"/>
+                </a:solidFill>
+              </a:defRPr>
+            </a:pPr>
+            <a:r>
+              <a:t>Near decision boundaries (0.80 and 0.40), microsecond jitter causes rapid mode oscillations, creating system thrashing and false alarms.</a:t>
+            </a:r>
+          </a:p>
+          <a:p>
+            <a:pPr>
+              <a:defRPr sz="1050" b="1">
+                <a:solidFill>
+                  <a:srgbClr val="0F172A"/>
+                </a:solidFill>
+              </a:defRPr>
+            </a:pPr>
+            <a:r>
+              <a:t>Hysteresis Formulation:</a:t>
+            </a:r>
+          </a:p>
+          <a:p>
+            <a:pPr>
+              <a:spcAft>
+                <a:spcPts val="500"/>
+              </a:spcAft>
+              <a:defRPr sz="950">
+                <a:solidFill>
+                  <a:srgbClr val="64748B"/>
+                </a:solidFill>
+              </a:defRPr>
+            </a:pPr>
+            <a:r>
+              <a:t>Enforces a guard band δ = ±0.05 around thresholds:</a:t>
+            </a:r>
+            <a:br/>
+            <a:r>
+              <a:t>• Currently in Mode 1: Stay in Mode 1 unless Q(t) &lt; 0.75.</a:t>
+            </a:r>
+            <a:br/>
+            <a:r>
+              <a:t>• Currently in Mode 2: Promoted to Mode 1 only if Q(t) ≥ 0.80; Demoted to Mode 3 only if Q(t) &lt; 0.35.</a:t>
+            </a:r>
+            <a:br/>
+            <a:r>
+              <a:t>• Currently in Mode 3: Promoted to Mode 2 only if Q(t) ≥ 0.40.</a:t>
+            </a:r>
+          </a:p>
+          <a:p>
+            <a:pPr>
+              <a:defRPr sz="1050" b="1">
+                <a:solidFill>
+                  <a:srgbClr val="0F172A"/>
+                </a:solidFill>
+              </a:defRPr>
+            </a:pPr>
+            <a:r>
+              <a:t>Zero Latency Memory Pointer Dispatch:</a:t>
+            </a:r>
+          </a:p>
+          <a:p>
+            <a:pPr>
+              <a:spcAft>
+                <a:spcPts val="500"/>
+              </a:spcAft>
+              <a:defRPr sz="950">
+                <a:solidFill>
+                  <a:srgbClr val="64748B"/>
+                </a:solidFill>
+              </a:defRPr>
+            </a:pPr>
+            <a:r>
+              <a:t>All models remain pre-warmed in memory. Switching modes involves an O(1) function pointer swap executing in under 1 microsecond, avoiding any cold-start latency.</a:t>
+            </a:r>
+          </a:p>
+          <a:p>
+            <a:pPr>
+              <a:defRPr sz="1050" b="1">
+                <a:solidFill>
+                  <a:srgbClr val="0F172A"/>
+                </a:solidFill>
+              </a:defRPr>
+            </a:pPr>
+            <a:r>
+              <a:t>Fail-Safe Guarantee:</a:t>
+            </a:r>
+          </a:p>
+          <a:p>
+            <a:pPr>
+              <a:spcAft>
+                <a:spcPts val="500"/>
+              </a:spcAft>
+              <a:defRPr sz="950">
+                <a:solidFill>
+                  <a:srgbClr val="64748B"/>
+                </a:solidFill>
+              </a:defRPr>
+            </a:pPr>
+            <a:r>
+              <a:t>If Q(t) experiences a sudden total drop, the Arbiter immediately dispatches to Mode 3 rules without waiting for timer expiration.</a:t>
             </a:r>
           </a:p>
         </p:txBody>
@@ -9012,7 +10263,7 @@
               </a:defRPr>
             </a:pPr>
             <a:r>
-              <a:t>EMPIRICAL EVALUATION</a:t>
+              <a:t>MULTI-TIER DETECTION ARCHITECTURE</a:t>
             </a:r>
           </a:p>
         </p:txBody>
@@ -9047,877 +10298,31 @@
               </a:defRPr>
             </a:pPr>
             <a:r>
-              <a:t>Experimental Benchmarks on CIC-IDS2017 (3,750 Flows)</a:t>
-            </a:r>
-          </a:p>
-        </p:txBody>
-      </p:sp>
-      <p:graphicFrame>
-        <p:nvGraphicFramePr>
-          <p:cNvPr id="4" name="Table 3"/>
-          <p:cNvGraphicFramePr>
-            <a:graphicFrameLocks noGrp="1"/>
-          </p:cNvGraphicFramePr>
-          <p:nvPr/>
-        </p:nvGraphicFramePr>
-        <p:xfrm>
-          <a:off x="731520" y="1280160"/>
-          <a:ext cx="10728655" cy="2926080"/>
-        </p:xfrm>
-        <a:graphic>
-          <a:graphicData uri="http://schemas.openxmlformats.org/drawingml/2006/table">
-            <a:tbl>
-              <a:tblPr firstRow="1" bandRow="1">
-                <a:tableStyleId>{5C22544A-7EE6-4342-B048-85BDC9FD1C3A}</a:tableStyleId>
-              </a:tblPr>
-              <a:tblGrid>
-                <a:gridCol w="2468880"/>
-                <a:gridCol w="1280160"/>
-                <a:gridCol w="1280160"/>
-                <a:gridCol w="1463040"/>
-                <a:gridCol w="1463040"/>
-                <a:gridCol w="1280160"/>
-                <a:gridCol w="1493215"/>
-              </a:tblGrid>
-              <a:tr h="585216">
-                <a:tc>
-                  <a:txBody>
-                    <a:bodyPr/>
-                    <a:lstStyle/>
-                    <a:p>
-                      <a:pPr algn="ctr">
-                        <a:defRPr sz="1000" b="1">
-                          <a:solidFill>
-                            <a:srgbClr val="FFFFFF"/>
-                          </a:solidFill>
-                        </a:defRPr>
-                      </a:pPr>
-                      <a:r>
-                        <a:t>Architecture</a:t>
-                      </a:r>
-                    </a:p>
-                  </a:txBody>
-                  <a:tcPr>
-                    <a:solidFill>
-                      <a:srgbClr val="2563EB"/>
-                    </a:solidFill>
-                  </a:tcPr>
-                </a:tc>
-                <a:tc>
-                  <a:txBody>
-                    <a:bodyPr/>
-                    <a:lstStyle/>
-                    <a:p>
-                      <a:pPr algn="ctr">
-                        <a:defRPr sz="1000" b="1">
-                          <a:solidFill>
-                            <a:srgbClr val="FFFFFF"/>
-                          </a:solidFill>
-                        </a:defRPr>
-                      </a:pPr>
-                      <a:r>
-                        <a:t>L0 (Clean)</a:t>
-                      </a:r>
-                    </a:p>
-                  </a:txBody>
-                  <a:tcPr>
-                    <a:solidFill>
-                      <a:srgbClr val="2563EB"/>
-                    </a:solidFill>
-                  </a:tcPr>
-                </a:tc>
-                <a:tc>
-                  <a:txBody>
-                    <a:bodyPr/>
-                    <a:lstStyle/>
-                    <a:p>
-                      <a:pPr algn="ctr">
-                        <a:defRPr sz="1000" b="1">
-                          <a:solidFill>
-                            <a:srgbClr val="FFFFFF"/>
-                          </a:solidFill>
-                        </a:defRPr>
-                      </a:pPr>
-                      <a:r>
-                        <a:t>L1 (Mild)</a:t>
-                      </a:r>
-                    </a:p>
-                  </a:txBody>
-                  <a:tcPr>
-                    <a:solidFill>
-                      <a:srgbClr val="2563EB"/>
-                    </a:solidFill>
-                  </a:tcPr>
-                </a:tc>
-                <a:tc>
-                  <a:txBody>
-                    <a:bodyPr/>
-                    <a:lstStyle/>
-                    <a:p>
-                      <a:pPr algn="ctr">
-                        <a:defRPr sz="1000" b="1">
-                          <a:solidFill>
-                            <a:srgbClr val="FFFFFF"/>
-                          </a:solidFill>
-                        </a:defRPr>
-                      </a:pPr>
-                      <a:r>
-                        <a:t>L2 (Asymmetric)</a:t>
-                      </a:r>
-                    </a:p>
-                  </a:txBody>
-                  <a:tcPr>
-                    <a:solidFill>
-                      <a:srgbClr val="2563EB"/>
-                    </a:solidFill>
-                  </a:tcPr>
-                </a:tc>
-                <a:tc>
-                  <a:txBody>
-                    <a:bodyPr/>
-                    <a:lstStyle/>
-                    <a:p>
-                      <a:pPr algn="ctr">
-                        <a:defRPr sz="1000" b="1">
-                          <a:solidFill>
-                            <a:srgbClr val="FFFFFF"/>
-                          </a:solidFill>
-                        </a:defRPr>
-                      </a:pPr>
-                      <a:r>
-                        <a:t>L3 (Starvation)</a:t>
-                      </a:r>
-                    </a:p>
-                  </a:txBody>
-                  <a:tcPr>
-                    <a:solidFill>
-                      <a:srgbClr val="2563EB"/>
-                    </a:solidFill>
-                  </a:tcPr>
-                </a:tc>
-                <a:tc>
-                  <a:txBody>
-                    <a:bodyPr/>
-                    <a:lstStyle/>
-                    <a:p>
-                      <a:pPr algn="ctr">
-                        <a:defRPr sz="1000" b="1">
-                          <a:solidFill>
-                            <a:srgbClr val="FFFFFF"/>
-                          </a:solidFill>
-                        </a:defRPr>
-                      </a:pPr>
-                      <a:r>
-                        <a:t>Avg Latency</a:t>
-                      </a:r>
-                    </a:p>
-                  </a:txBody>
-                  <a:tcPr>
-                    <a:solidFill>
-                      <a:srgbClr val="2563EB"/>
-                    </a:solidFill>
-                  </a:tcPr>
-                </a:tc>
-                <a:tc>
-                  <a:txBody>
-                    <a:bodyPr/>
-                    <a:lstStyle/>
-                    <a:p>
-                      <a:pPr algn="ctr">
-                        <a:defRPr sz="1000" b="1">
-                          <a:solidFill>
-                            <a:srgbClr val="FFFFFF"/>
-                          </a:solidFill>
-                        </a:defRPr>
-                      </a:pPr>
-                      <a:r>
-                        <a:t>DCM Score</a:t>
-                      </a:r>
-                    </a:p>
-                  </a:txBody>
-                  <a:tcPr>
-                    <a:solidFill>
-                      <a:srgbClr val="2563EB"/>
-                    </a:solidFill>
-                  </a:tcPr>
-                </a:tc>
-              </a:tr>
-              <a:tr h="585216">
-                <a:tc>
-                  <a:txBody>
-                    <a:bodyPr/>
-                    <a:lstStyle/>
-                    <a:p>
-                      <a:pPr>
-                        <a:defRPr sz="950" b="0">
-                          <a:solidFill>
-                            <a:srgbClr val="0F172A"/>
-                          </a:solidFill>
-                        </a:defRPr>
-                      </a:pPr>
-                      <a:r>
-                        <a:t>Static Full Baseline</a:t>
-                      </a:r>
-                    </a:p>
-                  </a:txBody>
-                  <a:tcPr>
-                    <a:solidFill>
-                      <a:srgbClr val="FFFFFF"/>
-                    </a:solidFill>
-                  </a:tcPr>
-                </a:tc>
-                <a:tc>
-                  <a:txBody>
-                    <a:bodyPr/>
-                    <a:lstStyle/>
-                    <a:p>
-                      <a:pPr algn="ctr">
-                        <a:defRPr sz="950" b="0">
-                          <a:solidFill>
-                            <a:srgbClr val="0F172A"/>
-                          </a:solidFill>
-                        </a:defRPr>
-                      </a:pPr>
-                      <a:r>
-                        <a:t>1.0000</a:t>
-                      </a:r>
-                    </a:p>
-                  </a:txBody>
-                  <a:tcPr>
-                    <a:solidFill>
-                      <a:srgbClr val="FFFFFF"/>
-                    </a:solidFill>
-                  </a:tcPr>
-                </a:tc>
-                <a:tc>
-                  <a:txBody>
-                    <a:bodyPr/>
-                    <a:lstStyle/>
-                    <a:p>
-                      <a:pPr algn="ctr">
-                        <a:defRPr sz="950" b="0">
-                          <a:solidFill>
-                            <a:srgbClr val="0F172A"/>
-                          </a:solidFill>
-                        </a:defRPr>
-                      </a:pPr>
-                      <a:r>
-                        <a:t>1.0000</a:t>
-                      </a:r>
-                    </a:p>
-                  </a:txBody>
-                  <a:tcPr>
-                    <a:solidFill>
-                      <a:srgbClr val="FFFFFF"/>
-                    </a:solidFill>
-                  </a:tcPr>
-                </a:tc>
-                <a:tc>
-                  <a:txBody>
-                    <a:bodyPr/>
-                    <a:lstStyle/>
-                    <a:p>
-                      <a:pPr algn="ctr">
-                        <a:defRPr sz="950" b="0">
-                          <a:solidFill>
-                            <a:srgbClr val="0F172A"/>
-                          </a:solidFill>
-                        </a:defRPr>
-                      </a:pPr>
-                      <a:r>
-                        <a:t>0.6269 (Cliff)</a:t>
-                      </a:r>
-                    </a:p>
-                  </a:txBody>
-                  <a:tcPr>
-                    <a:solidFill>
-                      <a:srgbClr val="FFFFFF"/>
-                    </a:solidFill>
-                  </a:tcPr>
-                </a:tc>
-                <a:tc>
-                  <a:txBody>
-                    <a:bodyPr/>
-                    <a:lstStyle/>
-                    <a:p>
-                      <a:pPr algn="ctr">
-                        <a:defRPr sz="950" b="0">
-                          <a:solidFill>
-                            <a:srgbClr val="0F172A"/>
-                          </a:solidFill>
-                        </a:defRPr>
-                      </a:pPr>
-                      <a:r>
-                        <a:t>0.0787 (Collapse)</a:t>
-                      </a:r>
-                    </a:p>
-                  </a:txBody>
-                  <a:tcPr>
-                    <a:solidFill>
-                      <a:srgbClr val="FFFFFF"/>
-                    </a:solidFill>
-                  </a:tcPr>
-                </a:tc>
-                <a:tc>
-                  <a:txBody>
-                    <a:bodyPr/>
-                    <a:lstStyle/>
-                    <a:p>
-                      <a:pPr algn="ctr">
-                        <a:defRPr sz="950" b="0">
-                          <a:solidFill>
-                            <a:srgbClr val="0F172A"/>
-                          </a:solidFill>
-                        </a:defRPr>
-                      </a:pPr>
-                      <a:r>
-                        <a:t>0.005 ms</a:t>
-                      </a:r>
-                    </a:p>
-                  </a:txBody>
-                  <a:tcPr>
-                    <a:solidFill>
-                      <a:srgbClr val="FFFFFF"/>
-                    </a:solidFill>
-                  </a:tcPr>
-                </a:tc>
-                <a:tc>
-                  <a:txBody>
-                    <a:bodyPr/>
-                    <a:lstStyle/>
-                    <a:p>
-                      <a:pPr algn="ctr">
-                        <a:defRPr sz="950" b="0">
-                          <a:solidFill>
-                            <a:srgbClr val="0F172A"/>
-                          </a:solidFill>
-                        </a:defRPr>
-                      </a:pPr>
-                      <a:r>
-                        <a:t>0.6889</a:t>
-                      </a:r>
-                    </a:p>
-                  </a:txBody>
-                  <a:tcPr>
-                    <a:solidFill>
-                      <a:srgbClr val="FFFFFF"/>
-                    </a:solidFill>
-                  </a:tcPr>
-                </a:tc>
-              </a:tr>
-              <a:tr h="585216">
-                <a:tc>
-                  <a:txBody>
-                    <a:bodyPr/>
-                    <a:lstStyle/>
-                    <a:p>
-                      <a:pPr>
-                        <a:defRPr sz="950" b="0">
-                          <a:solidFill>
-                            <a:srgbClr val="0F172A"/>
-                          </a:solidFill>
-                        </a:defRPr>
-                      </a:pPr>
-                      <a:r>
-                        <a:t>Imputation + Full Model</a:t>
-                      </a:r>
-                    </a:p>
-                  </a:txBody>
-                  <a:tcPr>
-                    <a:solidFill>
-                      <a:srgbClr val="F1F5F9"/>
-                    </a:solidFill>
-                  </a:tcPr>
-                </a:tc>
-                <a:tc>
-                  <a:txBody>
-                    <a:bodyPr/>
-                    <a:lstStyle/>
-                    <a:p>
-                      <a:pPr algn="ctr">
-                        <a:defRPr sz="950" b="0">
-                          <a:solidFill>
-                            <a:srgbClr val="0F172A"/>
-                          </a:solidFill>
-                        </a:defRPr>
-                      </a:pPr>
-                      <a:r>
-                        <a:t>1.0000</a:t>
-                      </a:r>
-                    </a:p>
-                  </a:txBody>
-                  <a:tcPr>
-                    <a:solidFill>
-                      <a:srgbClr val="F1F5F9"/>
-                    </a:solidFill>
-                  </a:tcPr>
-                </a:tc>
-                <a:tc>
-                  <a:txBody>
-                    <a:bodyPr/>
-                    <a:lstStyle/>
-                    <a:p>
-                      <a:pPr algn="ctr">
-                        <a:defRPr sz="950" b="0">
-                          <a:solidFill>
-                            <a:srgbClr val="0F172A"/>
-                          </a:solidFill>
-                        </a:defRPr>
-                      </a:pPr>
-                      <a:r>
-                        <a:t>0.9991</a:t>
-                      </a:r>
-                    </a:p>
-                  </a:txBody>
-                  <a:tcPr>
-                    <a:solidFill>
-                      <a:srgbClr val="F1F5F9"/>
-                    </a:solidFill>
-                  </a:tcPr>
-                </a:tc>
-                <a:tc>
-                  <a:txBody>
-                    <a:bodyPr/>
-                    <a:lstStyle/>
-                    <a:p>
-                      <a:pPr algn="ctr">
-                        <a:defRPr sz="950" b="0">
-                          <a:solidFill>
-                            <a:srgbClr val="0F172A"/>
-                          </a:solidFill>
-                        </a:defRPr>
-                      </a:pPr>
-                      <a:r>
-                        <a:t>0.1659 (99% Miss)</a:t>
-                      </a:r>
-                    </a:p>
-                  </a:txBody>
-                  <a:tcPr>
-                    <a:solidFill>
-                      <a:srgbClr val="F1F5F9"/>
-                    </a:solidFill>
-                  </a:tcPr>
-                </a:tc>
-                <a:tc>
-                  <a:txBody>
-                    <a:bodyPr/>
-                    <a:lstStyle/>
-                    <a:p>
-                      <a:pPr algn="ctr">
-                        <a:defRPr sz="950" b="0">
-                          <a:solidFill>
-                            <a:srgbClr val="0F172A"/>
-                          </a:solidFill>
-                        </a:defRPr>
-                      </a:pPr>
-                      <a:r>
-                        <a:t>0.1639 (100% Miss)</a:t>
-                      </a:r>
-                    </a:p>
-                  </a:txBody>
-                  <a:tcPr>
-                    <a:solidFill>
-                      <a:srgbClr val="F1F5F9"/>
-                    </a:solidFill>
-                  </a:tcPr>
-                </a:tc>
-                <a:tc>
-                  <a:txBody>
-                    <a:bodyPr/>
-                    <a:lstStyle/>
-                    <a:p>
-                      <a:pPr algn="ctr">
-                        <a:defRPr sz="950" b="0">
-                          <a:solidFill>
-                            <a:srgbClr val="0F172A"/>
-                          </a:solidFill>
-                        </a:defRPr>
-                      </a:pPr>
-                      <a:r>
-                        <a:t>28.400 ms</a:t>
-                      </a:r>
-                    </a:p>
-                  </a:txBody>
-                  <a:tcPr>
-                    <a:solidFill>
-                      <a:srgbClr val="F1F5F9"/>
-                    </a:solidFill>
-                  </a:tcPr>
-                </a:tc>
-                <a:tc>
-                  <a:txBody>
-                    <a:bodyPr/>
-                    <a:lstStyle/>
-                    <a:p>
-                      <a:pPr algn="ctr">
-                        <a:defRPr sz="950" b="0">
-                          <a:solidFill>
-                            <a:srgbClr val="0F172A"/>
-                          </a:solidFill>
-                        </a:defRPr>
-                      </a:pPr>
-                      <a:r>
-                        <a:t>0.5227</a:t>
-                      </a:r>
-                    </a:p>
-                  </a:txBody>
-                  <a:tcPr>
-                    <a:solidFill>
-                      <a:srgbClr val="F1F5F9"/>
-                    </a:solidFill>
-                  </a:tcPr>
-                </a:tc>
-              </a:tr>
-              <a:tr h="585216">
-                <a:tc>
-                  <a:txBody>
-                    <a:bodyPr/>
-                    <a:lstStyle/>
-                    <a:p>
-                      <a:pPr>
-                        <a:defRPr sz="950" b="0">
-                          <a:solidFill>
-                            <a:srgbClr val="0F172A"/>
-                          </a:solidFill>
-                        </a:defRPr>
-                      </a:pPr>
-                      <a:r>
-                        <a:t>Feature-Dropout Model</a:t>
-                      </a:r>
-                    </a:p>
-                  </a:txBody>
-                  <a:tcPr>
-                    <a:solidFill>
-                      <a:srgbClr val="FFFFFF"/>
-                    </a:solidFill>
-                  </a:tcPr>
-                </a:tc>
-                <a:tc>
-                  <a:txBody>
-                    <a:bodyPr/>
-                    <a:lstStyle/>
-                    <a:p>
-                      <a:pPr algn="ctr">
-                        <a:defRPr sz="950" b="0">
-                          <a:solidFill>
-                            <a:srgbClr val="0F172A"/>
-                          </a:solidFill>
-                        </a:defRPr>
-                      </a:pPr>
-                      <a:r>
-                        <a:t>1.0000</a:t>
-                      </a:r>
-                    </a:p>
-                  </a:txBody>
-                  <a:tcPr>
-                    <a:solidFill>
-                      <a:srgbClr val="FFFFFF"/>
-                    </a:solidFill>
-                  </a:tcPr>
-                </a:tc>
-                <a:tc>
-                  <a:txBody>
-                    <a:bodyPr/>
-                    <a:lstStyle/>
-                    <a:p>
-                      <a:pPr algn="ctr">
-                        <a:defRPr sz="950" b="0">
-                          <a:solidFill>
-                            <a:srgbClr val="0F172A"/>
-                          </a:solidFill>
-                        </a:defRPr>
-                      </a:pPr>
-                      <a:r>
-                        <a:t>1.0000</a:t>
-                      </a:r>
-                    </a:p>
-                  </a:txBody>
-                  <a:tcPr>
-                    <a:solidFill>
-                      <a:srgbClr val="FFFFFF"/>
-                    </a:solidFill>
-                  </a:tcPr>
-                </a:tc>
-                <a:tc>
-                  <a:txBody>
-                    <a:bodyPr/>
-                    <a:lstStyle/>
-                    <a:p>
-                      <a:pPr algn="ctr">
-                        <a:defRPr sz="950" b="0">
-                          <a:solidFill>
-                            <a:srgbClr val="0F172A"/>
-                          </a:solidFill>
-                        </a:defRPr>
-                      </a:pPr>
-                      <a:r>
-                        <a:t>0.9995</a:t>
-                      </a:r>
-                    </a:p>
-                  </a:txBody>
-                  <a:tcPr>
-                    <a:solidFill>
-                      <a:srgbClr val="FFFFFF"/>
-                    </a:solidFill>
-                  </a:tcPr>
-                </a:tc>
-                <a:tc>
-                  <a:txBody>
-                    <a:bodyPr/>
-                    <a:lstStyle/>
-                    <a:p>
-                      <a:pPr algn="ctr">
-                        <a:defRPr sz="950" b="0">
-                          <a:solidFill>
-                            <a:srgbClr val="0F172A"/>
-                          </a:solidFill>
-                        </a:defRPr>
-                      </a:pPr>
-                      <a:r>
-                        <a:t>0.7322</a:t>
-                      </a:r>
-                    </a:p>
-                  </a:txBody>
-                  <a:tcPr>
-                    <a:solidFill>
-                      <a:srgbClr val="FFFFFF"/>
-                    </a:solidFill>
-                  </a:tcPr>
-                </a:tc>
-                <a:tc>
-                  <a:txBody>
-                    <a:bodyPr/>
-                    <a:lstStyle/>
-                    <a:p>
-                      <a:pPr algn="ctr">
-                        <a:defRPr sz="950" b="0">
-                          <a:solidFill>
-                            <a:srgbClr val="0F172A"/>
-                          </a:solidFill>
-                        </a:defRPr>
-                      </a:pPr>
-                      <a:r>
-                        <a:t>0.004 ms</a:t>
-                      </a:r>
-                    </a:p>
-                  </a:txBody>
-                  <a:tcPr>
-                    <a:solidFill>
-                      <a:srgbClr val="FFFFFF"/>
-                    </a:solidFill>
-                  </a:tcPr>
-                </a:tc>
-                <a:tc>
-                  <a:txBody>
-                    <a:bodyPr/>
-                    <a:lstStyle/>
-                    <a:p>
-                      <a:pPr algn="ctr">
-                        <a:defRPr sz="950" b="0">
-                          <a:solidFill>
-                            <a:srgbClr val="0F172A"/>
-                          </a:solidFill>
-                        </a:defRPr>
-                      </a:pPr>
-                      <a:r>
-                        <a:t>0.9520</a:t>
-                      </a:r>
-                    </a:p>
-                  </a:txBody>
-                  <a:tcPr>
-                    <a:solidFill>
-                      <a:srgbClr val="FFFFFF"/>
-                    </a:solidFill>
-                  </a:tcPr>
-                </a:tc>
-              </a:tr>
-              <a:tr h="585216">
-                <a:tc>
-                  <a:txBody>
-                    <a:bodyPr/>
-                    <a:lstStyle/>
-                    <a:p>
-                      <a:pPr>
-                        <a:defRPr sz="950" b="1">
-                          <a:solidFill>
-                            <a:srgbClr val="2563EB"/>
-                          </a:solidFill>
-                        </a:defRPr>
-                      </a:pPr>
-                      <a:r>
-                        <a:t>Proposed TIDPS (Ours)</a:t>
-                      </a:r>
-                    </a:p>
-                  </a:txBody>
-                  <a:tcPr>
-                    <a:solidFill>
-                      <a:srgbClr val="EEF2FF"/>
-                    </a:solidFill>
-                  </a:tcPr>
-                </a:tc>
-                <a:tc>
-                  <a:txBody>
-                    <a:bodyPr/>
-                    <a:lstStyle/>
-                    <a:p>
-                      <a:pPr algn="ctr">
-                        <a:defRPr sz="950" b="1">
-                          <a:solidFill>
-                            <a:srgbClr val="0F172A"/>
-                          </a:solidFill>
-                        </a:defRPr>
-                      </a:pPr>
-                      <a:r>
-                        <a:t>1.0000</a:t>
-                      </a:r>
-                    </a:p>
-                  </a:txBody>
-                  <a:tcPr>
-                    <a:solidFill>
-                      <a:srgbClr val="EEF2FF"/>
-                    </a:solidFill>
-                  </a:tcPr>
-                </a:tc>
-                <a:tc>
-                  <a:txBody>
-                    <a:bodyPr/>
-                    <a:lstStyle/>
-                    <a:p>
-                      <a:pPr algn="ctr">
-                        <a:defRPr sz="950" b="1">
-                          <a:solidFill>
-                            <a:srgbClr val="0F172A"/>
-                          </a:solidFill>
-                        </a:defRPr>
-                      </a:pPr>
-                      <a:r>
-                        <a:t>1.0000</a:t>
-                      </a:r>
-                    </a:p>
-                  </a:txBody>
-                  <a:tcPr>
-                    <a:solidFill>
-                      <a:srgbClr val="EEF2FF"/>
-                    </a:solidFill>
-                  </a:tcPr>
-                </a:tc>
-                <a:tc>
-                  <a:txBody>
-                    <a:bodyPr/>
-                    <a:lstStyle/>
-                    <a:p>
-                      <a:pPr algn="ctr">
-                        <a:defRPr sz="950" b="1">
-                          <a:solidFill>
-                            <a:srgbClr val="0F172A"/>
-                          </a:solidFill>
-                        </a:defRPr>
-                      </a:pPr>
-                      <a:r>
-                        <a:t>0.9551</a:t>
-                      </a:r>
-                    </a:p>
-                  </a:txBody>
-                  <a:tcPr>
-                    <a:solidFill>
-                      <a:srgbClr val="EEF2FF"/>
-                    </a:solidFill>
-                  </a:tcPr>
-                </a:tc>
-                <a:tc>
-                  <a:txBody>
-                    <a:bodyPr/>
-                    <a:lstStyle/>
-                    <a:p>
-                      <a:pPr algn="ctr">
-                        <a:defRPr sz="950" b="1">
-                          <a:solidFill>
-                            <a:srgbClr val="0F172A"/>
-                          </a:solidFill>
-                        </a:defRPr>
-                      </a:pPr>
-                      <a:r>
-                        <a:t>0.4506</a:t>
-                      </a:r>
-                    </a:p>
-                  </a:txBody>
-                  <a:tcPr>
-                    <a:solidFill>
-                      <a:srgbClr val="EEF2FF"/>
-                    </a:solidFill>
-                  </a:tcPr>
-                </a:tc>
-                <a:tc>
-                  <a:txBody>
-                    <a:bodyPr/>
-                    <a:lstStyle/>
-                    <a:p>
-                      <a:pPr algn="ctr">
-                        <a:defRPr sz="950" b="1">
-                          <a:solidFill>
-                            <a:srgbClr val="0F172A"/>
-                          </a:solidFill>
-                        </a:defRPr>
-                      </a:pPr>
-                      <a:r>
-                        <a:t>0.005 ms</a:t>
-                      </a:r>
-                    </a:p>
-                  </a:txBody>
-                  <a:tcPr>
-                    <a:solidFill>
-                      <a:srgbClr val="EEF2FF"/>
-                    </a:solidFill>
-                  </a:tcPr>
-                </a:tc>
-                <a:tc>
-                  <a:txBody>
-                    <a:bodyPr/>
-                    <a:lstStyle/>
-                    <a:p>
-                      <a:pPr algn="ctr">
-                        <a:defRPr sz="950" b="1">
-                          <a:solidFill>
-                            <a:srgbClr val="0F172A"/>
-                          </a:solidFill>
-                        </a:defRPr>
-                      </a:pPr>
-                      <a:r>
-                        <a:t>0.8843</a:t>
-                      </a:r>
-                    </a:p>
-                  </a:txBody>
-                  <a:tcPr>
-                    <a:solidFill>
-                      <a:srgbClr val="EEF2FF"/>
-                    </a:solidFill>
-                  </a:tcPr>
-                </a:tc>
-              </a:tr>
-            </a:tbl>
-          </a:graphicData>
-        </a:graphic>
-      </p:graphicFrame>
-      <p:sp>
-        <p:nvSpPr>
-          <p:cNvPr id="5" name="Rounded Rectangle 4"/>
+              <a:t>Model Description: The Prevalidated Tri-Mode Detection Hierarchy</a:t>
+            </a:r>
+          </a:p>
+        </p:txBody>
+      </p:sp>
+      <p:sp>
+        <p:nvSpPr>
+          <p:cNvPr id="4" name="Rounded Rectangle 3"/>
           <p:cNvSpPr/>
           <p:nvPr/>
         </p:nvSpPr>
         <p:spPr>
           <a:xfrm>
-            <a:off x="731520" y="4434840"/>
-            <a:ext cx="10728655" cy="2011680"/>
+            <a:off x="731520" y="1371600"/>
+            <a:ext cx="3413455" cy="4846320"/>
           </a:xfrm>
           <a:prstGeom prst="roundRect">
             <a:avLst/>
           </a:prstGeom>
           <a:solidFill>
-            <a:srgbClr val="FFFFFF"/>
+            <a:srgbClr val="EFF6FF"/>
           </a:solidFill>
           <a:ln w="19050">
             <a:solidFill>
-              <a:srgbClr val="E2E8F0"/>
+              <a:srgbClr val="93C5FD"/>
             </a:solidFill>
           </a:ln>
         </p:spPr>
@@ -9945,14 +10350,14 @@
       </p:sp>
       <p:sp>
         <p:nvSpPr>
-          <p:cNvPr id="6" name="TextBox 5"/>
+          <p:cNvPr id="5" name="TextBox 4"/>
           <p:cNvSpPr txBox="1"/>
           <p:nvPr/>
         </p:nvSpPr>
         <p:spPr>
           <a:xfrm>
-            <a:off x="960120" y="4526280"/>
-            <a:ext cx="10241280" cy="1828800"/>
+            <a:off x="914400" y="1554480"/>
+            <a:ext cx="3047695" cy="4480560"/>
           </a:xfrm>
           <a:prstGeom prst="rect">
             <a:avLst/>
@@ -9966,62 +10371,510 @@
           <a:lstStyle/>
           <a:p>
             <a:pPr>
+              <a:defRPr sz="1150" b="1">
+                <a:solidFill>
+                  <a:srgbClr val="2563EB"/>
+                </a:solidFill>
+              </a:defRPr>
+            </a:pPr>
+            <a:r>
+              <a:t>MODE 1: FULL-FEATURE ML</a:t>
+            </a:r>
+          </a:p>
+          <a:p>
+            <a:pPr>
+              <a:defRPr sz="950" b="1">
+                <a:solidFill>
+                  <a:srgbClr val="0F172A"/>
+                </a:solidFill>
+              </a:defRPr>
+            </a:pPr>
+            <a:r>
+              <a:t>High-Fidelity Regime (Q ≥ 0.80)</a:t>
+            </a:r>
+          </a:p>
+          <a:p>
+            <a:pPr>
+              <a:spcAft>
+                <a:spcPts val="800"/>
+              </a:spcAft>
+              <a:defRPr sz="900" i="1">
+                <a:solidFill>
+                  <a:srgbClr val="2563EB"/>
+                </a:solidFill>
+              </a:defRPr>
+            </a:pPr>
+            <a:r>
+              <a:t>Operates on Full 78 Features</a:t>
+            </a:r>
+          </a:p>
+          <a:p>
+            <a:pPr>
               <a:spcAft>
                 <a:spcPts val="400"/>
               </a:spcAft>
-              <a:defRPr sz="1100" b="1">
+              <a:defRPr sz="900">
+                <a:solidFill>
+                  <a:srgbClr val="0F172A"/>
+                </a:solidFill>
+              </a:defRPr>
+            </a:pPr>
+            <a:r>
+              <a:t>• Algorithm: Tuned Random Forest (100 estimators, max depth 15).</a:t>
+            </a:r>
+          </a:p>
+          <a:p>
+            <a:pPr>
+              <a:spcAft>
+                <a:spcPts val="400"/>
+              </a:spcAft>
+              <a:defRPr sz="900">
+                <a:solidFill>
+                  <a:srgbClr val="0F172A"/>
+                </a:solidFill>
+              </a:defRPr>
+            </a:pPr>
+            <a:r>
+              <a:t>• Features Used: All 78 CIC-IDS2017 features (Forward/Backward packet lengths, IAT distributions, subflows, window flags).</a:t>
+            </a:r>
+          </a:p>
+          <a:p>
+            <a:pPr>
+              <a:spcAft>
+                <a:spcPts val="400"/>
+              </a:spcAft>
+              <a:defRPr sz="900">
+                <a:solidFill>
+                  <a:srgbClr val="0F172A"/>
+                </a:solidFill>
+              </a:defRPr>
+            </a:pPr>
+            <a:r>
+              <a:t>• Execution Latency: 0.008 ms per flow.</a:t>
+            </a:r>
+          </a:p>
+          <a:p>
+            <a:pPr>
+              <a:spcAft>
+                <a:spcPts val="400"/>
+              </a:spcAft>
+              <a:defRPr sz="900">
+                <a:solidFill>
+                  <a:srgbClr val="0F172A"/>
+                </a:solidFill>
+              </a:defRPr>
+            </a:pPr>
+            <a:r>
+              <a:t>• Performance: 1.0000 Macro F1 on pristine telemetry.</a:t>
+            </a:r>
+          </a:p>
+          <a:p>
+            <a:pPr>
+              <a:spcAft>
+                <a:spcPts val="400"/>
+              </a:spcAft>
+              <a:defRPr sz="900">
+                <a:solidFill>
+                  <a:srgbClr val="0F172A"/>
+                </a:solidFill>
+              </a:defRPr>
+            </a:pPr>
+            <a:r>
+              <a:t>• Purpose: Maximum precision classification when sensor and routing are normal.</a:t>
+            </a:r>
+          </a:p>
+        </p:txBody>
+      </p:sp>
+      <p:sp>
+        <p:nvSpPr>
+          <p:cNvPr id="6" name="Rounded Rectangle 5"/>
+          <p:cNvSpPr/>
+          <p:nvPr/>
+        </p:nvSpPr>
+        <p:spPr>
+          <a:xfrm>
+            <a:off x="4389120" y="1371600"/>
+            <a:ext cx="3413455" cy="4846320"/>
+          </a:xfrm>
+          <a:prstGeom prst="roundRect">
+            <a:avLst/>
+          </a:prstGeom>
+          <a:solidFill>
+            <a:srgbClr val="FFFBEB"/>
+          </a:solidFill>
+          <a:ln w="19050">
+            <a:solidFill>
+              <a:srgbClr val="FCD34D"/>
+            </a:solidFill>
+          </a:ln>
+        </p:spPr>
+        <p:style>
+          <a:lnRef idx="1">
+            <a:schemeClr val="accent1"/>
+          </a:lnRef>
+          <a:fillRef idx="3">
+            <a:schemeClr val="accent1"/>
+          </a:fillRef>
+          <a:effectRef idx="2">
+            <a:schemeClr val="accent1"/>
+          </a:effectRef>
+          <a:fontRef idx="minor">
+            <a:schemeClr val="lt1"/>
+          </a:fontRef>
+        </p:style>
+        <p:txBody>
+          <a:bodyPr rtlCol="0" anchor="ctr"/>
+          <a:lstStyle/>
+          <a:p>
+            <a:pPr algn="ctr"/>
+          </a:p>
+        </p:txBody>
+      </p:sp>
+      <p:sp>
+        <p:nvSpPr>
+          <p:cNvPr id="7" name="TextBox 6"/>
+          <p:cNvSpPr txBox="1"/>
+          <p:nvPr/>
+        </p:nvSpPr>
+        <p:spPr>
+          <a:xfrm>
+            <a:off x="4572000" y="1554480"/>
+            <a:ext cx="3047695" cy="4480560"/>
+          </a:xfrm>
+          <a:prstGeom prst="rect">
+            <a:avLst/>
+          </a:prstGeom>
+          <a:noFill/>
+        </p:spPr>
+        <p:txBody>
+          <a:bodyPr wrap="square">
+            <a:spAutoFit/>
+          </a:bodyPr>
+          <a:lstStyle/>
+          <a:p>
+            <a:pPr>
+              <a:defRPr sz="1150" b="1">
+                <a:solidFill>
+                  <a:srgbClr val="EA580C"/>
+                </a:solidFill>
+              </a:defRPr>
+            </a:pPr>
+            <a:r>
+              <a:t>MODE 2: DEGRADED L3/L4 ML</a:t>
+            </a:r>
+          </a:p>
+          <a:p>
+            <a:pPr>
+              <a:defRPr sz="950" b="1">
+                <a:solidFill>
+                  <a:srgbClr val="0F172A"/>
+                </a:solidFill>
+              </a:defRPr>
+            </a:pPr>
+            <a:r>
+              <a:t>Resilient Header Regime (0.40 ≤ Q &lt; 0.80)</a:t>
+            </a:r>
+          </a:p>
+          <a:p>
+            <a:pPr>
+              <a:spcAft>
+                <a:spcPts val="800"/>
+              </a:spcAft>
+              <a:defRPr sz="900" i="1">
                 <a:solidFill>
                   <a:srgbClr val="2563EB"/>
                 </a:solidFill>
               </a:defRPr>
             </a:pPr>
             <a:r>
-              <a:t>CORE EMPIRICAL FINDINGS &amp; DEFENSE ARGUMENTS:</a:t>
-            </a:r>
-          </a:p>
-          <a:p>
-            <a:pPr>
-              <a:spcAft>
-                <a:spcPts val="300"/>
-              </a:spcAft>
-              <a:defRPr sz="1000">
-                <a:solidFill>
-                  <a:srgbClr val="0F172A"/>
-                </a:solidFill>
-              </a:defRPr>
-            </a:pPr>
-            <a:r>
-              <a:t>• Elimination of Performance Cliff: Under Level 2 (Asymmetric Routing), conventional static NIDS drops to 0.6269 F1. Proposed TIDPS seamlessly transitions to Mode 2 and achieves 0.9551 F1 with only 1.05% missed attacks.</a:t>
-            </a:r>
-          </a:p>
-          <a:p>
-            <a:pPr>
-              <a:spcAft>
-                <a:spcPts val="300"/>
-              </a:spcAft>
-              <a:defRPr sz="1000">
-                <a:solidFill>
-                  <a:srgbClr val="0F172A"/>
-                </a:solidFill>
-              </a:defRPr>
-            </a:pPr>
-            <a:r>
-              <a:t>• Catastrophic Imputation Failure: Imputation algorithms like KNN/Mean achieve only 0.1659 F1 under asymmetric routing, missing 99.91% of attacks because hallucinated features trick the model. Furthermore, imputation adds 28.4 ms latency, crashing line-rate throughput.</a:t>
-            </a:r>
-          </a:p>
-          <a:p>
-            <a:pPr>
-              <a:spcAft>
-                <a:spcPts val="300"/>
-              </a:spcAft>
-              <a:defRPr sz="1000">
-                <a:solidFill>
-                  <a:srgbClr val="0F172A"/>
-                </a:solidFill>
-              </a:defRPr>
-            </a:pPr>
-            <a:r>
-              <a:t>• Superior Detection Continuity (DCM): Our proposed architecture achieves a Normalized Detection Continuity Metric of 0.8843, proving resilient operational defense across all failure tiers L0 through L3.</a:t>
+              <a:t>Operates on 16 Immutable Header Features</a:t>
+            </a:r>
+          </a:p>
+          <a:p>
+            <a:pPr>
+              <a:spcAft>
+                <a:spcPts val="400"/>
+              </a:spcAft>
+              <a:defRPr sz="900">
+                <a:solidFill>
+                  <a:srgbClr val="0F172A"/>
+                </a:solidFill>
+              </a:defRPr>
+            </a:pPr>
+            <a:r>
+              <a:t>• Algorithm: Reduced Random Forest trained strictly on unidirectional forward IP/TCP header fields.</a:t>
+            </a:r>
+          </a:p>
+          <a:p>
+            <a:pPr>
+              <a:spcAft>
+                <a:spcPts val="400"/>
+              </a:spcAft>
+              <a:defRPr sz="900">
+                <a:solidFill>
+                  <a:srgbClr val="0F172A"/>
+                </a:solidFill>
+              </a:defRPr>
+            </a:pPr>
+            <a:r>
+              <a:t>• Features Used: Dest Port, Flow Duration, Total Fwd Packets, Fwd Packet Lengths, Header Length, Flow Bytes/s, Flow Pkts/s, TCP Flags.</a:t>
+            </a:r>
+          </a:p>
+          <a:p>
+            <a:pPr>
+              <a:spcAft>
+                <a:spcPts val="400"/>
+              </a:spcAft>
+              <a:defRPr sz="900">
+                <a:solidFill>
+                  <a:srgbClr val="0F172A"/>
+                </a:solidFill>
+              </a:defRPr>
+            </a:pPr>
+            <a:r>
+              <a:t>• Immune to: Asymmetric routing and TLS encryption.</a:t>
+            </a:r>
+          </a:p>
+          <a:p>
+            <a:pPr>
+              <a:spcAft>
+                <a:spcPts val="400"/>
+              </a:spcAft>
+              <a:defRPr sz="900">
+                <a:solidFill>
+                  <a:srgbClr val="0F172A"/>
+                </a:solidFill>
+              </a:defRPr>
+            </a:pPr>
+            <a:r>
+              <a:t>• Performance: Retains 0.9551 F1 where static models collapse to 0.6269.</a:t>
+            </a:r>
+          </a:p>
+          <a:p>
+            <a:pPr>
+              <a:spcAft>
+                <a:spcPts val="400"/>
+              </a:spcAft>
+              <a:defRPr sz="900">
+                <a:solidFill>
+                  <a:srgbClr val="0F172A"/>
+                </a:solidFill>
+              </a:defRPr>
+            </a:pPr>
+            <a:r>
+              <a:t>• Purpose: Line-rate detection under missing return traffic.</a:t>
+            </a:r>
+          </a:p>
+        </p:txBody>
+      </p:sp>
+      <p:sp>
+        <p:nvSpPr>
+          <p:cNvPr id="8" name="Rounded Rectangle 7"/>
+          <p:cNvSpPr/>
+          <p:nvPr/>
+        </p:nvSpPr>
+        <p:spPr>
+          <a:xfrm>
+            <a:off x="8046720" y="1371600"/>
+            <a:ext cx="3413455" cy="4846320"/>
+          </a:xfrm>
+          <a:prstGeom prst="roundRect">
+            <a:avLst/>
+          </a:prstGeom>
+          <a:solidFill>
+            <a:srgbClr val="FEF2F2"/>
+          </a:solidFill>
+          <a:ln w="19050">
+            <a:solidFill>
+              <a:srgbClr val="FCA5A5"/>
+            </a:solidFill>
+          </a:ln>
+        </p:spPr>
+        <p:style>
+          <a:lnRef idx="1">
+            <a:schemeClr val="accent1"/>
+          </a:lnRef>
+          <a:fillRef idx="3">
+            <a:schemeClr val="accent1"/>
+          </a:fillRef>
+          <a:effectRef idx="2">
+            <a:schemeClr val="accent1"/>
+          </a:effectRef>
+          <a:fontRef idx="minor">
+            <a:schemeClr val="lt1"/>
+          </a:fontRef>
+        </p:style>
+        <p:txBody>
+          <a:bodyPr rtlCol="0" anchor="ctr"/>
+          <a:lstStyle/>
+          <a:p>
+            <a:pPr algn="ctr"/>
+          </a:p>
+        </p:txBody>
+      </p:sp>
+      <p:sp>
+        <p:nvSpPr>
+          <p:cNvPr id="9" name="TextBox 8"/>
+          <p:cNvSpPr txBox="1"/>
+          <p:nvPr/>
+        </p:nvSpPr>
+        <p:spPr>
+          <a:xfrm>
+            <a:off x="8229600" y="1554480"/>
+            <a:ext cx="3047695" cy="4480560"/>
+          </a:xfrm>
+          <a:prstGeom prst="rect">
+            <a:avLst/>
+          </a:prstGeom>
+          <a:noFill/>
+        </p:spPr>
+        <p:txBody>
+          <a:bodyPr wrap="square">
+            <a:spAutoFit/>
+          </a:bodyPr>
+          <a:lstStyle/>
+          <a:p>
+            <a:pPr>
+              <a:defRPr sz="1150" b="1">
+                <a:solidFill>
+                  <a:srgbClr val="DC2626"/>
+                </a:solidFill>
+              </a:defRPr>
+            </a:pPr>
+            <a:r>
+              <a:t>MODE 3: DETERMINISTIC FALLBACK</a:t>
+            </a:r>
+          </a:p>
+          <a:p>
+            <a:pPr>
+              <a:defRPr sz="950" b="1">
+                <a:solidFill>
+                  <a:srgbClr val="0F172A"/>
+                </a:solidFill>
+              </a:defRPr>
+            </a:pPr>
+            <a:r>
+              <a:t>Severe Starvation Regime (Q &lt; 0.40)</a:t>
+            </a:r>
+          </a:p>
+          <a:p>
+            <a:pPr>
+              <a:spcAft>
+                <a:spcPts val="800"/>
+              </a:spcAft>
+              <a:defRPr sz="900" i="1">
+                <a:solidFill>
+                  <a:srgbClr val="2563EB"/>
+                </a:solidFill>
+              </a:defRPr>
+            </a:pPr>
+            <a:r>
+              <a:t>Operates on 4 Volumetric Hardware Counters</a:t>
+            </a:r>
+          </a:p>
+          <a:p>
+            <a:pPr>
+              <a:spcAft>
+                <a:spcPts val="400"/>
+              </a:spcAft>
+              <a:defRPr sz="900">
+                <a:solidFill>
+                  <a:srgbClr val="0F172A"/>
+                </a:solidFill>
+              </a:defRPr>
+            </a:pPr>
+            <a:r>
+              <a:t>• Algorithm: Algorithmic volumetric rule engine executing in &lt; 5 µs.</a:t>
+            </a:r>
+          </a:p>
+          <a:p>
+            <a:pPr>
+              <a:spcAft>
+                <a:spcPts val="400"/>
+              </a:spcAft>
+              <a:defRPr sz="900">
+                <a:solidFill>
+                  <a:srgbClr val="0F172A"/>
+                </a:solidFill>
+              </a:defRPr>
+            </a:pPr>
+            <a:r>
+              <a:t>• Features Used: Flow Packets/s, Flow Bytes/s, SYN Count, ACK Count.</a:t>
+            </a:r>
+          </a:p>
+          <a:p>
+            <a:pPr>
+              <a:spcAft>
+                <a:spcPts val="400"/>
+              </a:spcAft>
+              <a:defRPr sz="900">
+                <a:solidFill>
+                  <a:srgbClr val="0F172A"/>
+                </a:solidFill>
+              </a:defRPr>
+            </a:pPr>
+            <a:r>
+              <a:t>• Threshold Rules:</a:t>
+            </a:r>
+          </a:p>
+          <a:p>
+            <a:pPr>
+              <a:spcAft>
+                <a:spcPts val="400"/>
+              </a:spcAft>
+              <a:defRPr sz="900">
+                <a:solidFill>
+                  <a:srgbClr val="0F172A"/>
+                </a:solidFill>
+              </a:defRPr>
+            </a:pPr>
+            <a:r>
+              <a:t>  - Rule A: pps &gt; 50,000 OR Bytes/s &gt; 10 MB/s (Volumetric DDoS)</a:t>
+            </a:r>
+          </a:p>
+          <a:p>
+            <a:pPr>
+              <a:spcAft>
+                <a:spcPts val="400"/>
+              </a:spcAft>
+              <a:defRPr sz="900">
+                <a:solidFill>
+                  <a:srgbClr val="0F172A"/>
+                </a:solidFill>
+              </a:defRPr>
+            </a:pPr>
+            <a:r>
+              <a:t>  - Rule B: SYN / ACK ratio &gt; 5:1 (SYN Flood)</a:t>
+            </a:r>
+          </a:p>
+          <a:p>
+            <a:pPr>
+              <a:spcAft>
+                <a:spcPts val="400"/>
+              </a:spcAft>
+              <a:defRPr sz="900">
+                <a:solidFill>
+                  <a:srgbClr val="0F172A"/>
+                </a:solidFill>
+              </a:defRPr>
+            </a:pPr>
+            <a:r>
+              <a:t>  - Rule C: Port sweep &gt; 50 ports in &lt; 200 ms (PortScan)</a:t>
+            </a:r>
+          </a:p>
+          <a:p>
+            <a:pPr>
+              <a:spcAft>
+                <a:spcPts val="400"/>
+              </a:spcAft>
+              <a:defRPr sz="900">
+                <a:solidFill>
+                  <a:srgbClr val="0F172A"/>
+                </a:solidFill>
+              </a:defRPr>
+            </a:pPr>
+            <a:r>
+              <a:t>• Purpose: Absolute survivability during switch CPU starvation.</a:t>
             </a:r>
           </a:p>
         </p:txBody>
